--- a/03-build/pptx/C6plus_U0_docente.pptx
+++ b/03-build/pptx/C6plus_U0_docente.pptx
@@ -6191,7 +6191,7 @@
                 </a:solidFill>
                 <a:latin typeface="Inter"/>
               </a:rPr>
-              <a:t>U0 · ¡VOLVEMOS!   ·   C5 · A1 · La Ruta</a:t>
+              <a:t>U0 · ¡VOLVEMOS!   ·   C6+ · el reencuentro</a:t>
             </a:r>
           </a:p>
         </p:txBody>
@@ -6363,7 +6363,7 @@
             <a:avLst/>
           </a:prstGeom>
           <a:solidFill>
-            <a:srgbClr val="1E9E74"/>
+            <a:srgbClr val="7C56A9"/>
           </a:solidFill>
           <a:ln>
             <a:noFill/>
@@ -6482,7 +6482,7 @@
             <a:r>
               <a:rPr sz="1100" b="1">
                 <a:solidFill>
-                  <a:srgbClr val="1E9E74"/>
+                  <a:srgbClr val="7C56A9"/>
                 </a:solidFill>
                 <a:latin typeface="Inter"/>
               </a:rPr>
@@ -8386,7 +8386,7 @@
                 </a:solidFill>
                 <a:latin typeface="Inter"/>
               </a:rPr>
-              <a:t>U0 · ¡VOLVEMOS!   ·   C5 · A1 · La Ruta</a:t>
+              <a:t>U0 · ¡VOLVEMOS!   ·   C6+ · el reencuentro</a:t>
             </a:r>
           </a:p>
         </p:txBody>
@@ -9118,7 +9118,7 @@
             <a:avLst/>
           </a:prstGeom>
           <a:solidFill>
-            <a:srgbClr val="1E9E74"/>
+            <a:srgbClr val="7C56A9"/>
           </a:solidFill>
           <a:ln>
             <a:noFill/>
@@ -9237,7 +9237,7 @@
             <a:r>
               <a:rPr sz="1100" b="1">
                 <a:solidFill>
-                  <a:srgbClr val="1E9E74"/>
+                  <a:srgbClr val="7C56A9"/>
                 </a:solidFill>
                 <a:latin typeface="Inter"/>
               </a:rPr>
@@ -10711,7 +10711,7 @@
                 </a:solidFill>
                 <a:latin typeface="Inter"/>
               </a:rPr>
-              <a:t>U0 · ¡VOLVEMOS!   ·   C5 · A1 · La Ruta</a:t>
+              <a:t>U0 · ¡VOLVEMOS!   ·   C6+ · el reencuentro</a:t>
             </a:r>
           </a:p>
         </p:txBody>
@@ -11337,7 +11337,7 @@
             <a:avLst/>
           </a:prstGeom>
           <a:solidFill>
-            <a:srgbClr val="1E9E74"/>
+            <a:srgbClr val="7C56A9"/>
           </a:solidFill>
           <a:ln>
             <a:noFill/>
@@ -11456,7 +11456,7 @@
             <a:r>
               <a:rPr sz="1100" b="1">
                 <a:solidFill>
-                  <a:srgbClr val="1E9E74"/>
+                  <a:srgbClr val="7C56A9"/>
                 </a:solidFill>
                 <a:latin typeface="Inter"/>
               </a:rPr>
@@ -13057,7 +13057,7 @@
                 </a:solidFill>
                 <a:latin typeface="Inter"/>
               </a:rPr>
-              <a:t>U0 · ¡VOLVEMOS!   ·   C5 · A1 · La Ruta</a:t>
+              <a:t>U0 · ¡VOLVEMOS!   ·   C6+ · el reencuentro</a:t>
             </a:r>
           </a:p>
         </p:txBody>
@@ -13365,7 +13365,7 @@
             <a:avLst/>
           </a:prstGeom>
           <a:solidFill>
-            <a:srgbClr val="1E9E74"/>
+            <a:srgbClr val="7C56A9"/>
           </a:solidFill>
           <a:ln>
             <a:noFill/>
@@ -13484,7 +13484,7 @@
             <a:r>
               <a:rPr sz="1100" b="1">
                 <a:solidFill>
-                  <a:srgbClr val="1E9E74"/>
+                  <a:srgbClr val="7C56A9"/>
                 </a:solidFill>
                 <a:latin typeface="Inter"/>
               </a:rPr>
@@ -14727,7 +14727,7 @@
                 </a:solidFill>
                 <a:latin typeface="Inter"/>
               </a:rPr>
-              <a:t>U0 · ¡VOLVEMOS!   ·   C5 · A1 · La Ruta</a:t>
+              <a:t>U0 · ¡VOLVEMOS!   ·   C6+ · el reencuentro</a:t>
             </a:r>
           </a:p>
         </p:txBody>
@@ -14982,7 +14982,7 @@
             <a:avLst/>
           </a:prstGeom>
           <a:solidFill>
-            <a:srgbClr val="1E9E74"/>
+            <a:srgbClr val="7C56A9"/>
           </a:solidFill>
           <a:ln>
             <a:noFill/>
@@ -15101,7 +15101,7 @@
             <a:r>
               <a:rPr sz="1100" b="1">
                 <a:solidFill>
-                  <a:srgbClr val="1E9E74"/>
+                  <a:srgbClr val="7C56A9"/>
                 </a:solidFill>
                 <a:latin typeface="Inter"/>
               </a:rPr>
@@ -17374,7 +17374,7 @@
                 </a:solidFill>
                 <a:latin typeface="Inter"/>
               </a:rPr>
-              <a:t>U0 · ¡VOLVEMOS!   ·   C5 · A1 · La Ruta</a:t>
+              <a:t>U0 · ¡VOLVEMOS!   ·   C6+ · el reencuentro</a:t>
             </a:r>
           </a:p>
         </p:txBody>
@@ -18318,7 +18318,7 @@
             <a:avLst/>
           </a:prstGeom>
           <a:solidFill>
-            <a:srgbClr val="1E9E74"/>
+            <a:srgbClr val="7C56A9"/>
           </a:solidFill>
           <a:ln>
             <a:noFill/>
@@ -18437,7 +18437,7 @@
             <a:r>
               <a:rPr sz="1100" b="1">
                 <a:solidFill>
-                  <a:srgbClr val="1E9E74"/>
+                  <a:srgbClr val="7C56A9"/>
                 </a:solidFill>
                 <a:latin typeface="Inter"/>
               </a:rPr>
@@ -20248,7 +20248,7 @@
                 </a:solidFill>
                 <a:latin typeface="Inter"/>
               </a:rPr>
-              <a:t>U0 · ¡VOLVEMOS!   ·   C5 · A1 · La Ruta</a:t>
+              <a:t>U0 · ¡VOLVEMOS!   ·   C6+ · el reencuentro</a:t>
             </a:r>
           </a:p>
         </p:txBody>
@@ -20980,7 +20980,7 @@
             <a:avLst/>
           </a:prstGeom>
           <a:solidFill>
-            <a:srgbClr val="1E9E74"/>
+            <a:srgbClr val="7C56A9"/>
           </a:solidFill>
           <a:ln>
             <a:noFill/>
@@ -21099,7 +21099,7 @@
             <a:r>
               <a:rPr sz="1100" b="1">
                 <a:solidFill>
-                  <a:srgbClr val="1E9E74"/>
+                  <a:srgbClr val="7C56A9"/>
                 </a:solidFill>
                 <a:latin typeface="Inter"/>
               </a:rPr>
@@ -22387,7 +22387,7 @@
                 </a:solidFill>
                 <a:latin typeface="Inter"/>
               </a:rPr>
-              <a:t>U0 · ¡VOLVEMOS!   ·   C5 · A1 · La Ruta</a:t>
+              <a:t>U0 · ¡VOLVEMOS!   ·   C6+ · el reencuentro</a:t>
             </a:r>
           </a:p>
         </p:txBody>
@@ -22854,7 +22854,7 @@
             <a:avLst/>
           </a:prstGeom>
           <a:solidFill>
-            <a:srgbClr val="1E9E74"/>
+            <a:srgbClr val="7C56A9"/>
           </a:solidFill>
           <a:ln>
             <a:noFill/>
@@ -22973,7 +22973,7 @@
             <a:r>
               <a:rPr sz="1100" b="1">
                 <a:solidFill>
-                  <a:srgbClr val="1E9E74"/>
+                  <a:srgbClr val="7C56A9"/>
                 </a:solidFill>
                 <a:latin typeface="Inter"/>
               </a:rPr>
@@ -24387,7 +24387,7 @@
                 </a:solidFill>
                 <a:latin typeface="Inter"/>
               </a:rPr>
-              <a:t>U0 · ¡VOLVEMOS!   ·   C5 · A1 · La Ruta</a:t>
+              <a:t>U0 · ¡VOLVEMOS!   ·   C6+ · el reencuentro</a:t>
             </a:r>
           </a:p>
         </p:txBody>
@@ -26270,7 +26270,7 @@
                 </a:solidFill>
                 <a:latin typeface="Inter"/>
               </a:rPr>
-              <a:t>U0 · ¡VOLVEMOS!   ·   C5 · A1 · La Ruta</a:t>
+              <a:t>U0 · ¡VOLVEMOS!   ·   C6+ · el reencuentro</a:t>
             </a:r>
           </a:p>
         </p:txBody>
@@ -26442,7 +26442,7 @@
             <a:avLst/>
           </a:prstGeom>
           <a:solidFill>
-            <a:srgbClr val="1E9E74"/>
+            <a:srgbClr val="7C56A9"/>
           </a:solidFill>
           <a:ln>
             <a:noFill/>
@@ -26561,7 +26561,7 @@
             <a:r>
               <a:rPr sz="1100" b="1">
                 <a:solidFill>
-                  <a:srgbClr val="1E9E74"/>
+                  <a:srgbClr val="7C56A9"/>
                 </a:solidFill>
                 <a:latin typeface="Inter"/>
               </a:rPr>
@@ -28251,7 +28251,7 @@
                 </a:solidFill>
                 <a:latin typeface="Inter"/>
               </a:rPr>
-              <a:t>U0 · ¡VOLVEMOS!   ·   C5 · A1 · La Ruta</a:t>
+              <a:t>U0 · ¡VOLVEMOS!   ·   C6+ · el reencuentro</a:t>
             </a:r>
           </a:p>
         </p:txBody>
@@ -28983,7 +28983,7 @@
             <a:avLst/>
           </a:prstGeom>
           <a:solidFill>
-            <a:srgbClr val="1E9E74"/>
+            <a:srgbClr val="7C56A9"/>
           </a:solidFill>
           <a:ln>
             <a:noFill/>
@@ -29102,7 +29102,7 @@
             <a:r>
               <a:rPr sz="1100" b="1">
                 <a:solidFill>
-                  <a:srgbClr val="1E9E74"/>
+                  <a:srgbClr val="7C56A9"/>
                 </a:solidFill>
                 <a:latin typeface="Inter"/>
               </a:rPr>
@@ -31763,7 +31763,7 @@
                 </a:solidFill>
                 <a:latin typeface="Inter"/>
               </a:rPr>
-              <a:t>U0 · ¡VOLVEMOS!   ·   C5 · A1 · La Ruta</a:t>
+              <a:t>U0 · ¡VOLVEMOS!   ·   C6+ · el reencuentro</a:t>
             </a:r>
           </a:p>
         </p:txBody>
@@ -31935,7 +31935,7 @@
             <a:avLst/>
           </a:prstGeom>
           <a:solidFill>
-            <a:srgbClr val="1E9E74"/>
+            <a:srgbClr val="7C56A9"/>
           </a:solidFill>
           <a:ln>
             <a:noFill/>
@@ -32054,7 +32054,7 @@
             <a:r>
               <a:rPr sz="1100" b="1">
                 <a:solidFill>
-                  <a:srgbClr val="1E9E74"/>
+                  <a:srgbClr val="7C56A9"/>
                 </a:solidFill>
                 <a:latin typeface="Inter"/>
               </a:rPr>
@@ -33709,7 +33709,7 @@
                 </a:solidFill>
                 <a:latin typeface="Inter"/>
               </a:rPr>
-              <a:t>U0 · ¡VOLVEMOS!   ·   C5 · A1 · La Ruta</a:t>
+              <a:t>U0 · ¡VOLVEMOS!   ·   C6+ · el reencuentro</a:t>
             </a:r>
           </a:p>
         </p:txBody>
@@ -34621,7 +34621,7 @@
                 </a:solidFill>
                 <a:latin typeface="Inter"/>
               </a:rPr>
-              <a:t>Tarea «Tarjeta de reencuentro» met rúbrica (4 criteria). LPD 1·2·3·4·7 + 5 (cultura). U0 = opstap, geen zware toetsing.</a:t>
+              <a:t>Tarea «Tarjeta de reencuentro» met rúbrica (4 criteria). LPD (III-Spa-d): presentarse 4·5·9 · datos 7·3 · países/nacionalidades 7·8·5 · ser/verbos 8·3 · género 8·7. U0 = opstap, geen zware toetsing.</a:t>
             </a:r>
           </a:p>
         </p:txBody>
@@ -34719,7 +34719,7 @@
                 </a:solidFill>
                 <a:latin typeface="Inter"/>
               </a:rPr>
-              <a:t>U0 · ¡VOLVEMOS!   ·   C5 · A1 · La Ruta</a:t>
+              <a:t>U0 · ¡VOLVEMOS!   ·   C6+ · el reencuentro</a:t>
             </a:r>
           </a:p>
         </p:txBody>
@@ -34891,7 +34891,7 @@
             <a:avLst/>
           </a:prstGeom>
           <a:solidFill>
-            <a:srgbClr val="1E9E74"/>
+            <a:srgbClr val="7C56A9"/>
           </a:solidFill>
           <a:ln>
             <a:noFill/>
@@ -35010,7 +35010,7 @@
             <a:r>
               <a:rPr sz="1100" b="1">
                 <a:solidFill>
-                  <a:srgbClr val="1E9E74"/>
+                  <a:srgbClr val="7C56A9"/>
                 </a:solidFill>
                 <a:latin typeface="Inter"/>
               </a:rPr>
@@ -35489,7 +35489,7 @@
             </a:avLst>
           </a:prstGeom>
           <a:solidFill>
-            <a:srgbClr val="14B8A6"/>
+            <a:srgbClr val="64748B"/>
           </a:solidFill>
           <a:ln>
             <a:noFill/>
@@ -37663,7 +37663,7 @@
                 </a:solidFill>
                 <a:latin typeface="Inter"/>
               </a:rPr>
-              <a:t>U0 · ¡VOLVEMOS!   ·   C5 · A1 · La Ruta</a:t>
+              <a:t>U0 · ¡VOLVEMOS!   ·   C6+ · el reencuentro</a:t>
             </a:r>
           </a:p>
         </p:txBody>
@@ -37971,7 +37971,7 @@
             <a:avLst/>
           </a:prstGeom>
           <a:solidFill>
-            <a:srgbClr val="1E9E74"/>
+            <a:srgbClr val="7C56A9"/>
           </a:solidFill>
           <a:ln>
             <a:noFill/>
@@ -38090,7 +38090,7 @@
             <a:r>
               <a:rPr sz="1100" b="1">
                 <a:solidFill>
-                  <a:srgbClr val="1E9E74"/>
+                  <a:srgbClr val="7C56A9"/>
                 </a:solidFill>
                 <a:latin typeface="Inter"/>
               </a:rPr>
@@ -38569,7 +38569,7 @@
             </a:avLst>
           </a:prstGeom>
           <a:solidFill>
-            <a:srgbClr val="14B8A6"/>
+            <a:srgbClr val="64748B"/>
           </a:solidFill>
           <a:ln>
             <a:noFill/>
@@ -38841,7 +38841,7 @@
             <a:r>
               <a:rPr sz="2200" b="1" i="0">
                 <a:solidFill>
-                  <a:srgbClr val="1E9E74"/>
+                  <a:srgbClr val="B4309A"/>
                 </a:solidFill>
                 <a:latin typeface="Bricolage Grotesque"/>
               </a:rPr>
@@ -38868,7 +38868,7 @@
             <a:r>
               <a:rPr sz="2200" b="1" i="0">
                 <a:solidFill>
-                  <a:srgbClr val="14B8A6"/>
+                  <a:srgbClr val="64748B"/>
                 </a:solidFill>
                 <a:latin typeface="Bricolage Grotesque"/>
               </a:rPr>
@@ -39800,7 +39800,7 @@
                 </a:solidFill>
                 <a:latin typeface="Inter"/>
               </a:rPr>
-              <a:t>U0 · ¡VOLVEMOS!   ·   C5 · A1 · La Ruta</a:t>
+              <a:t>U0 · ¡VOLVEMOS!   ·   C6+ · el reencuentro</a:t>
             </a:r>
           </a:p>
         </p:txBody>
@@ -40108,7 +40108,7 @@
             <a:avLst/>
           </a:prstGeom>
           <a:solidFill>
-            <a:srgbClr val="1E9E74"/>
+            <a:srgbClr val="7C56A9"/>
           </a:solidFill>
           <a:ln>
             <a:noFill/>
@@ -40227,7 +40227,7 @@
             <a:r>
               <a:rPr sz="1100" b="1">
                 <a:solidFill>
-                  <a:srgbClr val="1E9E74"/>
+                  <a:srgbClr val="7C56A9"/>
                 </a:solidFill>
                 <a:latin typeface="Inter"/>
               </a:rPr>
@@ -41641,7 +41641,7 @@
                 </a:solidFill>
                 <a:latin typeface="Inter"/>
               </a:rPr>
-              <a:t>U0 · ¡VOLVEMOS!   ·   C5 · A1 · La Ruta</a:t>
+              <a:t>U0 · ¡VOLVEMOS!   ·   C6+ · el reencuentro</a:t>
             </a:r>
           </a:p>
         </p:txBody>
@@ -42267,7 +42267,7 @@
             <a:avLst/>
           </a:prstGeom>
           <a:solidFill>
-            <a:srgbClr val="1E9E74"/>
+            <a:srgbClr val="7C56A9"/>
           </a:solidFill>
           <a:ln>
             <a:noFill/>
@@ -42386,7 +42386,7 @@
             <a:r>
               <a:rPr sz="1100" b="1">
                 <a:solidFill>
-                  <a:srgbClr val="1E9E74"/>
+                  <a:srgbClr val="7C56A9"/>
                 </a:solidFill>
                 <a:latin typeface="Inter"/>
               </a:rPr>
@@ -43463,7 +43463,7 @@
             <a:r>
               <a:rPr sz="1300" b="1" i="0">
                 <a:solidFill>
-                  <a:srgbClr val="14B8A6"/>
+                  <a:srgbClr val="64748B"/>
                 </a:solidFill>
                 <a:latin typeface="Inter"/>
               </a:rPr>
@@ -43923,7 +43923,7 @@
                 </a:solidFill>
                 <a:latin typeface="Inter"/>
               </a:rPr>
-              <a:t>U0 · ¡VOLVEMOS!   ·   C5 · A1 · La Ruta</a:t>
+              <a:t>U0 · ¡VOLVEMOS!   ·   C6+ · el reencuentro</a:t>
             </a:r>
           </a:p>
         </p:txBody>
@@ -44549,7 +44549,7 @@
             <a:avLst/>
           </a:prstGeom>
           <a:solidFill>
-            <a:srgbClr val="1E9E74"/>
+            <a:srgbClr val="7C56A9"/>
           </a:solidFill>
           <a:ln>
             <a:noFill/>
@@ -44668,7 +44668,7 @@
             <a:r>
               <a:rPr sz="1100" b="1">
                 <a:solidFill>
-                  <a:srgbClr val="1E9E74"/>
+                  <a:srgbClr val="7C56A9"/>
                 </a:solidFill>
                 <a:latin typeface="Inter"/>
               </a:rPr>
@@ -45147,7 +45147,7 @@
             </a:avLst>
           </a:prstGeom>
           <a:solidFill>
-            <a:srgbClr val="14B8A6"/>
+            <a:srgbClr val="64748B"/>
           </a:solidFill>
           <a:ln>
             <a:noFill/>
@@ -46850,7 +46850,7 @@
                 </a:solidFill>
                 <a:latin typeface="Inter"/>
               </a:rPr>
-              <a:t>U0 · ¡VOLVEMOS!   ·   C5 · A1 · La Ruta</a:t>
+              <a:t>U0 · ¡VOLVEMOS!   ·   C6+ · el reencuentro</a:t>
             </a:r>
           </a:p>
         </p:txBody>
@@ -47158,7 +47158,7 @@
             <a:avLst/>
           </a:prstGeom>
           <a:solidFill>
-            <a:srgbClr val="1E9E74"/>
+            <a:srgbClr val="7C56A9"/>
           </a:solidFill>
           <a:ln>
             <a:noFill/>
@@ -47277,7 +47277,7 @@
             <a:r>
               <a:rPr sz="1100" b="1">
                 <a:solidFill>
-                  <a:srgbClr val="1E9E74"/>
+                  <a:srgbClr val="7C56A9"/>
                 </a:solidFill>
                 <a:latin typeface="Inter"/>
               </a:rPr>
@@ -48691,7 +48691,7 @@
                 </a:solidFill>
                 <a:latin typeface="Inter"/>
               </a:rPr>
-              <a:t>U0 · ¡VOLVEMOS!   ·   C5 · A1 · La Ruta</a:t>
+              <a:t>U0 · ¡VOLVEMOS!   ·   C6+ · el reencuentro</a:t>
             </a:r>
           </a:p>
         </p:txBody>
@@ -49317,7 +49317,7 @@
             <a:avLst/>
           </a:prstGeom>
           <a:solidFill>
-            <a:srgbClr val="1E9E74"/>
+            <a:srgbClr val="7C56A9"/>
           </a:solidFill>
           <a:ln>
             <a:noFill/>
@@ -49436,7 +49436,7 @@
             <a:r>
               <a:rPr sz="1100" b="1">
                 <a:solidFill>
-                  <a:srgbClr val="1E9E74"/>
+                  <a:srgbClr val="7C56A9"/>
                 </a:solidFill>
                 <a:latin typeface="Inter"/>
               </a:rPr>
@@ -50767,7 +50767,7 @@
                 </a:solidFill>
                 <a:latin typeface="Inter"/>
               </a:rPr>
-              <a:t>U0 · ¡VOLVEMOS!   ·   C5 · A1 · La Ruta</a:t>
+              <a:t>U0 · ¡VOLVEMOS!   ·   C6+ · el reencuentro</a:t>
             </a:r>
           </a:p>
         </p:txBody>

--- a/03-build/pptx/C6plus_U0_docente.pptx
+++ b/03-build/pptx/C6plus_U0_docente.pptx
@@ -6849,7 +6849,6 @@
               <a:srgbClr val="E4E3DE"/>
             </a:solidFill>
           </a:ln>
-          <a:effectLst/>
           <a:effectLst>
             <a:outerShdw blurRad="90000" dist="38000" dir="5400000" rotWithShape="0">
               <a:srgbClr val="20242E">
@@ -7173,7 +7172,6 @@
               <a:srgbClr val="E4E3DE"/>
             </a:solidFill>
           </a:ln>
-          <a:effectLst/>
           <a:effectLst>
             <a:outerShdw blurRad="90000" dist="38000" dir="5400000" rotWithShape="0">
               <a:srgbClr val="20242E">
@@ -7497,7 +7495,6 @@
               <a:srgbClr val="E4E3DE"/>
             </a:solidFill>
           </a:ln>
-          <a:effectLst/>
           <a:effectLst>
             <a:outerShdw blurRad="90000" dist="38000" dir="5400000" rotWithShape="0">
               <a:srgbClr val="20242E">
@@ -7821,7 +7818,6 @@
               <a:srgbClr val="E4E3DE"/>
             </a:solidFill>
           </a:ln>
-          <a:effectLst/>
           <a:effectLst>
             <a:outerShdw blurRad="90000" dist="38000" dir="5400000" rotWithShape="0">
               <a:srgbClr val="20242E">
@@ -9604,7 +9600,6 @@
               <a:srgbClr val="7C56A9"/>
             </a:solidFill>
           </a:ln>
-          <a:effectLst/>
           <a:effectLst>
             <a:outerShdw blurRad="90000" dist="38000" dir="5400000" rotWithShape="0">
               <a:srgbClr val="20242E">
@@ -9749,7 +9744,6 @@
               <a:srgbClr val="7C56A9"/>
             </a:solidFill>
           </a:ln>
-          <a:effectLst/>
           <a:effectLst>
             <a:outerShdw blurRad="90000" dist="38000" dir="5400000" rotWithShape="0">
               <a:srgbClr val="20242E">
@@ -9894,7 +9888,6 @@
               <a:srgbClr val="7C56A9"/>
             </a:solidFill>
           </a:ln>
-          <a:effectLst/>
           <a:effectLst>
             <a:outerShdw blurRad="90000" dist="38000" dir="5400000" rotWithShape="0">
               <a:srgbClr val="20242E">
@@ -10039,7 +10032,6 @@
               <a:srgbClr val="7C56A9"/>
             </a:solidFill>
           </a:ln>
-          <a:effectLst/>
           <a:effectLst>
             <a:outerShdw blurRad="90000" dist="38000" dir="5400000" rotWithShape="0">
               <a:srgbClr val="20242E">
@@ -10184,7 +10176,6 @@
               <a:srgbClr val="7C56A9"/>
             </a:solidFill>
           </a:ln>
-          <a:effectLst/>
           <a:effectLst>
             <a:outerShdw blurRad="90000" dist="38000" dir="5400000" rotWithShape="0">
               <a:srgbClr val="20242E">
@@ -10329,7 +10320,6 @@
               <a:srgbClr val="7C56A9"/>
             </a:solidFill>
           </a:ln>
-          <a:effectLst/>
           <a:effectLst>
             <a:outerShdw blurRad="90000" dist="38000" dir="5400000" rotWithShape="0">
               <a:srgbClr val="20242E">
@@ -13851,7 +13841,6 @@
               <a:srgbClr val="E4E3DE"/>
             </a:solidFill>
           </a:ln>
-          <a:effectLst/>
           <a:effectLst>
             <a:outerShdw blurRad="90000" dist="38000" dir="5400000" rotWithShape="0">
               <a:srgbClr val="20242E">
@@ -14530,7 +14519,6 @@
               <a:srgbClr val="7C56A9"/>
             </a:solidFill>
           </a:ln>
-          <a:effectLst/>
           <a:effectLst>
             <a:outerShdw blurRad="90000" dist="38000" dir="5400000" rotWithShape="0">
               <a:srgbClr val="20242E">
@@ -21466,7 +21454,6 @@
               <a:srgbClr val="7C56A9"/>
             </a:solidFill>
           </a:ln>
-          <a:effectLst/>
           <a:effectLst>
             <a:outerShdw blurRad="90000" dist="38000" dir="5400000" rotWithShape="0">
               <a:srgbClr val="20242E">
@@ -21700,7 +21687,6 @@
               <a:srgbClr val="7C56A9"/>
             </a:solidFill>
           </a:ln>
-          <a:effectLst/>
           <a:effectLst>
             <a:outerShdw blurRad="90000" dist="38000" dir="5400000" rotWithShape="0">
               <a:srgbClr val="20242E">
@@ -21934,7 +21920,6 @@
               <a:srgbClr val="7C56A9"/>
             </a:solidFill>
           </a:ln>
-          <a:effectLst/>
           <a:effectLst>
             <a:outerShdw blurRad="90000" dist="38000" dir="5400000" rotWithShape="0">
               <a:srgbClr val="20242E">
@@ -25499,7 +25484,6 @@
               <a:srgbClr val="7C56A9"/>
             </a:solidFill>
           </a:ln>
-          <a:effectLst/>
           <a:effectLst>
             <a:outerShdw blurRad="90000" dist="38000" dir="5400000" rotWithShape="0">
               <a:srgbClr val="20242E">
@@ -25820,7 +25804,6 @@
               <a:srgbClr val="E4E3DE"/>
             </a:solidFill>
           </a:ln>
-          <a:effectLst/>
           <a:effectLst>
             <a:outerShdw blurRad="90000" dist="38000" dir="5400000" rotWithShape="0">
               <a:srgbClr val="20242E">
@@ -26031,7 +26014,6 @@
               <a:srgbClr val="E4E3DE"/>
             </a:solidFill>
           </a:ln>
-          <a:effectLst/>
           <a:effectLst>
             <a:outerShdw blurRad="90000" dist="38000" dir="5400000" rotWithShape="0">
               <a:srgbClr val="20242E">
@@ -27116,7 +27098,6 @@
               <a:srgbClr val="7C56A9"/>
             </a:solidFill>
           </a:ln>
-          <a:effectLst/>
           <a:effectLst>
             <a:outerShdw blurRad="90000" dist="38000" dir="5400000" rotWithShape="0">
               <a:srgbClr val="20242E">
@@ -27305,7 +27286,6 @@
               <a:srgbClr val="E4E3DE"/>
             </a:solidFill>
           </a:ln>
-          <a:effectLst/>
           <a:effectLst>
             <a:outerShdw blurRad="90000" dist="38000" dir="5400000" rotWithShape="0">
               <a:srgbClr val="20242E">
@@ -27538,7 +27518,6 @@
               <a:srgbClr val="E4E3DE"/>
             </a:solidFill>
           </a:ln>
-          <a:effectLst/>
           <a:effectLst>
             <a:outerShdw blurRad="90000" dist="38000" dir="5400000" rotWithShape="0">
               <a:srgbClr val="20242E">
@@ -28635,7 +28614,6 @@
               <a:srgbClr val="7C56A9"/>
             </a:solidFill>
           </a:ln>
-          <a:effectLst/>
           <a:effectLst>
             <a:outerShdw blurRad="90000" dist="38000" dir="5400000" rotWithShape="0">
               <a:srgbClr val="20242E">
@@ -28938,7 +28916,6 @@
               <a:srgbClr val="7C56A9"/>
             </a:solidFill>
           </a:ln>
-          <a:effectLst/>
           <a:effectLst>
             <a:outerShdw blurRad="90000" dist="38000" dir="5400000" rotWithShape="0">
               <a:srgbClr val="20242E">
@@ -29241,7 +29218,6 @@
               <a:srgbClr val="7C56A9"/>
             </a:solidFill>
           </a:ln>
-          <a:effectLst/>
           <a:effectLst>
             <a:outerShdw blurRad="90000" dist="38000" dir="5400000" rotWithShape="0">
               <a:srgbClr val="20242E">
@@ -29544,7 +29520,6 @@
               <a:srgbClr val="7C56A9"/>
             </a:solidFill>
           </a:ln>
-          <a:effectLst/>
           <a:effectLst>
             <a:outerShdw blurRad="90000" dist="38000" dir="5400000" rotWithShape="0">
               <a:srgbClr val="20242E">
@@ -29847,7 +29822,6 @@
               <a:srgbClr val="7C56A9"/>
             </a:solidFill>
           </a:ln>
-          <a:effectLst/>
           <a:effectLst>
             <a:outerShdw blurRad="90000" dist="38000" dir="5400000" rotWithShape="0">
               <a:srgbClr val="20242E">
@@ -30150,7 +30124,6 @@
               <a:srgbClr val="5B3E83"/>
             </a:solidFill>
           </a:ln>
-          <a:effectLst/>
           <a:effectLst>
             <a:outerShdw blurRad="90000" dist="38000" dir="5400000" rotWithShape="0">
               <a:srgbClr val="20242E">
@@ -30453,7 +30426,6 @@
               <a:srgbClr val="5B3E83"/>
             </a:solidFill>
           </a:ln>
-          <a:effectLst/>
           <a:effectLst>
             <a:outerShdw blurRad="90000" dist="38000" dir="5400000" rotWithShape="0">
               <a:srgbClr val="20242E">
@@ -30756,7 +30728,6 @@
               <a:srgbClr val="5B3E83"/>
             </a:solidFill>
           </a:ln>
-          <a:effectLst/>
           <a:effectLst>
             <a:outerShdw blurRad="90000" dist="38000" dir="5400000" rotWithShape="0">
               <a:srgbClr val="20242E">
@@ -35553,7 +35524,6 @@
           <a:ln>
             <a:noFill/>
           </a:ln>
-          <a:effectLst/>
           <a:effectLst>
             <a:outerShdw blurRad="90000" dist="38000" dir="5400000" rotWithShape="0">
               <a:srgbClr val="20242E">
@@ -37266,7 +37236,6 @@
           <a:ln>
             <a:noFill/>
           </a:ln>
-          <a:effectLst/>
           <a:effectLst>
             <a:outerShdw blurRad="90000" dist="38000" dir="5400000" rotWithShape="0">
               <a:srgbClr val="20242E">
@@ -37409,7 +37378,6 @@
           <a:ln>
             <a:noFill/>
           </a:ln>
-          <a:effectLst/>
           <a:effectLst>
             <a:outerShdw blurRad="90000" dist="38000" dir="5400000" rotWithShape="0">
               <a:srgbClr val="20242E">
@@ -37552,7 +37520,6 @@
           <a:ln>
             <a:noFill/>
           </a:ln>
-          <a:effectLst/>
           <a:effectLst>
             <a:outerShdw blurRad="90000" dist="38000" dir="5400000" rotWithShape="0">
               <a:srgbClr val="20242E">
@@ -37695,7 +37662,6 @@
           <a:ln>
             <a:noFill/>
           </a:ln>
-          <a:effectLst/>
           <a:effectLst>
             <a:outerShdw blurRad="90000" dist="38000" dir="5400000" rotWithShape="0">
               <a:srgbClr val="20242E">
@@ -37838,7 +37804,6 @@
           <a:ln>
             <a:noFill/>
           </a:ln>
-          <a:effectLst/>
           <a:effectLst>
             <a:outerShdw blurRad="90000" dist="38000" dir="5400000" rotWithShape="0">
               <a:srgbClr val="20242E">
@@ -42089,7 +42054,6 @@
           <a:ln>
             <a:noFill/>
           </a:ln>
-          <a:effectLst/>
           <a:effectLst>
             <a:outerShdw blurRad="90000" dist="38000" dir="5400000" rotWithShape="0">
               <a:srgbClr val="20242E">
@@ -45887,7 +45851,6 @@
               <a:srgbClr val="7C56A9"/>
             </a:solidFill>
           </a:ln>
-          <a:effectLst/>
           <a:effectLst>
             <a:outerShdw blurRad="90000" dist="38000" dir="5400000" rotWithShape="0">
               <a:srgbClr val="20242E">
@@ -46032,7 +45995,6 @@
               <a:srgbClr val="7C56A9"/>
             </a:solidFill>
           </a:ln>
-          <a:effectLst/>
           <a:effectLst>
             <a:outerShdw blurRad="90000" dist="38000" dir="5400000" rotWithShape="0">
               <a:srgbClr val="20242E">
@@ -46177,7 +46139,6 @@
               <a:srgbClr val="7C56A9"/>
             </a:solidFill>
           </a:ln>
-          <a:effectLst/>
           <a:effectLst>
             <a:outerShdw blurRad="90000" dist="38000" dir="5400000" rotWithShape="0">
               <a:srgbClr val="20242E">
@@ -46322,7 +46283,6 @@
               <a:srgbClr val="7C56A9"/>
             </a:solidFill>
           </a:ln>
-          <a:effectLst/>
           <a:effectLst>
             <a:outerShdw blurRad="90000" dist="38000" dir="5400000" rotWithShape="0">
               <a:srgbClr val="20242E">
@@ -46467,7 +46427,6 @@
               <a:srgbClr val="7C56A9"/>
             </a:solidFill>
           </a:ln>
-          <a:effectLst/>
           <a:effectLst>
             <a:outerShdw blurRad="90000" dist="38000" dir="5400000" rotWithShape="0">
               <a:srgbClr val="20242E">
@@ -46612,7 +46571,6 @@
               <a:srgbClr val="7C56A9"/>
             </a:solidFill>
           </a:ln>
-          <a:effectLst/>
           <a:effectLst>
             <a:outerShdw blurRad="90000" dist="38000" dir="5400000" rotWithShape="0">
               <a:srgbClr val="20242E">
@@ -48667,7 +48625,6 @@
           <a:ln>
             <a:noFill/>
           </a:ln>
-          <a:effectLst/>
           <a:effectLst>
             <a:outerShdw blurRad="90000" dist="38000" dir="5400000" rotWithShape="0">
               <a:srgbClr val="20242E">
@@ -48801,7 +48758,6 @@
           <a:ln>
             <a:noFill/>
           </a:ln>
-          <a:effectLst/>
           <a:effectLst>
             <a:outerShdw blurRad="90000" dist="38000" dir="5400000" rotWithShape="0">
               <a:srgbClr val="20242E">
@@ -52937,7 +52893,6 @@
               <a:srgbClr val="7C56A9"/>
             </a:solidFill>
           </a:ln>
-          <a:effectLst/>
           <a:effectLst>
             <a:outerShdw blurRad="90000" dist="38000" dir="5400000" rotWithShape="0">
               <a:srgbClr val="20242E">

--- a/03-build/pptx/C6plus_U0_docente.pptx
+++ b/03-build/pptx/C6plus_U0_docente.pptx
@@ -11,6 +11,9 @@
     <p:sldId id="259" r:id="rId11"/>
     <p:sldId id="260" r:id="rId12"/>
     <p:sldId id="261" r:id="rId13"/>
+    <p:sldId id="279" r:id="rId31"/>
+    <p:sldId id="280" r:id="rId32"/>
+    <p:sldId id="281" r:id="rId33"/>
     <p:sldId id="262" r:id="rId14"/>
     <p:sldId id="263" r:id="rId15"/>
     <p:sldId id="264" r:id="rId16"/>
@@ -1750,6 +1753,255 @@
           </p:nvPr>
         </p:nvSpPr>
         <p:spPr/>
+      </p:sp>
+    </p:spTree>
+  </p:cSld>
+  <p:clrMapOvr>
+    <a:masterClrMapping/>
+  </p:clrMapOvr>
+</p:notes>
+</file>
+
+<file path=ppt/notesSlides/notesSlide24.xml><?xml version="1.0" encoding="utf-8"?>
+<p:notes xmlns:a="http://schemas.openxmlformats.org/drawingml/2006/main" xmlns:p="http://schemas.openxmlformats.org/presentationml/2006/main" xmlns:r="http://schemas.openxmlformats.org/officeDocument/2006/relationships">
+  <p:cSld>
+    <p:spTree>
+      <p:nvGrpSpPr>
+        <p:cNvPr id="1" name=""/>
+        <p:cNvGrpSpPr/>
+        <p:nvPr/>
+      </p:nvGrpSpPr>
+      <p:grpSpPr>
+        <a:xfrm>
+          <a:off x="0" y="0"/>
+          <a:ext cx="0" cy="0"/>
+          <a:chOff x="0" y="0"/>
+          <a:chExt cx="0" cy="0"/>
+        </a:xfrm>
+      </p:grpSpPr>
+      <p:sp>
+        <p:nvSpPr>
+          <p:cNvPr id="2" name="Slide Image Placeholder 1"/>
+          <p:cNvSpPr>
+            <a:spLocks noGrp="1"/>
+          </p:cNvSpPr>
+          <p:nvPr>
+            <p:ph type="sldImg" idx="2"/>
+          </p:nvPr>
+        </p:nvSpPr>
+        <p:spPr/>
+      </p:sp>
+      <p:sp>
+        <p:nvSpPr>
+          <p:cNvPr id="3" name="Notes Placeholder 2"/>
+          <p:cNvSpPr>
+            <a:spLocks noGrp="1"/>
+          </p:cNvSpPr>
+          <p:nvPr>
+            <p:ph type="body" idx="3" sz="quarter"/>
+          </p:nvPr>
+        </p:nvSpPr>
+        <p:spPr/>
+        <p:txBody>
+          <a:bodyPr/>
+          <a:lstStyle/>
+          <a:p>
+            <a:r>
+              <a:t>RETO 3 · La entrevista de trabajo absurda — 🎭 simulatie met beperking</a:t>
+            </a:r>
+          </a:p>
+          <a:p>
+            <a:r>
+              <a:t>OPDRACHT: Doe het sollicitatiegesprek. Alles in het presente, met één argument per antwoord.</a:t>
+            </a:r>
+          </a:p>
+          <a:p>
+            <a:r>
+              <a:t>DE REGEL: Alles in het presente — geen verleden, geen toekomst. En op elke vraag antwoord je met een reden («porque…»), nooit met alleen «sí».</a:t>
+            </a:r>
+          </a:p>
+          <a:p>
+            <a:r>
+              <a:t>VERLOOP: Elegid un trabajo absurdo. | El entrevistador elige cinco preguntas. | El candidato contesta en presente, con porque. | Cambiad de papel. | La clase decide quién contrata a quién.</a:t>
+            </a:r>
+          </a:p>
+          <a:p>
+            <a:r>
+              <a:t>SLEUTEL: De usted-vorm in de vragen tegenover de yo-vorm in de antwoorden is de eigenlijke drill: elke beurt oefent twee persoonsvormen tegelijk.  ||  «¿Cuál es su mayor defecto?» is de moeilijkste: het antwoord vraagt om een «pero»-zin, en dat is precies de conector die het leerplan wil.  ||  Het absurde is geen decor maar een didactisch middel: niemand kan een voorbereid antwoord uit het hoofd opzeggen over pandaverzorging, dus iedereen moet echt formuleren.</a:t>
+            </a:r>
+          </a:p>
+          <a:p>
+            <a:r>
+              <a:t>NOTA: Werkt sterk in de eerste weken: er is geen goed antwoord, dus zij-instromers en doorstromers staan even sterk.</a:t>
+            </a:r>
+          </a:p>
+        </p:txBody>
+      </p:sp>
+    </p:spTree>
+  </p:cSld>
+  <p:clrMapOvr>
+    <a:masterClrMapping/>
+  </p:clrMapOvr>
+</p:notes>
+</file>
+
+<file path=ppt/notesSlides/notesSlide25.xml><?xml version="1.0" encoding="utf-8"?>
+<p:notes xmlns:a="http://schemas.openxmlformats.org/drawingml/2006/main" xmlns:p="http://schemas.openxmlformats.org/presentationml/2006/main" xmlns:r="http://schemas.openxmlformats.org/officeDocument/2006/relationships">
+  <p:cSld>
+    <p:spTree>
+      <p:nvGrpSpPr>
+        <p:cNvPr id="1" name=""/>
+        <p:cNvGrpSpPr/>
+        <p:nvPr/>
+      </p:nvGrpSpPr>
+      <p:grpSpPr>
+        <a:xfrm>
+          <a:off x="0" y="0"/>
+          <a:ext cx="0" cy="0"/>
+          <a:chOff x="0" y="0"/>
+          <a:chExt cx="0" cy="0"/>
+        </a:xfrm>
+      </p:grpSpPr>
+      <p:sp>
+        <p:nvSpPr>
+          <p:cNvPr id="2" name="Slide Image Placeholder 1"/>
+          <p:cNvSpPr>
+            <a:spLocks noGrp="1"/>
+          </p:cNvSpPr>
+          <p:nvPr>
+            <p:ph type="sldImg" idx="2"/>
+          </p:nvPr>
+        </p:nvSpPr>
+        <p:spPr/>
+      </p:sp>
+      <p:sp>
+        <p:nvSpPr>
+          <p:cNvPr id="3" name="Notes Placeholder 2"/>
+          <p:cNvSpPr>
+            <a:spLocks noGrp="1"/>
+          </p:cNvSpPr>
+          <p:nvPr>
+            <p:ph type="body" idx="3" sz="quarter"/>
+          </p:nvPr>
+        </p:nvSpPr>
+        <p:spPr/>
+        <p:txBody>
+          <a:bodyPr/>
+          <a:lstStyle/>
+          <a:p>
+            <a:r>
+              <a:t>RETO 9 · Un país en cinco datos — 🔬 onderzoek &amp; data</a:t>
+            </a:r>
+          </a:p>
+          <a:p>
+            <a:r>
+              <a:t>OPDRACHT: Presenteer je land in vijf cijfers. De klas raadt welk het is.</a:t>
+            </a:r>
+          </a:p>
+          <a:p>
+            <a:r>
+              <a:t>DE REGEL: De landnaam, de hoofdstad en de vlag zijn verboden. Alleen cijfers, en elk cijfer krijgt een zin met een werkwoord — een lijstje getallen is geen presentatie.</a:t>
+            </a:r>
+          </a:p>
+          <a:p>
+            <a:r>
+              <a:t>VERLOOP: Elige un país hispanohablante. | Busca cinco cifras de verdad. | Escribe una frase por cifra. | Presenta. La clase adivina. | ¿Han acertado antes del quinto dato? Eran demasiado fáciles.</a:t>
+            </a:r>
+          </a:p>
+          <a:p>
+            <a:r>
+              <a:t>SLEUTEL: Het voorbeeld is Paraguay: binnenland, twee officiële talen, guaraní bij bijna iedereen. Laat het pas zien ná de eerste ronde, anders kiest de halve klas datzelfde land.  ||  Van makkelijk naar moeilijk ordenen is de kunst: begin met het cijfer dat het minst verraadt en houd het meest kenmerkende voor het laatst.  ||  Toets de vijf zinnen (werkwoord plus cijfer), niet of het geraden wordt. Te snel geraden betekent alleen dat de volgorde beter kon.</a:t>
+            </a:r>
+          </a:p>
+          <a:p>
+            <a:r>
+              <a:t>NOTA: Laat elk land maar één keer kiezen: zo dekt de klas samen de hele Spaanstalige wereld af in één les.</a:t>
+            </a:r>
+          </a:p>
+        </p:txBody>
+      </p:sp>
+    </p:spTree>
+  </p:cSld>
+  <p:clrMapOvr>
+    <a:masterClrMapping/>
+  </p:clrMapOvr>
+</p:notes>
+</file>
+
+<file path=ppt/notesSlides/notesSlide26.xml><?xml version="1.0" encoding="utf-8"?>
+<p:notes xmlns:a="http://schemas.openxmlformats.org/drawingml/2006/main" xmlns:p="http://schemas.openxmlformats.org/presentationml/2006/main" xmlns:r="http://schemas.openxmlformats.org/officeDocument/2006/relationships">
+  <p:cSld>
+    <p:spTree>
+      <p:nvGrpSpPr>
+        <p:cNvPr id="1" name=""/>
+        <p:cNvGrpSpPr/>
+        <p:nvPr/>
+      </p:nvGrpSpPr>
+      <p:grpSpPr>
+        <a:xfrm>
+          <a:off x="0" y="0"/>
+          <a:ext cx="0" cy="0"/>
+          <a:chOff x="0" y="0"/>
+          <a:chExt cx="0" cy="0"/>
+        </a:xfrm>
+      </p:grpSpPr>
+      <p:sp>
+        <p:nvSpPr>
+          <p:cNvPr id="2" name="Slide Image Placeholder 1"/>
+          <p:cNvSpPr>
+            <a:spLocks noGrp="1"/>
+          </p:cNvSpPr>
+          <p:nvPr>
+            <p:ph type="sldImg" idx="2"/>
+          </p:nvPr>
+        </p:nvSpPr>
+        <p:spPr/>
+      </p:sp>
+      <p:sp>
+        <p:nvSpPr>
+          <p:cNvPr id="3" name="Notes Placeholder 2"/>
+          <p:cNvSpPr>
+            <a:spLocks noGrp="1"/>
+          </p:cNvSpPr>
+          <p:nvPr>
+            <p:ph type="body" idx="3" sz="quarter"/>
+          </p:nvPr>
+        </p:nvSpPr>
+        <p:spPr/>
+        <p:txBody>
+          <a:bodyPr/>
+          <a:lstStyle/>
+          <a:p>
+            <a:r>
+              <a:t>RETO 10 · La clase perfecta — ⚖️ onderhandeling &amp; dilemma</a:t>
+            </a:r>
+          </a:p>
+          <a:p>
+            <a:r>
+              <a:t>OPDRACHT: Stel voor, onderhandel en stem over tien afspraken. Elk voorstel met ser of estar.</a:t>
+            </a:r>
+          </a:p>
+          <a:p>
+            <a:r>
+              <a:t>DE REGEL: Elk voorstel bevat een zin met «es» of «está» — «es importante que hablemos español» mag niet, want dat is subjuntivo; «es importante hablar español» wel. Een voorstel zonder ser of estar komt niet op het bord.</a:t>
+            </a:r>
+          </a:p>
+          <a:p>
+            <a:r>
+              <a:t>VERLOOP: Cada uno escribe dos propuestas. | Se leen en voz alta. Solo las que llevan ser o estar. | Se negocian las parecidas. | Se vota. Diez reglas, ni una más. | Se cuelgan en la pared, en español.</a:t>
+            </a:r>
+          </a:p>
+          <a:p>
+            <a:r>
+              <a:t>SLEUTEL: De grammaticale grens is hier de leerstof: «es importante + infinitivo» werkt, «es importante que + subjuntivo» niet — en subjuntivo hoort niet in dit leerplan. Dat verschil is meteen een echte les.  ||  Het derde dilemma is voor deze groep het belangrijkste: de klas zit vol zij-instromers. Laat de afspraak daarover écht gemaakt worden, niet weggestemd.  ||  Toets de tien afspraken op vorm (ser of estar) en op het feit dat ze in het Spaans aan de muur hangen. De inhoud is van de klas, niet van de leerkracht.</a:t>
+            </a:r>
+          </a:p>
+          <a:p>
+            <a:r>
+              <a:t>NOTA: Hang ze echt op en verwijs er het hele jaar naar. Een afspraak die na één les verdwijnt, leert de klas dat de reto een spelletje was.</a:t>
+            </a:r>
+          </a:p>
+        </p:txBody>
       </p:sp>
     </p:spTree>
   </p:cSld>
@@ -38117,6 +38369,5884 @@
   <p:clrMapOvr>
     <a:masterClrMapping/>
   </p:clrMapOvr>
+</p:sld>
+</file>
+
+<file path=ppt/slides/slide24.xml><?xml version="1.0" encoding="utf-8"?>
+<p:sld xmlns:a="http://schemas.openxmlformats.org/drawingml/2006/main" xmlns:p="http://schemas.openxmlformats.org/presentationml/2006/main" xmlns:r="http://schemas.openxmlformats.org/officeDocument/2006/relationships">
+  <p:cSld>
+    <p:spTree>
+      <p:nvGrpSpPr>
+        <p:cNvPr id="1" name=""/>
+        <p:cNvGrpSpPr/>
+        <p:nvPr/>
+      </p:nvGrpSpPr>
+      <p:grpSpPr/>
+      <p:sp>
+        <p:nvSpPr>
+          <p:cNvPr id="2" name="Fondo"/>
+          <p:cNvSpPr/>
+          <p:nvPr/>
+        </p:nvSpPr>
+        <p:spPr>
+          <a:xfrm>
+            <a:off x="0" y="0"/>
+            <a:ext cx="12191695" cy="6858000"/>
+          </a:xfrm>
+          <a:prstGeom prst="rect">
+            <a:avLst/>
+          </a:prstGeom>
+          <a:solidFill>
+            <a:srgbClr val="FCFBF8"/>
+          </a:solidFill>
+          <a:ln>
+            <a:noFill/>
+          </a:ln>
+          <a:effectLst/>
+        </p:spPr>
+        <p:style>
+          <a:lnRef idx="1">
+            <a:schemeClr val="accent1"/>
+          </a:lnRef>
+          <a:fillRef idx="3">
+            <a:schemeClr val="accent1"/>
+          </a:fillRef>
+          <a:effectRef idx="2">
+            <a:schemeClr val="accent1"/>
+          </a:effectRef>
+          <a:fontRef idx="minor">
+            <a:schemeClr val="lt1"/>
+          </a:fontRef>
+        </p:style>
+        <p:txBody>
+          <a:bodyPr rtlCol="0" anchor="ctr"/>
+          <a:lstStyle/>
+          <a:p/>
+        </p:txBody>
+      </p:sp>
+      <p:sp>
+        <p:nvSpPr>
+          <p:cNvPr id="3" name="Cabecera"/>
+          <p:cNvSpPr/>
+          <p:nvPr/>
+        </p:nvSpPr>
+        <p:spPr>
+          <a:xfrm>
+            <a:off x="0" y="0"/>
+            <a:ext cx="12191695" cy="1078992"/>
+          </a:xfrm>
+          <a:prstGeom prst="rect">
+            <a:avLst/>
+          </a:prstGeom>
+          <a:solidFill>
+            <a:srgbClr val="7C56A9"/>
+          </a:solidFill>
+          <a:ln>
+            <a:noFill/>
+          </a:ln>
+          <a:effectLst/>
+        </p:spPr>
+        <p:style>
+          <a:lnRef idx="1">
+            <a:schemeClr val="accent1"/>
+          </a:lnRef>
+          <a:fillRef idx="3">
+            <a:schemeClr val="accent1"/>
+          </a:fillRef>
+          <a:effectRef idx="2">
+            <a:schemeClr val="accent1"/>
+          </a:effectRef>
+          <a:fontRef idx="minor">
+            <a:schemeClr val="lt1"/>
+          </a:fontRef>
+        </p:style>
+        <p:txBody>
+          <a:bodyPr rtlCol="0" anchor="ctr"/>
+          <a:lstStyle/>
+          <a:p/>
+        </p:txBody>
+      </p:sp>
+      <p:sp>
+        <p:nvSpPr>
+          <p:cNvPr id="4" name="Chip"/>
+          <p:cNvSpPr/>
+          <p:nvPr/>
+        </p:nvSpPr>
+        <p:spPr>
+          <a:xfrm>
+            <a:off x="457200" y="182880"/>
+            <a:ext cx="3017520" cy="292608"/>
+          </a:xfrm>
+          <a:prstGeom prst="roundRect">
+            <a:avLst>
+              <a:gd name="adj" fmla="val 50000"/>
+            </a:avLst>
+          </a:prstGeom>
+          <a:solidFill>
+            <a:srgbClr val="FFFFFF"/>
+          </a:solidFill>
+          <a:ln>
+            <a:noFill/>
+          </a:ln>
+          <a:effectLst/>
+        </p:spPr>
+        <p:style>
+          <a:lnRef idx="1">
+            <a:schemeClr val="accent1"/>
+          </a:lnRef>
+          <a:fillRef idx="3">
+            <a:schemeClr val="accent1"/>
+          </a:fillRef>
+          <a:effectRef idx="2">
+            <a:schemeClr val="accent1"/>
+          </a:effectRef>
+          <a:fontRef idx="minor">
+            <a:schemeClr val="lt1"/>
+          </a:fontRef>
+        </p:style>
+        <p:txBody>
+          <a:bodyPr rtlCol="0" anchor="ctr"/>
+          <a:lstStyle/>
+          <a:p/>
+        </p:txBody>
+      </p:sp>
+      <p:sp>
+        <p:nvSpPr>
+          <p:cNvPr id="5" name="ChipTxt"/>
+          <p:cNvSpPr txBox="1"/>
+          <p:nvPr/>
+        </p:nvSpPr>
+        <p:spPr>
+          <a:xfrm>
+            <a:off x="457200" y="173736"/>
+            <a:ext cx="3017520" cy="310896"/>
+          </a:xfrm>
+          <a:prstGeom prst="rect">
+            <a:avLst/>
+          </a:prstGeom>
+          <a:noFill/>
+        </p:spPr>
+        <p:txBody>
+          <a:bodyPr wrap="square" anchor="ctr" lIns="45720" rIns="45720" tIns="27432" bIns="27432">
+            <a:normAutofit/>
+          </a:bodyPr>
+          <a:lstStyle/>
+          <a:p>
+            <a:pPr algn="ctr"/>
+            <a:r>
+              <a:rPr sz="950" b="1">
+                <a:solidFill>
+                  <a:srgbClr val="5B3E83"/>
+                </a:solidFill>
+                <a:latin typeface="Inter"/>
+              </a:rPr>
+              <a:t>RETO 3 · SIMULATIE MET BEPERKING</a:t>
+            </a:r>
+          </a:p>
+        </p:txBody>
+      </p:sp>
+      <p:sp>
+        <p:nvSpPr>
+          <p:cNvPr id="6" name="Titulo"/>
+          <p:cNvSpPr txBox="1"/>
+          <p:nvPr/>
+        </p:nvSpPr>
+        <p:spPr>
+          <a:xfrm>
+            <a:off x="457200" y="502920"/>
+            <a:ext cx="8412480" cy="475488"/>
+          </a:xfrm>
+          <a:prstGeom prst="rect">
+            <a:avLst/>
+          </a:prstGeom>
+          <a:noFill/>
+        </p:spPr>
+        <p:txBody>
+          <a:bodyPr wrap="square" anchor="t" lIns="45720" rIns="45720" tIns="27432" bIns="27432">
+            <a:normAutofit/>
+          </a:bodyPr>
+          <a:lstStyle/>
+          <a:p>
+            <a:pPr algn="l"/>
+            <a:r>
+              <a:rPr sz="2700" b="1">
+                <a:solidFill>
+                  <a:srgbClr val="FFFFFF"/>
+                </a:solidFill>
+                <a:latin typeface="Bricolage Grotesque"/>
+              </a:rPr>
+              <a:t>La entrevista de trabajo absurda</a:t>
+            </a:r>
+          </a:p>
+        </p:txBody>
+      </p:sp>
+      <p:sp>
+        <p:nvSpPr>
+          <p:cNvPr id="7" name="Badges"/>
+          <p:cNvSpPr txBox="1"/>
+          <p:nvPr/>
+        </p:nvSpPr>
+        <p:spPr>
+          <a:xfrm>
+            <a:off x="9052560" y="256032"/>
+            <a:ext cx="2651760" cy="640080"/>
+          </a:xfrm>
+          <a:prstGeom prst="rect">
+            <a:avLst/>
+          </a:prstGeom>
+          <a:noFill/>
+        </p:spPr>
+        <p:txBody>
+          <a:bodyPr wrap="square" anchor="t" lIns="45720" rIns="45720" tIns="27432" bIns="27432">
+            <a:normAutofit/>
+          </a:bodyPr>
+          <a:lstStyle/>
+          <a:p>
+            <a:pPr algn="r"/>
+            <a:r>
+              <a:rPr sz="1000">
+                <a:solidFill>
+                  <a:srgbClr val="EEE8F5"/>
+                </a:solidFill>
+                <a:latin typeface="Inter"/>
+              </a:rPr>
+              <a:t>👥 En parejas</a:t>
+            </a:r>
+          </a:p>
+          <a:p>
+            <a:pPr algn="r"/>
+            <a:r>
+              <a:rPr sz="1000">
+                <a:solidFill>
+                  <a:srgbClr val="EEE8F5"/>
+                </a:solidFill>
+                <a:latin typeface="Inter"/>
+              </a:rPr>
+              <a:t>± 15 min · ★★★</a:t>
+            </a:r>
+          </a:p>
+        </p:txBody>
+      </p:sp>
+      <p:sp>
+        <p:nvSpPr>
+          <p:cNvPr id="8" name="Gancho"/>
+          <p:cNvSpPr txBox="1"/>
+          <p:nvPr/>
+        </p:nvSpPr>
+        <p:spPr>
+          <a:xfrm>
+            <a:off x="457200" y="1225296"/>
+            <a:ext cx="11274552" cy="566928"/>
+          </a:xfrm>
+          <a:prstGeom prst="rect">
+            <a:avLst/>
+          </a:prstGeom>
+          <a:noFill/>
+        </p:spPr>
+        <p:txBody>
+          <a:bodyPr wrap="square" anchor="t" lIns="45720" rIns="45720" tIns="27432" bIns="27432">
+            <a:normAutofit/>
+          </a:bodyPr>
+          <a:lstStyle/>
+          <a:p>
+            <a:pPr algn="l"/>
+            <a:r>
+              <a:rPr sz="1600" b="1">
+                <a:solidFill>
+                  <a:srgbClr val="5B3E83"/>
+                </a:solidFill>
+                <a:latin typeface="Bricolage Grotesque"/>
+              </a:rPr>
+              <a:t>Probador de camas. Cuidador de pandas. Catador de helados. Y hay que convencer.</a:t>
+            </a:r>
+          </a:p>
+          <a:p>
+            <a:pPr algn="l"/>
+            <a:r>
+              <a:rPr sz="1100" i="1">
+                <a:solidFill>
+                  <a:srgbClr val="6A6E78"/>
+                </a:solidFill>
+                <a:latin typeface="Inter"/>
+              </a:rPr>
+              <a:t>Beroepsslaper. Pandaverzorger. IJsproever. En je moet overtuigen.</a:t>
+            </a:r>
+          </a:p>
+        </p:txBody>
+      </p:sp>
+      <p:sp>
+        <p:nvSpPr>
+          <p:cNvPr id="9" name="ReglaCaja"/>
+          <p:cNvSpPr/>
+          <p:nvPr/>
+        </p:nvSpPr>
+        <p:spPr>
+          <a:xfrm>
+            <a:off x="457200" y="1847088"/>
+            <a:ext cx="11274552" cy="658368"/>
+          </a:xfrm>
+          <a:prstGeom prst="roundRect">
+            <a:avLst>
+              <a:gd name="adj" fmla="val 5000"/>
+            </a:avLst>
+          </a:prstGeom>
+          <a:solidFill>
+            <a:srgbClr val="FBF3D6"/>
+          </a:solidFill>
+          <a:ln>
+            <a:noFill/>
+          </a:ln>
+          <a:effectLst/>
+        </p:spPr>
+        <p:style>
+          <a:lnRef idx="1">
+            <a:schemeClr val="accent1"/>
+          </a:lnRef>
+          <a:fillRef idx="3">
+            <a:schemeClr val="accent1"/>
+          </a:fillRef>
+          <a:effectRef idx="2">
+            <a:schemeClr val="accent1"/>
+          </a:effectRef>
+          <a:fontRef idx="minor">
+            <a:schemeClr val="lt1"/>
+          </a:fontRef>
+        </p:style>
+        <p:txBody>
+          <a:bodyPr rtlCol="0" anchor="ctr"/>
+          <a:lstStyle/>
+          <a:p/>
+        </p:txBody>
+      </p:sp>
+      <p:sp>
+        <p:nvSpPr>
+          <p:cNvPr id="10" name="ReglaTxt"/>
+          <p:cNvSpPr txBox="1"/>
+          <p:nvPr/>
+        </p:nvSpPr>
+        <p:spPr>
+          <a:xfrm>
+            <a:off x="603504" y="1883664"/>
+            <a:ext cx="10972800" cy="585216"/>
+          </a:xfrm>
+          <a:prstGeom prst="rect">
+            <a:avLst/>
+          </a:prstGeom>
+          <a:noFill/>
+        </p:spPr>
+        <p:txBody>
+          <a:bodyPr wrap="square" anchor="t" lIns="45720" rIns="45720" tIns="27432" bIns="27432">
+            <a:normAutofit/>
+          </a:bodyPr>
+          <a:lstStyle/>
+          <a:p>
+            <a:pPr algn="l"/>
+            <a:r>
+              <a:rPr sz="850" b="1">
+                <a:solidFill>
+                  <a:srgbClr val="B7860B"/>
+                </a:solidFill>
+                <a:latin typeface="Inter"/>
+              </a:rPr>
+              <a:t>LA REGLA DEL RETO</a:t>
+            </a:r>
+          </a:p>
+          <a:p>
+            <a:pPr algn="l"/>
+            <a:r>
+              <a:rPr sz="1100">
+                <a:solidFill>
+                  <a:srgbClr val="20242E"/>
+                </a:solidFill>
+                <a:latin typeface="Inter"/>
+              </a:rPr>
+              <a:t>Alles in het presente — geen verleden, geen toekomst. En op elke vraag antwoord je met een reden («porque…»), nooit met alleen «sí».</a:t>
+            </a:r>
+          </a:p>
+        </p:txBody>
+      </p:sp>
+      <p:sp>
+        <p:nvSpPr>
+          <p:cNvPr id="11" name="Tarjeta 0"/>
+          <p:cNvSpPr/>
+          <p:nvPr/>
+        </p:nvSpPr>
+        <p:spPr>
+          <a:xfrm>
+            <a:off x="457200" y="2670048"/>
+            <a:ext cx="2708910" cy="898398"/>
+          </a:xfrm>
+          <a:prstGeom prst="roundRect">
+            <a:avLst>
+              <a:gd name="adj" fmla="val 6000"/>
+            </a:avLst>
+          </a:prstGeom>
+          <a:solidFill>
+            <a:srgbClr val="FFFFFF"/>
+          </a:solidFill>
+          <a:ln w="12700">
+            <a:solidFill>
+              <a:srgbClr val="E4E3DE"/>
+            </a:solidFill>
+          </a:ln>
+          <a:effectLst/>
+        </p:spPr>
+        <p:style>
+          <a:lnRef idx="1">
+            <a:schemeClr val="accent1"/>
+          </a:lnRef>
+          <a:fillRef idx="3">
+            <a:schemeClr val="accent1"/>
+          </a:fillRef>
+          <a:effectRef idx="2">
+            <a:schemeClr val="accent1"/>
+          </a:effectRef>
+          <a:fontRef idx="minor">
+            <a:schemeClr val="lt1"/>
+          </a:fontRef>
+        </p:style>
+        <p:txBody>
+          <a:bodyPr rtlCol="0" anchor="ctr"/>
+          <a:lstStyle/>
+          <a:p/>
+        </p:txBody>
+      </p:sp>
+      <p:sp>
+        <p:nvSpPr>
+          <p:cNvPr id="12" name="TarjetaTxt 0"/>
+          <p:cNvSpPr txBox="1"/>
+          <p:nvPr/>
+        </p:nvSpPr>
+        <p:spPr>
+          <a:xfrm>
+            <a:off x="548640" y="2724912"/>
+            <a:ext cx="2526030" cy="788670"/>
+          </a:xfrm>
+          <a:prstGeom prst="rect">
+            <a:avLst/>
+          </a:prstGeom>
+          <a:noFill/>
+        </p:spPr>
+        <p:txBody>
+          <a:bodyPr wrap="square" anchor="t" lIns="45720" rIns="45720" tIns="27432" bIns="27432">
+            <a:normAutofit/>
+          </a:bodyPr>
+          <a:lstStyle/>
+          <a:p>
+            <a:pPr algn="l"/>
+            <a:r>
+              <a:rPr sz="1100" b="1">
+                <a:solidFill>
+                  <a:srgbClr val="5B3E83"/>
+                </a:solidFill>
+                <a:latin typeface="Bricolage Grotesque"/>
+              </a:rPr>
+              <a:t>probador/-a de camas</a:t>
+            </a:r>
+          </a:p>
+          <a:p>
+            <a:pPr algn="l"/>
+            <a:r>
+              <a:rPr sz="1000">
+                <a:solidFill>
+                  <a:srgbClr val="20242E"/>
+                </a:solidFill>
+                <a:latin typeface="Inter"/>
+              </a:rPr>
+              <a:t>duermes ocho horas al día, por trabajo</a:t>
+            </a:r>
+          </a:p>
+        </p:txBody>
+      </p:sp>
+      <p:sp>
+        <p:nvSpPr>
+          <p:cNvPr id="13" name="Tarjeta 1"/>
+          <p:cNvSpPr/>
+          <p:nvPr/>
+        </p:nvSpPr>
+        <p:spPr>
+          <a:xfrm>
+            <a:off x="3312414" y="2670048"/>
+            <a:ext cx="2708910" cy="898398"/>
+          </a:xfrm>
+          <a:prstGeom prst="roundRect">
+            <a:avLst>
+              <a:gd name="adj" fmla="val 6000"/>
+            </a:avLst>
+          </a:prstGeom>
+          <a:solidFill>
+            <a:srgbClr val="FFFFFF"/>
+          </a:solidFill>
+          <a:ln w="12700">
+            <a:solidFill>
+              <a:srgbClr val="E4E3DE"/>
+            </a:solidFill>
+          </a:ln>
+          <a:effectLst/>
+        </p:spPr>
+        <p:style>
+          <a:lnRef idx="1">
+            <a:schemeClr val="accent1"/>
+          </a:lnRef>
+          <a:fillRef idx="3">
+            <a:schemeClr val="accent1"/>
+          </a:fillRef>
+          <a:effectRef idx="2">
+            <a:schemeClr val="accent1"/>
+          </a:effectRef>
+          <a:fontRef idx="minor">
+            <a:schemeClr val="lt1"/>
+          </a:fontRef>
+        </p:style>
+        <p:txBody>
+          <a:bodyPr rtlCol="0" anchor="ctr"/>
+          <a:lstStyle/>
+          <a:p/>
+        </p:txBody>
+      </p:sp>
+      <p:sp>
+        <p:nvSpPr>
+          <p:cNvPr id="14" name="TarjetaTxt 1"/>
+          <p:cNvSpPr txBox="1"/>
+          <p:nvPr/>
+        </p:nvSpPr>
+        <p:spPr>
+          <a:xfrm>
+            <a:off x="3403854" y="2724912"/>
+            <a:ext cx="2526030" cy="788670"/>
+          </a:xfrm>
+          <a:prstGeom prst="rect">
+            <a:avLst/>
+          </a:prstGeom>
+          <a:noFill/>
+        </p:spPr>
+        <p:txBody>
+          <a:bodyPr wrap="square" anchor="t" lIns="45720" rIns="45720" tIns="27432" bIns="27432">
+            <a:normAutofit/>
+          </a:bodyPr>
+          <a:lstStyle/>
+          <a:p>
+            <a:pPr algn="l"/>
+            <a:r>
+              <a:rPr sz="1100" b="1">
+                <a:solidFill>
+                  <a:srgbClr val="5B3E83"/>
+                </a:solidFill>
+                <a:latin typeface="Bricolage Grotesque"/>
+              </a:rPr>
+              <a:t>cuidador/-a de pandas</a:t>
+            </a:r>
+          </a:p>
+          <a:p>
+            <a:pPr algn="l"/>
+            <a:r>
+              <a:rPr sz="1000">
+                <a:solidFill>
+                  <a:srgbClr val="20242E"/>
+                </a:solidFill>
+                <a:latin typeface="Inter"/>
+              </a:rPr>
+              <a:t>en China, con dos pandas de un año</a:t>
+            </a:r>
+          </a:p>
+        </p:txBody>
+      </p:sp>
+      <p:sp>
+        <p:nvSpPr>
+          <p:cNvPr id="15" name="Tarjeta 2"/>
+          <p:cNvSpPr/>
+          <p:nvPr/>
+        </p:nvSpPr>
+        <p:spPr>
+          <a:xfrm>
+            <a:off x="6167628" y="2670048"/>
+            <a:ext cx="2708910" cy="898398"/>
+          </a:xfrm>
+          <a:prstGeom prst="roundRect">
+            <a:avLst>
+              <a:gd name="adj" fmla="val 6000"/>
+            </a:avLst>
+          </a:prstGeom>
+          <a:solidFill>
+            <a:srgbClr val="FFFFFF"/>
+          </a:solidFill>
+          <a:ln w="12700">
+            <a:solidFill>
+              <a:srgbClr val="E4E3DE"/>
+            </a:solidFill>
+          </a:ln>
+          <a:effectLst/>
+        </p:spPr>
+        <p:style>
+          <a:lnRef idx="1">
+            <a:schemeClr val="accent1"/>
+          </a:lnRef>
+          <a:fillRef idx="3">
+            <a:schemeClr val="accent1"/>
+          </a:fillRef>
+          <a:effectRef idx="2">
+            <a:schemeClr val="accent1"/>
+          </a:effectRef>
+          <a:fontRef idx="minor">
+            <a:schemeClr val="lt1"/>
+          </a:fontRef>
+        </p:style>
+        <p:txBody>
+          <a:bodyPr rtlCol="0" anchor="ctr"/>
+          <a:lstStyle/>
+          <a:p/>
+        </p:txBody>
+      </p:sp>
+      <p:sp>
+        <p:nvSpPr>
+          <p:cNvPr id="16" name="TarjetaTxt 2"/>
+          <p:cNvSpPr txBox="1"/>
+          <p:nvPr/>
+        </p:nvSpPr>
+        <p:spPr>
+          <a:xfrm>
+            <a:off x="6259068" y="2724912"/>
+            <a:ext cx="2526030" cy="788670"/>
+          </a:xfrm>
+          <a:prstGeom prst="rect">
+            <a:avLst/>
+          </a:prstGeom>
+          <a:noFill/>
+        </p:spPr>
+        <p:txBody>
+          <a:bodyPr wrap="square" anchor="t" lIns="45720" rIns="45720" tIns="27432" bIns="27432">
+            <a:normAutofit/>
+          </a:bodyPr>
+          <a:lstStyle/>
+          <a:p>
+            <a:pPr algn="l"/>
+            <a:r>
+              <a:rPr sz="1100" b="1">
+                <a:solidFill>
+                  <a:srgbClr val="5B3E83"/>
+                </a:solidFill>
+                <a:latin typeface="Bricolage Grotesque"/>
+              </a:rPr>
+              <a:t>catador/-a de helados</a:t>
+            </a:r>
+          </a:p>
+          <a:p>
+            <a:pPr algn="l"/>
+            <a:r>
+              <a:rPr sz="1000">
+                <a:solidFill>
+                  <a:srgbClr val="20242E"/>
+                </a:solidFill>
+                <a:latin typeface="Inter"/>
+              </a:rPr>
+              <a:t>veinte sabores al día, todo el año</a:t>
+            </a:r>
+          </a:p>
+        </p:txBody>
+      </p:sp>
+      <p:sp>
+        <p:nvSpPr>
+          <p:cNvPr id="17" name="Tarjeta 3"/>
+          <p:cNvSpPr/>
+          <p:nvPr/>
+        </p:nvSpPr>
+        <p:spPr>
+          <a:xfrm>
+            <a:off x="9022842" y="2670048"/>
+            <a:ext cx="2708910" cy="898398"/>
+          </a:xfrm>
+          <a:prstGeom prst="roundRect">
+            <a:avLst>
+              <a:gd name="adj" fmla="val 6000"/>
+            </a:avLst>
+          </a:prstGeom>
+          <a:solidFill>
+            <a:srgbClr val="FFFFFF"/>
+          </a:solidFill>
+          <a:ln w="12700">
+            <a:solidFill>
+              <a:srgbClr val="E4E3DE"/>
+            </a:solidFill>
+          </a:ln>
+          <a:effectLst/>
+        </p:spPr>
+        <p:style>
+          <a:lnRef idx="1">
+            <a:schemeClr val="accent1"/>
+          </a:lnRef>
+          <a:fillRef idx="3">
+            <a:schemeClr val="accent1"/>
+          </a:fillRef>
+          <a:effectRef idx="2">
+            <a:schemeClr val="accent1"/>
+          </a:effectRef>
+          <a:fontRef idx="minor">
+            <a:schemeClr val="lt1"/>
+          </a:fontRef>
+        </p:style>
+        <p:txBody>
+          <a:bodyPr rtlCol="0" anchor="ctr"/>
+          <a:lstStyle/>
+          <a:p/>
+        </p:txBody>
+      </p:sp>
+      <p:sp>
+        <p:nvSpPr>
+          <p:cNvPr id="18" name="TarjetaTxt 3"/>
+          <p:cNvSpPr txBox="1"/>
+          <p:nvPr/>
+        </p:nvSpPr>
+        <p:spPr>
+          <a:xfrm>
+            <a:off x="9114282" y="2724912"/>
+            <a:ext cx="2526030" cy="788670"/>
+          </a:xfrm>
+          <a:prstGeom prst="rect">
+            <a:avLst/>
+          </a:prstGeom>
+          <a:noFill/>
+        </p:spPr>
+        <p:txBody>
+          <a:bodyPr wrap="square" anchor="t" lIns="45720" rIns="45720" tIns="27432" bIns="27432">
+            <a:normAutofit/>
+          </a:bodyPr>
+          <a:lstStyle/>
+          <a:p>
+            <a:pPr algn="l"/>
+            <a:r>
+              <a:rPr sz="1100" b="1">
+                <a:solidFill>
+                  <a:srgbClr val="5B3E83"/>
+                </a:solidFill>
+                <a:latin typeface="Bricolage Grotesque"/>
+              </a:rPr>
+              <a:t>paseador/-a de perros</a:t>
+            </a:r>
+          </a:p>
+          <a:p>
+            <a:pPr algn="l"/>
+            <a:r>
+              <a:rPr sz="1000">
+                <a:solidFill>
+                  <a:srgbClr val="20242E"/>
+                </a:solidFill>
+                <a:latin typeface="Inter"/>
+              </a:rPr>
+              <a:t>quince perros a la vez, en el centro</a:t>
+            </a:r>
+          </a:p>
+        </p:txBody>
+      </p:sp>
+      <p:sp>
+        <p:nvSpPr>
+          <p:cNvPr id="19" name="Tarjeta 4"/>
+          <p:cNvSpPr/>
+          <p:nvPr/>
+        </p:nvSpPr>
+        <p:spPr>
+          <a:xfrm>
+            <a:off x="457200" y="3696462"/>
+            <a:ext cx="2708910" cy="898398"/>
+          </a:xfrm>
+          <a:prstGeom prst="roundRect">
+            <a:avLst>
+              <a:gd name="adj" fmla="val 6000"/>
+            </a:avLst>
+          </a:prstGeom>
+          <a:solidFill>
+            <a:srgbClr val="FFFFFF"/>
+          </a:solidFill>
+          <a:ln w="12700">
+            <a:solidFill>
+              <a:srgbClr val="E4E3DE"/>
+            </a:solidFill>
+          </a:ln>
+          <a:effectLst/>
+        </p:spPr>
+        <p:style>
+          <a:lnRef idx="1">
+            <a:schemeClr val="accent1"/>
+          </a:lnRef>
+          <a:fillRef idx="3">
+            <a:schemeClr val="accent1"/>
+          </a:fillRef>
+          <a:effectRef idx="2">
+            <a:schemeClr val="accent1"/>
+          </a:effectRef>
+          <a:fontRef idx="minor">
+            <a:schemeClr val="lt1"/>
+          </a:fontRef>
+        </p:style>
+        <p:txBody>
+          <a:bodyPr rtlCol="0" anchor="ctr"/>
+          <a:lstStyle/>
+          <a:p/>
+        </p:txBody>
+      </p:sp>
+      <p:sp>
+        <p:nvSpPr>
+          <p:cNvPr id="20" name="TarjetaTxt 4"/>
+          <p:cNvSpPr txBox="1"/>
+          <p:nvPr/>
+        </p:nvSpPr>
+        <p:spPr>
+          <a:xfrm>
+            <a:off x="548640" y="3751326"/>
+            <a:ext cx="2526030" cy="788670"/>
+          </a:xfrm>
+          <a:prstGeom prst="rect">
+            <a:avLst/>
+          </a:prstGeom>
+          <a:noFill/>
+        </p:spPr>
+        <p:txBody>
+          <a:bodyPr wrap="square" anchor="t" lIns="45720" rIns="45720" tIns="27432" bIns="27432">
+            <a:normAutofit/>
+          </a:bodyPr>
+          <a:lstStyle/>
+          <a:p>
+            <a:pPr algn="l"/>
+            <a:r>
+              <a:rPr sz="1100" b="1">
+                <a:solidFill>
+                  <a:srgbClr val="5B3E83"/>
+                </a:solidFill>
+                <a:latin typeface="Bricolage Grotesque"/>
+              </a:rPr>
+              <a:t>probador/-a de toboganes</a:t>
+            </a:r>
+          </a:p>
+          <a:p>
+            <a:pPr algn="l"/>
+            <a:r>
+              <a:rPr sz="1000">
+                <a:solidFill>
+                  <a:srgbClr val="20242E"/>
+                </a:solidFill>
+                <a:latin typeface="Inter"/>
+              </a:rPr>
+              <a:t>en parques acuáticos de todo el mundo</a:t>
+            </a:r>
+          </a:p>
+        </p:txBody>
+      </p:sp>
+      <p:sp>
+        <p:nvSpPr>
+          <p:cNvPr id="21" name="Tarjeta 5"/>
+          <p:cNvSpPr/>
+          <p:nvPr/>
+        </p:nvSpPr>
+        <p:spPr>
+          <a:xfrm>
+            <a:off x="3312414" y="3696462"/>
+            <a:ext cx="2708910" cy="898398"/>
+          </a:xfrm>
+          <a:prstGeom prst="roundRect">
+            <a:avLst>
+              <a:gd name="adj" fmla="val 6000"/>
+            </a:avLst>
+          </a:prstGeom>
+          <a:solidFill>
+            <a:srgbClr val="FFFFFF"/>
+          </a:solidFill>
+          <a:ln w="12700">
+            <a:solidFill>
+              <a:srgbClr val="E4E3DE"/>
+            </a:solidFill>
+          </a:ln>
+          <a:effectLst/>
+        </p:spPr>
+        <p:style>
+          <a:lnRef idx="1">
+            <a:schemeClr val="accent1"/>
+          </a:lnRef>
+          <a:fillRef idx="3">
+            <a:schemeClr val="accent1"/>
+          </a:fillRef>
+          <a:effectRef idx="2">
+            <a:schemeClr val="accent1"/>
+          </a:effectRef>
+          <a:fontRef idx="minor">
+            <a:schemeClr val="lt1"/>
+          </a:fontRef>
+        </p:style>
+        <p:txBody>
+          <a:bodyPr rtlCol="0" anchor="ctr"/>
+          <a:lstStyle/>
+          <a:p/>
+        </p:txBody>
+      </p:sp>
+      <p:sp>
+        <p:nvSpPr>
+          <p:cNvPr id="22" name="TarjetaTxt 5"/>
+          <p:cNvSpPr txBox="1"/>
+          <p:nvPr/>
+        </p:nvSpPr>
+        <p:spPr>
+          <a:xfrm>
+            <a:off x="3403854" y="3751326"/>
+            <a:ext cx="2526030" cy="788670"/>
+          </a:xfrm>
+          <a:prstGeom prst="rect">
+            <a:avLst/>
+          </a:prstGeom>
+          <a:noFill/>
+        </p:spPr>
+        <p:txBody>
+          <a:bodyPr wrap="square" anchor="t" lIns="45720" rIns="45720" tIns="27432" bIns="27432">
+            <a:normAutofit/>
+          </a:bodyPr>
+          <a:lstStyle/>
+          <a:p>
+            <a:pPr algn="l"/>
+            <a:r>
+              <a:rPr sz="1100" b="1">
+                <a:solidFill>
+                  <a:srgbClr val="5B3E83"/>
+                </a:solidFill>
+                <a:latin typeface="Bricolage Grotesque"/>
+              </a:rPr>
+              <a:t>oledor/-a de perfumes</a:t>
+            </a:r>
+          </a:p>
+          <a:p>
+            <a:pPr algn="l"/>
+            <a:r>
+              <a:rPr sz="1000">
+                <a:solidFill>
+                  <a:srgbClr val="20242E"/>
+                </a:solidFill>
+                <a:latin typeface="Inter"/>
+              </a:rPr>
+              <a:t>y no puedes resfriarte nunca</a:t>
+            </a:r>
+          </a:p>
+        </p:txBody>
+      </p:sp>
+      <p:sp>
+        <p:nvSpPr>
+          <p:cNvPr id="23" name="Tarjeta 6"/>
+          <p:cNvSpPr/>
+          <p:nvPr/>
+        </p:nvSpPr>
+        <p:spPr>
+          <a:xfrm>
+            <a:off x="6167628" y="3696462"/>
+            <a:ext cx="2708910" cy="898398"/>
+          </a:xfrm>
+          <a:prstGeom prst="roundRect">
+            <a:avLst>
+              <a:gd name="adj" fmla="val 6000"/>
+            </a:avLst>
+          </a:prstGeom>
+          <a:solidFill>
+            <a:srgbClr val="FFFFFF"/>
+          </a:solidFill>
+          <a:ln w="12700">
+            <a:solidFill>
+              <a:srgbClr val="E4E3DE"/>
+            </a:solidFill>
+          </a:ln>
+          <a:effectLst/>
+        </p:spPr>
+        <p:style>
+          <a:lnRef idx="1">
+            <a:schemeClr val="accent1"/>
+          </a:lnRef>
+          <a:fillRef idx="3">
+            <a:schemeClr val="accent1"/>
+          </a:fillRef>
+          <a:effectRef idx="2">
+            <a:schemeClr val="accent1"/>
+          </a:effectRef>
+          <a:fontRef idx="minor">
+            <a:schemeClr val="lt1"/>
+          </a:fontRef>
+        </p:style>
+        <p:txBody>
+          <a:bodyPr rtlCol="0" anchor="ctr"/>
+          <a:lstStyle/>
+          <a:p/>
+        </p:txBody>
+      </p:sp>
+      <p:sp>
+        <p:nvSpPr>
+          <p:cNvPr id="24" name="TarjetaTxt 6"/>
+          <p:cNvSpPr txBox="1"/>
+          <p:nvPr/>
+        </p:nvSpPr>
+        <p:spPr>
+          <a:xfrm>
+            <a:off x="6259068" y="3751326"/>
+            <a:ext cx="2526030" cy="788670"/>
+          </a:xfrm>
+          <a:prstGeom prst="rect">
+            <a:avLst/>
+          </a:prstGeom>
+          <a:noFill/>
+        </p:spPr>
+        <p:txBody>
+          <a:bodyPr wrap="square" anchor="t" lIns="45720" rIns="45720" tIns="27432" bIns="27432">
+            <a:normAutofit/>
+          </a:bodyPr>
+          <a:lstStyle/>
+          <a:p>
+            <a:pPr algn="l"/>
+            <a:r>
+              <a:rPr sz="1100" b="1">
+                <a:solidFill>
+                  <a:srgbClr val="5B3E83"/>
+                </a:solidFill>
+                <a:latin typeface="Bricolage Grotesque"/>
+              </a:rPr>
+              <a:t>Preguntas</a:t>
+            </a:r>
+          </a:p>
+          <a:p>
+            <a:pPr algn="l"/>
+            <a:r>
+              <a:rPr sz="1000">
+                <a:solidFill>
+                  <a:srgbClr val="20242E"/>
+                </a:solidFill>
+                <a:latin typeface="Inter"/>
+              </a:rPr>
+              <a:t>¿Por qué quiere este trabajo? · ¿Qué hace usted un día normal? · ¿Cuál es su mayor defecto?</a:t>
+            </a:r>
+          </a:p>
+        </p:txBody>
+      </p:sp>
+      <p:sp>
+        <p:nvSpPr>
+          <p:cNvPr id="25" name="Tarjeta 7"/>
+          <p:cNvSpPr/>
+          <p:nvPr/>
+        </p:nvSpPr>
+        <p:spPr>
+          <a:xfrm>
+            <a:off x="9022842" y="3696462"/>
+            <a:ext cx="2708910" cy="898398"/>
+          </a:xfrm>
+          <a:prstGeom prst="roundRect">
+            <a:avLst>
+              <a:gd name="adj" fmla="val 6000"/>
+            </a:avLst>
+          </a:prstGeom>
+          <a:solidFill>
+            <a:srgbClr val="FFFFFF"/>
+          </a:solidFill>
+          <a:ln w="12700">
+            <a:solidFill>
+              <a:srgbClr val="E4E3DE"/>
+            </a:solidFill>
+          </a:ln>
+          <a:effectLst/>
+        </p:spPr>
+        <p:style>
+          <a:lnRef idx="1">
+            <a:schemeClr val="accent1"/>
+          </a:lnRef>
+          <a:fillRef idx="3">
+            <a:schemeClr val="accent1"/>
+          </a:fillRef>
+          <a:effectRef idx="2">
+            <a:schemeClr val="accent1"/>
+          </a:effectRef>
+          <a:fontRef idx="minor">
+            <a:schemeClr val="lt1"/>
+          </a:fontRef>
+        </p:style>
+        <p:txBody>
+          <a:bodyPr rtlCol="0" anchor="ctr"/>
+          <a:lstStyle/>
+          <a:p/>
+        </p:txBody>
+      </p:sp>
+      <p:sp>
+        <p:nvSpPr>
+          <p:cNvPr id="26" name="TarjetaTxt 7"/>
+          <p:cNvSpPr txBox="1"/>
+          <p:nvPr/>
+        </p:nvSpPr>
+        <p:spPr>
+          <a:xfrm>
+            <a:off x="9114282" y="3751326"/>
+            <a:ext cx="2526030" cy="788670"/>
+          </a:xfrm>
+          <a:prstGeom prst="rect">
+            <a:avLst/>
+          </a:prstGeom>
+          <a:noFill/>
+        </p:spPr>
+        <p:txBody>
+          <a:bodyPr wrap="square" anchor="t" lIns="45720" rIns="45720" tIns="27432" bIns="27432">
+            <a:normAutofit/>
+          </a:bodyPr>
+          <a:lstStyle/>
+          <a:p>
+            <a:pPr algn="l"/>
+            <a:r>
+              <a:rPr sz="1100" b="1">
+                <a:solidFill>
+                  <a:srgbClr val="5B3E83"/>
+                </a:solidFill>
+                <a:latin typeface="Bricolage Grotesque"/>
+              </a:rPr>
+              <a:t>Preguntas</a:t>
+            </a:r>
+          </a:p>
+          <a:p>
+            <a:pPr algn="l"/>
+            <a:r>
+              <a:rPr sz="1000">
+                <a:solidFill>
+                  <a:srgbClr val="20242E"/>
+                </a:solidFill>
+                <a:latin typeface="Inter"/>
+              </a:rPr>
+              <a:t>¿Trabaja mejor solo o en equipo? · ¿Qué hace si algo sale mal? · ¿Cuántas horas duerme?</a:t>
+            </a:r>
+          </a:p>
+        </p:txBody>
+      </p:sp>
+      <p:sp>
+        <p:nvSpPr>
+          <p:cNvPr id="27" name="Tarjeta 8"/>
+          <p:cNvSpPr/>
+          <p:nvPr/>
+        </p:nvSpPr>
+        <p:spPr>
+          <a:xfrm>
+            <a:off x="457200" y="4722876"/>
+            <a:ext cx="2708910" cy="898398"/>
+          </a:xfrm>
+          <a:prstGeom prst="roundRect">
+            <a:avLst>
+              <a:gd name="adj" fmla="val 6000"/>
+            </a:avLst>
+          </a:prstGeom>
+          <a:solidFill>
+            <a:srgbClr val="FFFFFF"/>
+          </a:solidFill>
+          <a:ln w="12700">
+            <a:solidFill>
+              <a:srgbClr val="E4E3DE"/>
+            </a:solidFill>
+          </a:ln>
+          <a:effectLst/>
+        </p:spPr>
+        <p:style>
+          <a:lnRef idx="1">
+            <a:schemeClr val="accent1"/>
+          </a:lnRef>
+          <a:fillRef idx="3">
+            <a:schemeClr val="accent1"/>
+          </a:fillRef>
+          <a:effectRef idx="2">
+            <a:schemeClr val="accent1"/>
+          </a:effectRef>
+          <a:fontRef idx="minor">
+            <a:schemeClr val="lt1"/>
+          </a:fontRef>
+        </p:style>
+        <p:txBody>
+          <a:bodyPr rtlCol="0" anchor="ctr"/>
+          <a:lstStyle/>
+          <a:p/>
+        </p:txBody>
+      </p:sp>
+      <p:sp>
+        <p:nvSpPr>
+          <p:cNvPr id="28" name="TarjetaTxt 8"/>
+          <p:cNvSpPr txBox="1"/>
+          <p:nvPr/>
+        </p:nvSpPr>
+        <p:spPr>
+          <a:xfrm>
+            <a:off x="548640" y="4777740"/>
+            <a:ext cx="2526030" cy="788670"/>
+          </a:xfrm>
+          <a:prstGeom prst="rect">
+            <a:avLst/>
+          </a:prstGeom>
+          <a:noFill/>
+        </p:spPr>
+        <p:txBody>
+          <a:bodyPr wrap="square" anchor="t" lIns="45720" rIns="45720" tIns="27432" bIns="27432">
+            <a:normAutofit/>
+          </a:bodyPr>
+          <a:lstStyle/>
+          <a:p>
+            <a:pPr algn="l"/>
+            <a:r>
+              <a:rPr sz="1100" b="1">
+                <a:solidFill>
+                  <a:srgbClr val="5B3E83"/>
+                </a:solidFill>
+                <a:latin typeface="Bricolage Grotesque"/>
+              </a:rPr>
+              <a:t>Preguntas</a:t>
+            </a:r>
+          </a:p>
+          <a:p>
+            <a:pPr algn="l"/>
+            <a:r>
+              <a:rPr sz="1000">
+                <a:solidFill>
+                  <a:srgbClr val="20242E"/>
+                </a:solidFill>
+                <a:latin typeface="Inter"/>
+              </a:rPr>
+              <a:t>¿Habla otras lenguas? · ¿Por qué usted y no otro?</a:t>
+            </a:r>
+          </a:p>
+        </p:txBody>
+      </p:sp>
+      <p:sp>
+        <p:nvSpPr>
+          <p:cNvPr id="29" name="Tarjeta 9"/>
+          <p:cNvSpPr/>
+          <p:nvPr/>
+        </p:nvSpPr>
+        <p:spPr>
+          <a:xfrm>
+            <a:off x="3312414" y="4722876"/>
+            <a:ext cx="2708910" cy="898398"/>
+          </a:xfrm>
+          <a:prstGeom prst="roundRect">
+            <a:avLst>
+              <a:gd name="adj" fmla="val 6000"/>
+            </a:avLst>
+          </a:prstGeom>
+          <a:solidFill>
+            <a:srgbClr val="FFFFFF"/>
+          </a:solidFill>
+          <a:ln w="12700">
+            <a:solidFill>
+              <a:srgbClr val="E4E3DE"/>
+            </a:solidFill>
+          </a:ln>
+          <a:effectLst/>
+        </p:spPr>
+        <p:style>
+          <a:lnRef idx="1">
+            <a:schemeClr val="accent1"/>
+          </a:lnRef>
+          <a:fillRef idx="3">
+            <a:schemeClr val="accent1"/>
+          </a:fillRef>
+          <a:effectRef idx="2">
+            <a:schemeClr val="accent1"/>
+          </a:effectRef>
+          <a:fontRef idx="minor">
+            <a:schemeClr val="lt1"/>
+          </a:fontRef>
+        </p:style>
+        <p:txBody>
+          <a:bodyPr rtlCol="0" anchor="ctr"/>
+          <a:lstStyle/>
+          <a:p/>
+        </p:txBody>
+      </p:sp>
+      <p:sp>
+        <p:nvSpPr>
+          <p:cNvPr id="30" name="TarjetaTxt 9"/>
+          <p:cNvSpPr txBox="1"/>
+          <p:nvPr/>
+        </p:nvSpPr>
+        <p:spPr>
+          <a:xfrm>
+            <a:off x="3403854" y="4777740"/>
+            <a:ext cx="2526030" cy="788670"/>
+          </a:xfrm>
+          <a:prstGeom prst="rect">
+            <a:avLst/>
+          </a:prstGeom>
+          <a:noFill/>
+        </p:spPr>
+        <p:txBody>
+          <a:bodyPr wrap="square" anchor="t" lIns="45720" rIns="45720" tIns="27432" bIns="27432">
+            <a:normAutofit/>
+          </a:bodyPr>
+          <a:lstStyle/>
+          <a:p>
+            <a:pPr algn="l"/>
+            <a:r>
+              <a:rPr sz="1100" b="1">
+                <a:solidFill>
+                  <a:srgbClr val="5B3E83"/>
+                </a:solidFill>
+                <a:latin typeface="Bricolage Grotesque"/>
+              </a:rPr>
+              <a:t>marco</a:t>
+            </a:r>
+          </a:p>
+          <a:p>
+            <a:pPr algn="l"/>
+            <a:r>
+              <a:rPr sz="1000">
+                <a:solidFill>
+                  <a:srgbClr val="20242E"/>
+                </a:solidFill>
+                <a:latin typeface="Inter"/>
+              </a:rPr>
+              <a:t>Quiero este trabajo porque …</a:t>
+            </a:r>
+          </a:p>
+        </p:txBody>
+      </p:sp>
+      <p:sp>
+        <p:nvSpPr>
+          <p:cNvPr id="31" name="Tarjeta 10"/>
+          <p:cNvSpPr/>
+          <p:nvPr/>
+        </p:nvSpPr>
+        <p:spPr>
+          <a:xfrm>
+            <a:off x="6167628" y="4722876"/>
+            <a:ext cx="2708910" cy="898398"/>
+          </a:xfrm>
+          <a:prstGeom prst="roundRect">
+            <a:avLst>
+              <a:gd name="adj" fmla="val 6000"/>
+            </a:avLst>
+          </a:prstGeom>
+          <a:solidFill>
+            <a:srgbClr val="FFFFFF"/>
+          </a:solidFill>
+          <a:ln w="12700">
+            <a:solidFill>
+              <a:srgbClr val="E4E3DE"/>
+            </a:solidFill>
+          </a:ln>
+          <a:effectLst/>
+        </p:spPr>
+        <p:style>
+          <a:lnRef idx="1">
+            <a:schemeClr val="accent1"/>
+          </a:lnRef>
+          <a:fillRef idx="3">
+            <a:schemeClr val="accent1"/>
+          </a:fillRef>
+          <a:effectRef idx="2">
+            <a:schemeClr val="accent1"/>
+          </a:effectRef>
+          <a:fontRef idx="minor">
+            <a:schemeClr val="lt1"/>
+          </a:fontRef>
+        </p:style>
+        <p:txBody>
+          <a:bodyPr rtlCol="0" anchor="ctr"/>
+          <a:lstStyle/>
+          <a:p/>
+        </p:txBody>
+      </p:sp>
+      <p:sp>
+        <p:nvSpPr>
+          <p:cNvPr id="32" name="TarjetaTxt 10"/>
+          <p:cNvSpPr txBox="1"/>
+          <p:nvPr/>
+        </p:nvSpPr>
+        <p:spPr>
+          <a:xfrm>
+            <a:off x="6259068" y="4777740"/>
+            <a:ext cx="2526030" cy="788670"/>
+          </a:xfrm>
+          <a:prstGeom prst="rect">
+            <a:avLst/>
+          </a:prstGeom>
+          <a:noFill/>
+        </p:spPr>
+        <p:txBody>
+          <a:bodyPr wrap="square" anchor="t" lIns="45720" rIns="45720" tIns="27432" bIns="27432">
+            <a:normAutofit/>
+          </a:bodyPr>
+          <a:lstStyle/>
+          <a:p>
+            <a:pPr algn="l"/>
+            <a:r>
+              <a:rPr sz="1100" b="1">
+                <a:solidFill>
+                  <a:srgbClr val="5B3E83"/>
+                </a:solidFill>
+                <a:latin typeface="Bricolage Grotesque"/>
+              </a:rPr>
+              <a:t>marco</a:t>
+            </a:r>
+          </a:p>
+          <a:p>
+            <a:pPr algn="l"/>
+            <a:r>
+              <a:rPr sz="1000">
+                <a:solidFill>
+                  <a:srgbClr val="20242E"/>
+                </a:solidFill>
+                <a:latin typeface="Inter"/>
+              </a:rPr>
+              <a:t>Normalmente … y después …</a:t>
+            </a:r>
+          </a:p>
+        </p:txBody>
+      </p:sp>
+      <p:sp>
+        <p:nvSpPr>
+          <p:cNvPr id="33" name="Tarjeta 11"/>
+          <p:cNvSpPr/>
+          <p:nvPr/>
+        </p:nvSpPr>
+        <p:spPr>
+          <a:xfrm>
+            <a:off x="9022842" y="4722876"/>
+            <a:ext cx="2708910" cy="898398"/>
+          </a:xfrm>
+          <a:prstGeom prst="roundRect">
+            <a:avLst>
+              <a:gd name="adj" fmla="val 6000"/>
+            </a:avLst>
+          </a:prstGeom>
+          <a:solidFill>
+            <a:srgbClr val="FFFFFF"/>
+          </a:solidFill>
+          <a:ln w="12700">
+            <a:solidFill>
+              <a:srgbClr val="E4E3DE"/>
+            </a:solidFill>
+          </a:ln>
+          <a:effectLst/>
+        </p:spPr>
+        <p:style>
+          <a:lnRef idx="1">
+            <a:schemeClr val="accent1"/>
+          </a:lnRef>
+          <a:fillRef idx="3">
+            <a:schemeClr val="accent1"/>
+          </a:fillRef>
+          <a:effectRef idx="2">
+            <a:schemeClr val="accent1"/>
+          </a:effectRef>
+          <a:fontRef idx="minor">
+            <a:schemeClr val="lt1"/>
+          </a:fontRef>
+        </p:style>
+        <p:txBody>
+          <a:bodyPr rtlCol="0" anchor="ctr"/>
+          <a:lstStyle/>
+          <a:p/>
+        </p:txBody>
+      </p:sp>
+      <p:sp>
+        <p:nvSpPr>
+          <p:cNvPr id="34" name="TarjetaTxt 11"/>
+          <p:cNvSpPr txBox="1"/>
+          <p:nvPr/>
+        </p:nvSpPr>
+        <p:spPr>
+          <a:xfrm>
+            <a:off x="9114282" y="4777740"/>
+            <a:ext cx="2526030" cy="788670"/>
+          </a:xfrm>
+          <a:prstGeom prst="rect">
+            <a:avLst/>
+          </a:prstGeom>
+          <a:noFill/>
+        </p:spPr>
+        <p:txBody>
+          <a:bodyPr wrap="square" anchor="t" lIns="45720" rIns="45720" tIns="27432" bIns="27432">
+            <a:normAutofit/>
+          </a:bodyPr>
+          <a:lstStyle/>
+          <a:p>
+            <a:pPr algn="l"/>
+            <a:r>
+              <a:rPr sz="1100" b="1">
+                <a:solidFill>
+                  <a:srgbClr val="5B3E83"/>
+                </a:solidFill>
+                <a:latin typeface="Bricolage Grotesque"/>
+              </a:rPr>
+              <a:t>marco</a:t>
+            </a:r>
+          </a:p>
+          <a:p>
+            <a:pPr algn="l"/>
+            <a:r>
+              <a:rPr sz="1000">
+                <a:solidFill>
+                  <a:srgbClr val="20242E"/>
+                </a:solidFill>
+                <a:latin typeface="Inter"/>
+              </a:rPr>
+              <a:t>Mi defecto es que … , pero …</a:t>
+            </a:r>
+          </a:p>
+        </p:txBody>
+      </p:sp>
+      <p:sp>
+        <p:nvSpPr>
+          <p:cNvPr id="35" name="Tarjeta 12"/>
+          <p:cNvSpPr/>
+          <p:nvPr/>
+        </p:nvSpPr>
+        <p:spPr>
+          <a:xfrm>
+            <a:off x="457200" y="5749290"/>
+            <a:ext cx="2708910" cy="898398"/>
+          </a:xfrm>
+          <a:prstGeom prst="roundRect">
+            <a:avLst>
+              <a:gd name="adj" fmla="val 6000"/>
+            </a:avLst>
+          </a:prstGeom>
+          <a:solidFill>
+            <a:srgbClr val="FFFFFF"/>
+          </a:solidFill>
+          <a:ln w="12700">
+            <a:solidFill>
+              <a:srgbClr val="E4E3DE"/>
+            </a:solidFill>
+          </a:ln>
+          <a:effectLst/>
+        </p:spPr>
+        <p:style>
+          <a:lnRef idx="1">
+            <a:schemeClr val="accent1"/>
+          </a:lnRef>
+          <a:fillRef idx="3">
+            <a:schemeClr val="accent1"/>
+          </a:fillRef>
+          <a:effectRef idx="2">
+            <a:schemeClr val="accent1"/>
+          </a:effectRef>
+          <a:fontRef idx="minor">
+            <a:schemeClr val="lt1"/>
+          </a:fontRef>
+        </p:style>
+        <p:txBody>
+          <a:bodyPr rtlCol="0" anchor="ctr"/>
+          <a:lstStyle/>
+          <a:p/>
+        </p:txBody>
+      </p:sp>
+      <p:sp>
+        <p:nvSpPr>
+          <p:cNvPr id="36" name="TarjetaTxt 12"/>
+          <p:cNvSpPr txBox="1"/>
+          <p:nvPr/>
+        </p:nvSpPr>
+        <p:spPr>
+          <a:xfrm>
+            <a:off x="548640" y="5804154"/>
+            <a:ext cx="2526030" cy="788670"/>
+          </a:xfrm>
+          <a:prstGeom prst="rect">
+            <a:avLst/>
+          </a:prstGeom>
+          <a:noFill/>
+        </p:spPr>
+        <p:txBody>
+          <a:bodyPr wrap="square" anchor="t" lIns="45720" rIns="45720" tIns="27432" bIns="27432">
+            <a:normAutofit/>
+          </a:bodyPr>
+          <a:lstStyle/>
+          <a:p>
+            <a:pPr algn="l"/>
+            <a:r>
+              <a:rPr sz="1100" b="1">
+                <a:solidFill>
+                  <a:srgbClr val="5B3E83"/>
+                </a:solidFill>
+                <a:latin typeface="Bricolage Grotesque"/>
+              </a:rPr>
+              <a:t>marco</a:t>
+            </a:r>
+          </a:p>
+          <a:p>
+            <a:pPr algn="l"/>
+            <a:r>
+              <a:rPr sz="1000">
+                <a:solidFill>
+                  <a:srgbClr val="20242E"/>
+                </a:solidFill>
+                <a:latin typeface="Inter"/>
+              </a:rPr>
+              <a:t>Si algo sale mal, …</a:t>
+            </a:r>
+          </a:p>
+        </p:txBody>
+      </p:sp>
+      <p:sp>
+        <p:nvSpPr>
+          <p:cNvPr id="37" name="Tarjeta 13"/>
+          <p:cNvSpPr/>
+          <p:nvPr/>
+        </p:nvSpPr>
+        <p:spPr>
+          <a:xfrm>
+            <a:off x="3312414" y="5749290"/>
+            <a:ext cx="2708910" cy="898398"/>
+          </a:xfrm>
+          <a:prstGeom prst="roundRect">
+            <a:avLst>
+              <a:gd name="adj" fmla="val 6000"/>
+            </a:avLst>
+          </a:prstGeom>
+          <a:solidFill>
+            <a:srgbClr val="FFFFFF"/>
+          </a:solidFill>
+          <a:ln w="12700">
+            <a:solidFill>
+              <a:srgbClr val="E4E3DE"/>
+            </a:solidFill>
+          </a:ln>
+          <a:effectLst/>
+        </p:spPr>
+        <p:style>
+          <a:lnRef idx="1">
+            <a:schemeClr val="accent1"/>
+          </a:lnRef>
+          <a:fillRef idx="3">
+            <a:schemeClr val="accent1"/>
+          </a:fillRef>
+          <a:effectRef idx="2">
+            <a:schemeClr val="accent1"/>
+          </a:effectRef>
+          <a:fontRef idx="minor">
+            <a:schemeClr val="lt1"/>
+          </a:fontRef>
+        </p:style>
+        <p:txBody>
+          <a:bodyPr rtlCol="0" anchor="ctr"/>
+          <a:lstStyle/>
+          <a:p/>
+        </p:txBody>
+      </p:sp>
+      <p:sp>
+        <p:nvSpPr>
+          <p:cNvPr id="38" name="TarjetaTxt 13"/>
+          <p:cNvSpPr txBox="1"/>
+          <p:nvPr/>
+        </p:nvSpPr>
+        <p:spPr>
+          <a:xfrm>
+            <a:off x="3403854" y="5804154"/>
+            <a:ext cx="2526030" cy="788670"/>
+          </a:xfrm>
+          <a:prstGeom prst="rect">
+            <a:avLst/>
+          </a:prstGeom>
+          <a:noFill/>
+        </p:spPr>
+        <p:txBody>
+          <a:bodyPr wrap="square" anchor="t" lIns="45720" rIns="45720" tIns="27432" bIns="27432">
+            <a:normAutofit/>
+          </a:bodyPr>
+          <a:lstStyle/>
+          <a:p>
+            <a:pPr algn="l"/>
+            <a:r>
+              <a:rPr sz="1100" b="1">
+                <a:solidFill>
+                  <a:srgbClr val="5B3E83"/>
+                </a:solidFill>
+                <a:latin typeface="Bricolage Grotesque"/>
+              </a:rPr>
+              <a:t>marco</a:t>
+            </a:r>
+          </a:p>
+          <a:p>
+            <a:pPr algn="l"/>
+            <a:r>
+              <a:rPr sz="1000">
+                <a:solidFill>
+                  <a:srgbClr val="20242E"/>
+                </a:solidFill>
+                <a:latin typeface="Inter"/>
+              </a:rPr>
+              <a:t>Soy la persona ideal porque …</a:t>
+            </a:r>
+          </a:p>
+        </p:txBody>
+      </p:sp>
+    </p:spTree>
+  </p:cSld>
+  <p:clrMapOvr>
+    <a:masterClrMapping/>
+  </p:clrMapOvr>
+</p:sld>
+</file>
+
+<file path=ppt/slides/slide25.xml><?xml version="1.0" encoding="utf-8"?>
+<p:sld xmlns:a="http://schemas.openxmlformats.org/drawingml/2006/main" xmlns:p="http://schemas.openxmlformats.org/presentationml/2006/main" xmlns:r="http://schemas.openxmlformats.org/officeDocument/2006/relationships">
+  <p:cSld>
+    <p:spTree>
+      <p:nvGrpSpPr>
+        <p:cNvPr id="1" name=""/>
+        <p:cNvGrpSpPr/>
+        <p:nvPr/>
+      </p:nvGrpSpPr>
+      <p:grpSpPr/>
+      <p:sp>
+        <p:nvSpPr>
+          <p:cNvPr id="2" name="Fondo"/>
+          <p:cNvSpPr/>
+          <p:nvPr/>
+        </p:nvSpPr>
+        <p:spPr>
+          <a:xfrm>
+            <a:off x="0" y="0"/>
+            <a:ext cx="12191695" cy="6858000"/>
+          </a:xfrm>
+          <a:prstGeom prst="rect">
+            <a:avLst/>
+          </a:prstGeom>
+          <a:solidFill>
+            <a:srgbClr val="FCFBF8"/>
+          </a:solidFill>
+          <a:ln>
+            <a:noFill/>
+          </a:ln>
+          <a:effectLst/>
+        </p:spPr>
+        <p:style>
+          <a:lnRef idx="1">
+            <a:schemeClr val="accent1"/>
+          </a:lnRef>
+          <a:fillRef idx="3">
+            <a:schemeClr val="accent1"/>
+          </a:fillRef>
+          <a:effectRef idx="2">
+            <a:schemeClr val="accent1"/>
+          </a:effectRef>
+          <a:fontRef idx="minor">
+            <a:schemeClr val="lt1"/>
+          </a:fontRef>
+        </p:style>
+        <p:txBody>
+          <a:bodyPr rtlCol="0" anchor="ctr"/>
+          <a:lstStyle/>
+          <a:p/>
+        </p:txBody>
+      </p:sp>
+      <p:sp>
+        <p:nvSpPr>
+          <p:cNvPr id="3" name="Cabecera"/>
+          <p:cNvSpPr/>
+          <p:nvPr/>
+        </p:nvSpPr>
+        <p:spPr>
+          <a:xfrm>
+            <a:off x="0" y="0"/>
+            <a:ext cx="12191695" cy="1078992"/>
+          </a:xfrm>
+          <a:prstGeom prst="rect">
+            <a:avLst/>
+          </a:prstGeom>
+          <a:solidFill>
+            <a:srgbClr val="7C56A9"/>
+          </a:solidFill>
+          <a:ln>
+            <a:noFill/>
+          </a:ln>
+          <a:effectLst/>
+        </p:spPr>
+        <p:style>
+          <a:lnRef idx="1">
+            <a:schemeClr val="accent1"/>
+          </a:lnRef>
+          <a:fillRef idx="3">
+            <a:schemeClr val="accent1"/>
+          </a:fillRef>
+          <a:effectRef idx="2">
+            <a:schemeClr val="accent1"/>
+          </a:effectRef>
+          <a:fontRef idx="minor">
+            <a:schemeClr val="lt1"/>
+          </a:fontRef>
+        </p:style>
+        <p:txBody>
+          <a:bodyPr rtlCol="0" anchor="ctr"/>
+          <a:lstStyle/>
+          <a:p/>
+        </p:txBody>
+      </p:sp>
+      <p:sp>
+        <p:nvSpPr>
+          <p:cNvPr id="4" name="Chip"/>
+          <p:cNvSpPr/>
+          <p:nvPr/>
+        </p:nvSpPr>
+        <p:spPr>
+          <a:xfrm>
+            <a:off x="457200" y="182880"/>
+            <a:ext cx="3017520" cy="292608"/>
+          </a:xfrm>
+          <a:prstGeom prst="roundRect">
+            <a:avLst>
+              <a:gd name="adj" fmla="val 50000"/>
+            </a:avLst>
+          </a:prstGeom>
+          <a:solidFill>
+            <a:srgbClr val="FFFFFF"/>
+          </a:solidFill>
+          <a:ln>
+            <a:noFill/>
+          </a:ln>
+          <a:effectLst/>
+        </p:spPr>
+        <p:style>
+          <a:lnRef idx="1">
+            <a:schemeClr val="accent1"/>
+          </a:lnRef>
+          <a:fillRef idx="3">
+            <a:schemeClr val="accent1"/>
+          </a:fillRef>
+          <a:effectRef idx="2">
+            <a:schemeClr val="accent1"/>
+          </a:effectRef>
+          <a:fontRef idx="minor">
+            <a:schemeClr val="lt1"/>
+          </a:fontRef>
+        </p:style>
+        <p:txBody>
+          <a:bodyPr rtlCol="0" anchor="ctr"/>
+          <a:lstStyle/>
+          <a:p/>
+        </p:txBody>
+      </p:sp>
+      <p:sp>
+        <p:nvSpPr>
+          <p:cNvPr id="5" name="ChipTxt"/>
+          <p:cNvSpPr txBox="1"/>
+          <p:nvPr/>
+        </p:nvSpPr>
+        <p:spPr>
+          <a:xfrm>
+            <a:off x="457200" y="173736"/>
+            <a:ext cx="3017520" cy="310896"/>
+          </a:xfrm>
+          <a:prstGeom prst="rect">
+            <a:avLst/>
+          </a:prstGeom>
+          <a:noFill/>
+        </p:spPr>
+        <p:txBody>
+          <a:bodyPr wrap="square" anchor="ctr" lIns="45720" rIns="45720" tIns="27432" bIns="27432">
+            <a:normAutofit/>
+          </a:bodyPr>
+          <a:lstStyle/>
+          <a:p>
+            <a:pPr algn="ctr"/>
+            <a:r>
+              <a:rPr sz="950" b="1">
+                <a:solidFill>
+                  <a:srgbClr val="5B3E83"/>
+                </a:solidFill>
+                <a:latin typeface="Inter"/>
+              </a:rPr>
+              <a:t>RETO 9 · ONDERZOEK &amp; DATA</a:t>
+            </a:r>
+          </a:p>
+        </p:txBody>
+      </p:sp>
+      <p:sp>
+        <p:nvSpPr>
+          <p:cNvPr id="6" name="Titulo"/>
+          <p:cNvSpPr txBox="1"/>
+          <p:nvPr/>
+        </p:nvSpPr>
+        <p:spPr>
+          <a:xfrm>
+            <a:off x="457200" y="502920"/>
+            <a:ext cx="8412480" cy="475488"/>
+          </a:xfrm>
+          <a:prstGeom prst="rect">
+            <a:avLst/>
+          </a:prstGeom>
+          <a:noFill/>
+        </p:spPr>
+        <p:txBody>
+          <a:bodyPr wrap="square" anchor="t" lIns="45720" rIns="45720" tIns="27432" bIns="27432">
+            <a:normAutofit/>
+          </a:bodyPr>
+          <a:lstStyle/>
+          <a:p>
+            <a:pPr algn="l"/>
+            <a:r>
+              <a:rPr sz="2700" b="1">
+                <a:solidFill>
+                  <a:srgbClr val="FFFFFF"/>
+                </a:solidFill>
+                <a:latin typeface="Bricolage Grotesque"/>
+              </a:rPr>
+              <a:t>Un país en cinco datos</a:t>
+            </a:r>
+          </a:p>
+        </p:txBody>
+      </p:sp>
+      <p:sp>
+        <p:nvSpPr>
+          <p:cNvPr id="7" name="Badges"/>
+          <p:cNvSpPr txBox="1"/>
+          <p:nvPr/>
+        </p:nvSpPr>
+        <p:spPr>
+          <a:xfrm>
+            <a:off x="9052560" y="256032"/>
+            <a:ext cx="2651760" cy="640080"/>
+          </a:xfrm>
+          <a:prstGeom prst="rect">
+            <a:avLst/>
+          </a:prstGeom>
+          <a:noFill/>
+        </p:spPr>
+        <p:txBody>
+          <a:bodyPr wrap="square" anchor="t" lIns="45720" rIns="45720" tIns="27432" bIns="27432">
+            <a:normAutofit/>
+          </a:bodyPr>
+          <a:lstStyle/>
+          <a:p>
+            <a:pPr algn="r"/>
+            <a:r>
+              <a:rPr sz="1000">
+                <a:solidFill>
+                  <a:srgbClr val="EEE8F5"/>
+                </a:solidFill>
+                <a:latin typeface="Inter"/>
+              </a:rPr>
+              <a:t>👤 Solo</a:t>
+            </a:r>
+          </a:p>
+          <a:p>
+            <a:pPr algn="r"/>
+            <a:r>
+              <a:rPr sz="1000">
+                <a:solidFill>
+                  <a:srgbClr val="EEE8F5"/>
+                </a:solidFill>
+                <a:latin typeface="Inter"/>
+              </a:rPr>
+              <a:t>± 15 min · ★★★</a:t>
+            </a:r>
+          </a:p>
+        </p:txBody>
+      </p:sp>
+      <p:sp>
+        <p:nvSpPr>
+          <p:cNvPr id="8" name="Gancho"/>
+          <p:cNvSpPr txBox="1"/>
+          <p:nvPr/>
+        </p:nvSpPr>
+        <p:spPr>
+          <a:xfrm>
+            <a:off x="457200" y="1225296"/>
+            <a:ext cx="11274552" cy="566928"/>
+          </a:xfrm>
+          <a:prstGeom prst="rect">
+            <a:avLst/>
+          </a:prstGeom>
+          <a:noFill/>
+        </p:spPr>
+        <p:txBody>
+          <a:bodyPr wrap="square" anchor="t" lIns="45720" rIns="45720" tIns="27432" bIns="27432">
+            <a:normAutofit/>
+          </a:bodyPr>
+          <a:lstStyle/>
+          <a:p>
+            <a:pPr algn="l"/>
+            <a:r>
+              <a:rPr sz="1600" b="1">
+                <a:solidFill>
+                  <a:srgbClr val="5B3E83"/>
+                </a:solidFill>
+                <a:latin typeface="Bricolage Grotesque"/>
+              </a:rPr>
+              <a:t>Cinco cifras y ni una vez el nombre del país.</a:t>
+            </a:r>
+          </a:p>
+          <a:p>
+            <a:pPr algn="l"/>
+            <a:r>
+              <a:rPr sz="1100" i="1">
+                <a:solidFill>
+                  <a:srgbClr val="6A6E78"/>
+                </a:solidFill>
+                <a:latin typeface="Inter"/>
+              </a:rPr>
+              <a:t>Vijf cijfers en geen enkele keer de naam van het land.</a:t>
+            </a:r>
+          </a:p>
+        </p:txBody>
+      </p:sp>
+      <p:sp>
+        <p:nvSpPr>
+          <p:cNvPr id="9" name="ReglaCaja"/>
+          <p:cNvSpPr/>
+          <p:nvPr/>
+        </p:nvSpPr>
+        <p:spPr>
+          <a:xfrm>
+            <a:off x="457200" y="1847088"/>
+            <a:ext cx="11274552" cy="658368"/>
+          </a:xfrm>
+          <a:prstGeom prst="roundRect">
+            <a:avLst>
+              <a:gd name="adj" fmla="val 5000"/>
+            </a:avLst>
+          </a:prstGeom>
+          <a:solidFill>
+            <a:srgbClr val="FBF3D6"/>
+          </a:solidFill>
+          <a:ln>
+            <a:noFill/>
+          </a:ln>
+          <a:effectLst/>
+        </p:spPr>
+        <p:style>
+          <a:lnRef idx="1">
+            <a:schemeClr val="accent1"/>
+          </a:lnRef>
+          <a:fillRef idx="3">
+            <a:schemeClr val="accent1"/>
+          </a:fillRef>
+          <a:effectRef idx="2">
+            <a:schemeClr val="accent1"/>
+          </a:effectRef>
+          <a:fontRef idx="minor">
+            <a:schemeClr val="lt1"/>
+          </a:fontRef>
+        </p:style>
+        <p:txBody>
+          <a:bodyPr rtlCol="0" anchor="ctr"/>
+          <a:lstStyle/>
+          <a:p/>
+        </p:txBody>
+      </p:sp>
+      <p:sp>
+        <p:nvSpPr>
+          <p:cNvPr id="10" name="ReglaTxt"/>
+          <p:cNvSpPr txBox="1"/>
+          <p:nvPr/>
+        </p:nvSpPr>
+        <p:spPr>
+          <a:xfrm>
+            <a:off x="603504" y="1883664"/>
+            <a:ext cx="10972800" cy="585216"/>
+          </a:xfrm>
+          <a:prstGeom prst="rect">
+            <a:avLst/>
+          </a:prstGeom>
+          <a:noFill/>
+        </p:spPr>
+        <p:txBody>
+          <a:bodyPr wrap="square" anchor="t" lIns="45720" rIns="45720" tIns="27432" bIns="27432">
+            <a:normAutofit/>
+          </a:bodyPr>
+          <a:lstStyle/>
+          <a:p>
+            <a:pPr algn="l"/>
+            <a:r>
+              <a:rPr sz="850" b="1">
+                <a:solidFill>
+                  <a:srgbClr val="B7860B"/>
+                </a:solidFill>
+                <a:latin typeface="Inter"/>
+              </a:rPr>
+              <a:t>LA REGLA DEL RETO</a:t>
+            </a:r>
+          </a:p>
+          <a:p>
+            <a:pPr algn="l"/>
+            <a:r>
+              <a:rPr sz="1100">
+                <a:solidFill>
+                  <a:srgbClr val="20242E"/>
+                </a:solidFill>
+                <a:latin typeface="Inter"/>
+              </a:rPr>
+              <a:t>De landnaam, de hoofdstad en de vlag zijn verboden. Alleen cijfers, en elk cijfer krijgt een zin met een werkwoord — een lijstje getallen is geen presentatie.</a:t>
+            </a:r>
+          </a:p>
+        </p:txBody>
+      </p:sp>
+      <p:sp>
+        <p:nvSpPr>
+          <p:cNvPr id="11" name="Tarjeta 0"/>
+          <p:cNvSpPr/>
+          <p:nvPr/>
+        </p:nvSpPr>
+        <p:spPr>
+          <a:xfrm>
+            <a:off x="457200" y="2670048"/>
+            <a:ext cx="2708910" cy="898398"/>
+          </a:xfrm>
+          <a:prstGeom prst="roundRect">
+            <a:avLst>
+              <a:gd name="adj" fmla="val 6000"/>
+            </a:avLst>
+          </a:prstGeom>
+          <a:solidFill>
+            <a:srgbClr val="FFFFFF"/>
+          </a:solidFill>
+          <a:ln w="12700">
+            <a:solidFill>
+              <a:srgbClr val="E4E3DE"/>
+            </a:solidFill>
+          </a:ln>
+          <a:effectLst/>
+        </p:spPr>
+        <p:style>
+          <a:lnRef idx="1">
+            <a:schemeClr val="accent1"/>
+          </a:lnRef>
+          <a:fillRef idx="3">
+            <a:schemeClr val="accent1"/>
+          </a:fillRef>
+          <a:effectRef idx="2">
+            <a:schemeClr val="accent1"/>
+          </a:effectRef>
+          <a:fontRef idx="minor">
+            <a:schemeClr val="lt1"/>
+          </a:fontRef>
+        </p:style>
+        <p:txBody>
+          <a:bodyPr rtlCol="0" anchor="ctr"/>
+          <a:lstStyle/>
+          <a:p/>
+        </p:txBody>
+      </p:sp>
+      <p:sp>
+        <p:nvSpPr>
+          <p:cNvPr id="12" name="TarjetaTxt 0"/>
+          <p:cNvSpPr txBox="1"/>
+          <p:nvPr/>
+        </p:nvSpPr>
+        <p:spPr>
+          <a:xfrm>
+            <a:off x="548640" y="2724912"/>
+            <a:ext cx="2526030" cy="788670"/>
+          </a:xfrm>
+          <a:prstGeom prst="rect">
+            <a:avLst/>
+          </a:prstGeom>
+          <a:noFill/>
+        </p:spPr>
+        <p:txBody>
+          <a:bodyPr wrap="square" anchor="t" lIns="45720" rIns="45720" tIns="27432" bIns="27432">
+            <a:normAutofit/>
+          </a:bodyPr>
+          <a:lstStyle/>
+          <a:p>
+            <a:pPr algn="l"/>
+            <a:r>
+              <a:rPr sz="1100" b="1">
+                <a:solidFill>
+                  <a:srgbClr val="5B3E83"/>
+                </a:solidFill>
+                <a:latin typeface="Bricolage Grotesque"/>
+              </a:rPr>
+              <a:t>Tipos de dato</a:t>
+            </a:r>
+          </a:p>
+          <a:p>
+            <a:pPr algn="l"/>
+            <a:r>
+              <a:rPr sz="1000">
+                <a:solidFill>
+                  <a:srgbClr val="20242E"/>
+                </a:solidFill>
+                <a:latin typeface="Inter"/>
+              </a:rPr>
+              <a:t>habitantes · kilómetros de costa · número de lenguas oficiales</a:t>
+            </a:r>
+          </a:p>
+        </p:txBody>
+      </p:sp>
+      <p:sp>
+        <p:nvSpPr>
+          <p:cNvPr id="13" name="Tarjeta 1"/>
+          <p:cNvSpPr/>
+          <p:nvPr/>
+        </p:nvSpPr>
+        <p:spPr>
+          <a:xfrm>
+            <a:off x="3312414" y="2670048"/>
+            <a:ext cx="2708910" cy="898398"/>
+          </a:xfrm>
+          <a:prstGeom prst="roundRect">
+            <a:avLst>
+              <a:gd name="adj" fmla="val 6000"/>
+            </a:avLst>
+          </a:prstGeom>
+          <a:solidFill>
+            <a:srgbClr val="FFFFFF"/>
+          </a:solidFill>
+          <a:ln w="12700">
+            <a:solidFill>
+              <a:srgbClr val="E4E3DE"/>
+            </a:solidFill>
+          </a:ln>
+          <a:effectLst/>
+        </p:spPr>
+        <p:style>
+          <a:lnRef idx="1">
+            <a:schemeClr val="accent1"/>
+          </a:lnRef>
+          <a:fillRef idx="3">
+            <a:schemeClr val="accent1"/>
+          </a:fillRef>
+          <a:effectRef idx="2">
+            <a:schemeClr val="accent1"/>
+          </a:effectRef>
+          <a:fontRef idx="minor">
+            <a:schemeClr val="lt1"/>
+          </a:fontRef>
+        </p:style>
+        <p:txBody>
+          <a:bodyPr rtlCol="0" anchor="ctr"/>
+          <a:lstStyle/>
+          <a:p/>
+        </p:txBody>
+      </p:sp>
+      <p:sp>
+        <p:nvSpPr>
+          <p:cNvPr id="14" name="TarjetaTxt 1"/>
+          <p:cNvSpPr txBox="1"/>
+          <p:nvPr/>
+        </p:nvSpPr>
+        <p:spPr>
+          <a:xfrm>
+            <a:off x="3403854" y="2724912"/>
+            <a:ext cx="2526030" cy="788670"/>
+          </a:xfrm>
+          <a:prstGeom prst="rect">
+            <a:avLst/>
+          </a:prstGeom>
+          <a:noFill/>
+        </p:spPr>
+        <p:txBody>
+          <a:bodyPr wrap="square" anchor="t" lIns="45720" rIns="45720" tIns="27432" bIns="27432">
+            <a:normAutofit/>
+          </a:bodyPr>
+          <a:lstStyle/>
+          <a:p>
+            <a:pPr algn="l"/>
+            <a:r>
+              <a:rPr sz="1100" b="1">
+                <a:solidFill>
+                  <a:srgbClr val="5B3E83"/>
+                </a:solidFill>
+                <a:latin typeface="Bricolage Grotesque"/>
+              </a:rPr>
+              <a:t>Tipos de dato</a:t>
+            </a:r>
+          </a:p>
+          <a:p>
+            <a:pPr algn="l"/>
+            <a:r>
+              <a:rPr sz="1000">
+                <a:solidFill>
+                  <a:srgbClr val="20242E"/>
+                </a:solidFill>
+                <a:latin typeface="Inter"/>
+              </a:rPr>
+              <a:t>altura de la capital · años de independencia · temperatura media en enero</a:t>
+            </a:r>
+          </a:p>
+        </p:txBody>
+      </p:sp>
+      <p:sp>
+        <p:nvSpPr>
+          <p:cNvPr id="15" name="Tarjeta 2"/>
+          <p:cNvSpPr/>
+          <p:nvPr/>
+        </p:nvSpPr>
+        <p:spPr>
+          <a:xfrm>
+            <a:off x="6167628" y="2670048"/>
+            <a:ext cx="2708910" cy="898398"/>
+          </a:xfrm>
+          <a:prstGeom prst="roundRect">
+            <a:avLst>
+              <a:gd name="adj" fmla="val 6000"/>
+            </a:avLst>
+          </a:prstGeom>
+          <a:solidFill>
+            <a:srgbClr val="FFFFFF"/>
+          </a:solidFill>
+          <a:ln w="12700">
+            <a:solidFill>
+              <a:srgbClr val="E4E3DE"/>
+            </a:solidFill>
+          </a:ln>
+          <a:effectLst/>
+        </p:spPr>
+        <p:style>
+          <a:lnRef idx="1">
+            <a:schemeClr val="accent1"/>
+          </a:lnRef>
+          <a:fillRef idx="3">
+            <a:schemeClr val="accent1"/>
+          </a:fillRef>
+          <a:effectRef idx="2">
+            <a:schemeClr val="accent1"/>
+          </a:effectRef>
+          <a:fontRef idx="minor">
+            <a:schemeClr val="lt1"/>
+          </a:fontRef>
+        </p:style>
+        <p:txBody>
+          <a:bodyPr rtlCol="0" anchor="ctr"/>
+          <a:lstStyle/>
+          <a:p/>
+        </p:txBody>
+      </p:sp>
+      <p:sp>
+        <p:nvSpPr>
+          <p:cNvPr id="16" name="TarjetaTxt 2"/>
+          <p:cNvSpPr txBox="1"/>
+          <p:nvPr/>
+        </p:nvSpPr>
+        <p:spPr>
+          <a:xfrm>
+            <a:off x="6259068" y="2724912"/>
+            <a:ext cx="2526030" cy="788670"/>
+          </a:xfrm>
+          <a:prstGeom prst="rect">
+            <a:avLst/>
+          </a:prstGeom>
+          <a:noFill/>
+        </p:spPr>
+        <p:txBody>
+          <a:bodyPr wrap="square" anchor="t" lIns="45720" rIns="45720" tIns="27432" bIns="27432">
+            <a:normAutofit/>
+          </a:bodyPr>
+          <a:lstStyle/>
+          <a:p>
+            <a:pPr algn="l"/>
+            <a:r>
+              <a:rPr sz="1100" b="1">
+                <a:solidFill>
+                  <a:srgbClr val="5B3E83"/>
+                </a:solidFill>
+                <a:latin typeface="Bricolage Grotesque"/>
+              </a:rPr>
+              <a:t>Tipos de dato</a:t>
+            </a:r>
+          </a:p>
+          <a:p>
+            <a:pPr algn="l"/>
+            <a:r>
+              <a:rPr sz="1000">
+                <a:solidFill>
+                  <a:srgbClr val="20242E"/>
+                </a:solidFill>
+                <a:latin typeface="Inter"/>
+              </a:rPr>
+              <a:t>número de países vecinos · porcentaje del país que es selva o montaña</a:t>
+            </a:r>
+          </a:p>
+        </p:txBody>
+      </p:sp>
+      <p:sp>
+        <p:nvSpPr>
+          <p:cNvPr id="17" name="Tarjeta 3"/>
+          <p:cNvSpPr/>
+          <p:nvPr/>
+        </p:nvSpPr>
+        <p:spPr>
+          <a:xfrm>
+            <a:off x="9022842" y="2670048"/>
+            <a:ext cx="2708910" cy="898398"/>
+          </a:xfrm>
+          <a:prstGeom prst="roundRect">
+            <a:avLst>
+              <a:gd name="adj" fmla="val 6000"/>
+            </a:avLst>
+          </a:prstGeom>
+          <a:solidFill>
+            <a:srgbClr val="FFFFFF"/>
+          </a:solidFill>
+          <a:ln w="12700">
+            <a:solidFill>
+              <a:srgbClr val="E4E3DE"/>
+            </a:solidFill>
+          </a:ln>
+          <a:effectLst/>
+        </p:spPr>
+        <p:style>
+          <a:lnRef idx="1">
+            <a:schemeClr val="accent1"/>
+          </a:lnRef>
+          <a:fillRef idx="3">
+            <a:schemeClr val="accent1"/>
+          </a:fillRef>
+          <a:effectRef idx="2">
+            <a:schemeClr val="accent1"/>
+          </a:effectRef>
+          <a:fontRef idx="minor">
+            <a:schemeClr val="lt1"/>
+          </a:fontRef>
+        </p:style>
+        <p:txBody>
+          <a:bodyPr rtlCol="0" anchor="ctr"/>
+          <a:lstStyle/>
+          <a:p/>
+        </p:txBody>
+      </p:sp>
+      <p:sp>
+        <p:nvSpPr>
+          <p:cNvPr id="18" name="TarjetaTxt 3"/>
+          <p:cNvSpPr txBox="1"/>
+          <p:nvPr/>
+        </p:nvSpPr>
+        <p:spPr>
+          <a:xfrm>
+            <a:off x="9114282" y="2724912"/>
+            <a:ext cx="2526030" cy="788670"/>
+          </a:xfrm>
+          <a:prstGeom prst="rect">
+            <a:avLst/>
+          </a:prstGeom>
+          <a:noFill/>
+        </p:spPr>
+        <p:txBody>
+          <a:bodyPr wrap="square" anchor="t" lIns="45720" rIns="45720" tIns="27432" bIns="27432">
+            <a:normAutofit/>
+          </a:bodyPr>
+          <a:lstStyle/>
+          <a:p>
+            <a:pPr algn="l"/>
+            <a:r>
+              <a:rPr sz="1100" b="1">
+                <a:solidFill>
+                  <a:srgbClr val="5B3E83"/>
+                </a:solidFill>
+                <a:latin typeface="Bricolage Grotesque"/>
+              </a:rPr>
+              <a:t>marco</a:t>
+            </a:r>
+          </a:p>
+          <a:p>
+            <a:pPr algn="l"/>
+            <a:r>
+              <a:rPr sz="1000">
+                <a:solidFill>
+                  <a:srgbClr val="20242E"/>
+                </a:solidFill>
+                <a:latin typeface="Inter"/>
+              </a:rPr>
+              <a:t>En mi país viven … millones de personas.</a:t>
+            </a:r>
+          </a:p>
+        </p:txBody>
+      </p:sp>
+      <p:sp>
+        <p:nvSpPr>
+          <p:cNvPr id="19" name="Tarjeta 4"/>
+          <p:cNvSpPr/>
+          <p:nvPr/>
+        </p:nvSpPr>
+        <p:spPr>
+          <a:xfrm>
+            <a:off x="457200" y="3696462"/>
+            <a:ext cx="2708910" cy="898398"/>
+          </a:xfrm>
+          <a:prstGeom prst="roundRect">
+            <a:avLst>
+              <a:gd name="adj" fmla="val 6000"/>
+            </a:avLst>
+          </a:prstGeom>
+          <a:solidFill>
+            <a:srgbClr val="FFFFFF"/>
+          </a:solidFill>
+          <a:ln w="12700">
+            <a:solidFill>
+              <a:srgbClr val="E4E3DE"/>
+            </a:solidFill>
+          </a:ln>
+          <a:effectLst/>
+        </p:spPr>
+        <p:style>
+          <a:lnRef idx="1">
+            <a:schemeClr val="accent1"/>
+          </a:lnRef>
+          <a:fillRef idx="3">
+            <a:schemeClr val="accent1"/>
+          </a:fillRef>
+          <a:effectRef idx="2">
+            <a:schemeClr val="accent1"/>
+          </a:effectRef>
+          <a:fontRef idx="minor">
+            <a:schemeClr val="lt1"/>
+          </a:fontRef>
+        </p:style>
+        <p:txBody>
+          <a:bodyPr rtlCol="0" anchor="ctr"/>
+          <a:lstStyle/>
+          <a:p/>
+        </p:txBody>
+      </p:sp>
+      <p:sp>
+        <p:nvSpPr>
+          <p:cNvPr id="20" name="TarjetaTxt 4"/>
+          <p:cNvSpPr txBox="1"/>
+          <p:nvPr/>
+        </p:nvSpPr>
+        <p:spPr>
+          <a:xfrm>
+            <a:off x="548640" y="3751326"/>
+            <a:ext cx="2526030" cy="788670"/>
+          </a:xfrm>
+          <a:prstGeom prst="rect">
+            <a:avLst/>
+          </a:prstGeom>
+          <a:noFill/>
+        </p:spPr>
+        <p:txBody>
+          <a:bodyPr wrap="square" anchor="t" lIns="45720" rIns="45720" tIns="27432" bIns="27432">
+            <a:normAutofit/>
+          </a:bodyPr>
+          <a:lstStyle/>
+          <a:p>
+            <a:pPr algn="l"/>
+            <a:r>
+              <a:rPr sz="1100" b="1">
+                <a:solidFill>
+                  <a:srgbClr val="5B3E83"/>
+                </a:solidFill>
+                <a:latin typeface="Bricolage Grotesque"/>
+              </a:rPr>
+              <a:t>marco</a:t>
+            </a:r>
+          </a:p>
+          <a:p>
+            <a:pPr algn="l"/>
+            <a:r>
+              <a:rPr sz="1000">
+                <a:solidFill>
+                  <a:srgbClr val="20242E"/>
+                </a:solidFill>
+                <a:latin typeface="Inter"/>
+              </a:rPr>
+              <a:t>Tiene … kilómetros de costa.</a:t>
+            </a:r>
+          </a:p>
+        </p:txBody>
+      </p:sp>
+      <p:sp>
+        <p:nvSpPr>
+          <p:cNvPr id="21" name="Tarjeta 5"/>
+          <p:cNvSpPr/>
+          <p:nvPr/>
+        </p:nvSpPr>
+        <p:spPr>
+          <a:xfrm>
+            <a:off x="3312414" y="3696462"/>
+            <a:ext cx="2708910" cy="898398"/>
+          </a:xfrm>
+          <a:prstGeom prst="roundRect">
+            <a:avLst>
+              <a:gd name="adj" fmla="val 6000"/>
+            </a:avLst>
+          </a:prstGeom>
+          <a:solidFill>
+            <a:srgbClr val="FFFFFF"/>
+          </a:solidFill>
+          <a:ln w="12700">
+            <a:solidFill>
+              <a:srgbClr val="E4E3DE"/>
+            </a:solidFill>
+          </a:ln>
+          <a:effectLst/>
+        </p:spPr>
+        <p:style>
+          <a:lnRef idx="1">
+            <a:schemeClr val="accent1"/>
+          </a:lnRef>
+          <a:fillRef idx="3">
+            <a:schemeClr val="accent1"/>
+          </a:fillRef>
+          <a:effectRef idx="2">
+            <a:schemeClr val="accent1"/>
+          </a:effectRef>
+          <a:fontRef idx="minor">
+            <a:schemeClr val="lt1"/>
+          </a:fontRef>
+        </p:style>
+        <p:txBody>
+          <a:bodyPr rtlCol="0" anchor="ctr"/>
+          <a:lstStyle/>
+          <a:p/>
+        </p:txBody>
+      </p:sp>
+      <p:sp>
+        <p:nvSpPr>
+          <p:cNvPr id="22" name="TarjetaTxt 5"/>
+          <p:cNvSpPr txBox="1"/>
+          <p:nvPr/>
+        </p:nvSpPr>
+        <p:spPr>
+          <a:xfrm>
+            <a:off x="3403854" y="3751326"/>
+            <a:ext cx="2526030" cy="788670"/>
+          </a:xfrm>
+          <a:prstGeom prst="rect">
+            <a:avLst/>
+          </a:prstGeom>
+          <a:noFill/>
+        </p:spPr>
+        <p:txBody>
+          <a:bodyPr wrap="square" anchor="t" lIns="45720" rIns="45720" tIns="27432" bIns="27432">
+            <a:normAutofit/>
+          </a:bodyPr>
+          <a:lstStyle/>
+          <a:p>
+            <a:pPr algn="l"/>
+            <a:r>
+              <a:rPr sz="1100" b="1">
+                <a:solidFill>
+                  <a:srgbClr val="5B3E83"/>
+                </a:solidFill>
+                <a:latin typeface="Bricolage Grotesque"/>
+              </a:rPr>
+              <a:t>marco</a:t>
+            </a:r>
+          </a:p>
+          <a:p>
+            <a:pPr algn="l"/>
+            <a:r>
+              <a:rPr sz="1000">
+                <a:solidFill>
+                  <a:srgbClr val="20242E"/>
+                </a:solidFill>
+                <a:latin typeface="Inter"/>
+              </a:rPr>
+              <a:t>Se hablan … lenguas oficiales.</a:t>
+            </a:r>
+          </a:p>
+        </p:txBody>
+      </p:sp>
+      <p:sp>
+        <p:nvSpPr>
+          <p:cNvPr id="23" name="Tarjeta 6"/>
+          <p:cNvSpPr/>
+          <p:nvPr/>
+        </p:nvSpPr>
+        <p:spPr>
+          <a:xfrm>
+            <a:off x="6167628" y="3696462"/>
+            <a:ext cx="2708910" cy="898398"/>
+          </a:xfrm>
+          <a:prstGeom prst="roundRect">
+            <a:avLst>
+              <a:gd name="adj" fmla="val 6000"/>
+            </a:avLst>
+          </a:prstGeom>
+          <a:solidFill>
+            <a:srgbClr val="FFFFFF"/>
+          </a:solidFill>
+          <a:ln w="12700">
+            <a:solidFill>
+              <a:srgbClr val="E4E3DE"/>
+            </a:solidFill>
+          </a:ln>
+          <a:effectLst/>
+        </p:spPr>
+        <p:style>
+          <a:lnRef idx="1">
+            <a:schemeClr val="accent1"/>
+          </a:lnRef>
+          <a:fillRef idx="3">
+            <a:schemeClr val="accent1"/>
+          </a:fillRef>
+          <a:effectRef idx="2">
+            <a:schemeClr val="accent1"/>
+          </a:effectRef>
+          <a:fontRef idx="minor">
+            <a:schemeClr val="lt1"/>
+          </a:fontRef>
+        </p:style>
+        <p:txBody>
+          <a:bodyPr rtlCol="0" anchor="ctr"/>
+          <a:lstStyle/>
+          <a:p/>
+        </p:txBody>
+      </p:sp>
+      <p:sp>
+        <p:nvSpPr>
+          <p:cNvPr id="24" name="TarjetaTxt 6"/>
+          <p:cNvSpPr txBox="1"/>
+          <p:nvPr/>
+        </p:nvSpPr>
+        <p:spPr>
+          <a:xfrm>
+            <a:off x="6259068" y="3751326"/>
+            <a:ext cx="2526030" cy="788670"/>
+          </a:xfrm>
+          <a:prstGeom prst="rect">
+            <a:avLst/>
+          </a:prstGeom>
+          <a:noFill/>
+        </p:spPr>
+        <p:txBody>
+          <a:bodyPr wrap="square" anchor="t" lIns="45720" rIns="45720" tIns="27432" bIns="27432">
+            <a:normAutofit/>
+          </a:bodyPr>
+          <a:lstStyle/>
+          <a:p>
+            <a:pPr algn="l"/>
+            <a:r>
+              <a:rPr sz="1100" b="1">
+                <a:solidFill>
+                  <a:srgbClr val="5B3E83"/>
+                </a:solidFill>
+                <a:latin typeface="Bricolage Grotesque"/>
+              </a:rPr>
+              <a:t>marco</a:t>
+            </a:r>
+          </a:p>
+          <a:p>
+            <a:pPr algn="l"/>
+            <a:r>
+              <a:rPr sz="1000">
+                <a:solidFill>
+                  <a:srgbClr val="20242E"/>
+                </a:solidFill>
+                <a:latin typeface="Inter"/>
+              </a:rPr>
+              <a:t>La capital está a … metros.</a:t>
+            </a:r>
+          </a:p>
+        </p:txBody>
+      </p:sp>
+      <p:sp>
+        <p:nvSpPr>
+          <p:cNvPr id="25" name="Tarjeta 7"/>
+          <p:cNvSpPr/>
+          <p:nvPr/>
+        </p:nvSpPr>
+        <p:spPr>
+          <a:xfrm>
+            <a:off x="9022842" y="3696462"/>
+            <a:ext cx="2708910" cy="898398"/>
+          </a:xfrm>
+          <a:prstGeom prst="roundRect">
+            <a:avLst>
+              <a:gd name="adj" fmla="val 6000"/>
+            </a:avLst>
+          </a:prstGeom>
+          <a:solidFill>
+            <a:srgbClr val="FFFFFF"/>
+          </a:solidFill>
+          <a:ln w="12700">
+            <a:solidFill>
+              <a:srgbClr val="E4E3DE"/>
+            </a:solidFill>
+          </a:ln>
+          <a:effectLst/>
+        </p:spPr>
+        <p:style>
+          <a:lnRef idx="1">
+            <a:schemeClr val="accent1"/>
+          </a:lnRef>
+          <a:fillRef idx="3">
+            <a:schemeClr val="accent1"/>
+          </a:fillRef>
+          <a:effectRef idx="2">
+            <a:schemeClr val="accent1"/>
+          </a:effectRef>
+          <a:fontRef idx="minor">
+            <a:schemeClr val="lt1"/>
+          </a:fontRef>
+        </p:style>
+        <p:txBody>
+          <a:bodyPr rtlCol="0" anchor="ctr"/>
+          <a:lstStyle/>
+          <a:p/>
+        </p:txBody>
+      </p:sp>
+      <p:sp>
+        <p:nvSpPr>
+          <p:cNvPr id="26" name="TarjetaTxt 7"/>
+          <p:cNvSpPr txBox="1"/>
+          <p:nvPr/>
+        </p:nvSpPr>
+        <p:spPr>
+          <a:xfrm>
+            <a:off x="9114282" y="3751326"/>
+            <a:ext cx="2526030" cy="788670"/>
+          </a:xfrm>
+          <a:prstGeom prst="rect">
+            <a:avLst/>
+          </a:prstGeom>
+          <a:noFill/>
+        </p:spPr>
+        <p:txBody>
+          <a:bodyPr wrap="square" anchor="t" lIns="45720" rIns="45720" tIns="27432" bIns="27432">
+            <a:normAutofit/>
+          </a:bodyPr>
+          <a:lstStyle/>
+          <a:p>
+            <a:pPr algn="l"/>
+            <a:r>
+              <a:rPr sz="1100" b="1">
+                <a:solidFill>
+                  <a:srgbClr val="5B3E83"/>
+                </a:solidFill>
+                <a:latin typeface="Bricolage Grotesque"/>
+              </a:rPr>
+              <a:t>marco</a:t>
+            </a:r>
+          </a:p>
+          <a:p>
+            <a:pPr algn="l"/>
+            <a:r>
+              <a:rPr sz="1000">
+                <a:solidFill>
+                  <a:srgbClr val="20242E"/>
+                </a:solidFill>
+                <a:latin typeface="Inter"/>
+              </a:rPr>
+              <a:t>Limita con … países.</a:t>
+            </a:r>
+          </a:p>
+        </p:txBody>
+      </p:sp>
+      <p:sp>
+        <p:nvSpPr>
+          <p:cNvPr id="27" name="Tarjeta 8"/>
+          <p:cNvSpPr/>
+          <p:nvPr/>
+        </p:nvSpPr>
+        <p:spPr>
+          <a:xfrm>
+            <a:off x="457200" y="4722876"/>
+            <a:ext cx="2708910" cy="898398"/>
+          </a:xfrm>
+          <a:prstGeom prst="roundRect">
+            <a:avLst>
+              <a:gd name="adj" fmla="val 6000"/>
+            </a:avLst>
+          </a:prstGeom>
+          <a:solidFill>
+            <a:srgbClr val="FFFFFF"/>
+          </a:solidFill>
+          <a:ln w="12700">
+            <a:solidFill>
+              <a:srgbClr val="E4E3DE"/>
+            </a:solidFill>
+          </a:ln>
+          <a:effectLst/>
+        </p:spPr>
+        <p:style>
+          <a:lnRef idx="1">
+            <a:schemeClr val="accent1"/>
+          </a:lnRef>
+          <a:fillRef idx="3">
+            <a:schemeClr val="accent1"/>
+          </a:fillRef>
+          <a:effectRef idx="2">
+            <a:schemeClr val="accent1"/>
+          </a:effectRef>
+          <a:fontRef idx="minor">
+            <a:schemeClr val="lt1"/>
+          </a:fontRef>
+        </p:style>
+        <p:txBody>
+          <a:bodyPr rtlCol="0" anchor="ctr"/>
+          <a:lstStyle/>
+          <a:p/>
+        </p:txBody>
+      </p:sp>
+      <p:sp>
+        <p:nvSpPr>
+          <p:cNvPr id="28" name="TarjetaTxt 8"/>
+          <p:cNvSpPr txBox="1"/>
+          <p:nvPr/>
+        </p:nvSpPr>
+        <p:spPr>
+          <a:xfrm>
+            <a:off x="548640" y="4777740"/>
+            <a:ext cx="2526030" cy="788670"/>
+          </a:xfrm>
+          <a:prstGeom prst="rect">
+            <a:avLst/>
+          </a:prstGeom>
+          <a:noFill/>
+        </p:spPr>
+        <p:txBody>
+          <a:bodyPr wrap="square" anchor="t" lIns="45720" rIns="45720" tIns="27432" bIns="27432">
+            <a:normAutofit/>
+          </a:bodyPr>
+          <a:lstStyle/>
+          <a:p>
+            <a:pPr algn="l"/>
+            <a:r>
+              <a:rPr sz="1100" b="1">
+                <a:solidFill>
+                  <a:srgbClr val="5B3E83"/>
+                </a:solidFill>
+                <a:latin typeface="Bricolage Grotesque"/>
+              </a:rPr>
+              <a:t>dato 1</a:t>
+            </a:r>
+          </a:p>
+          <a:p>
+            <a:pPr algn="l"/>
+            <a:r>
+              <a:rPr sz="1000">
+                <a:solidFill>
+                  <a:srgbClr val="20242E"/>
+                </a:solidFill>
+                <a:latin typeface="Inter"/>
+              </a:rPr>
+              <a:t>Viven unos 6,5 millones de personas.</a:t>
+            </a:r>
+          </a:p>
+        </p:txBody>
+      </p:sp>
+      <p:sp>
+        <p:nvSpPr>
+          <p:cNvPr id="29" name="Tarjeta 9"/>
+          <p:cNvSpPr/>
+          <p:nvPr/>
+        </p:nvSpPr>
+        <p:spPr>
+          <a:xfrm>
+            <a:off x="3312414" y="4722876"/>
+            <a:ext cx="2708910" cy="898398"/>
+          </a:xfrm>
+          <a:prstGeom prst="roundRect">
+            <a:avLst>
+              <a:gd name="adj" fmla="val 6000"/>
+            </a:avLst>
+          </a:prstGeom>
+          <a:solidFill>
+            <a:srgbClr val="FFFFFF"/>
+          </a:solidFill>
+          <a:ln w="12700">
+            <a:solidFill>
+              <a:srgbClr val="E4E3DE"/>
+            </a:solidFill>
+          </a:ln>
+          <a:effectLst/>
+        </p:spPr>
+        <p:style>
+          <a:lnRef idx="1">
+            <a:schemeClr val="accent1"/>
+          </a:lnRef>
+          <a:fillRef idx="3">
+            <a:schemeClr val="accent1"/>
+          </a:fillRef>
+          <a:effectRef idx="2">
+            <a:schemeClr val="accent1"/>
+          </a:effectRef>
+          <a:fontRef idx="minor">
+            <a:schemeClr val="lt1"/>
+          </a:fontRef>
+        </p:style>
+        <p:txBody>
+          <a:bodyPr rtlCol="0" anchor="ctr"/>
+          <a:lstStyle/>
+          <a:p/>
+        </p:txBody>
+      </p:sp>
+      <p:sp>
+        <p:nvSpPr>
+          <p:cNvPr id="30" name="TarjetaTxt 9"/>
+          <p:cNvSpPr txBox="1"/>
+          <p:nvPr/>
+        </p:nvSpPr>
+        <p:spPr>
+          <a:xfrm>
+            <a:off x="3403854" y="4777740"/>
+            <a:ext cx="2526030" cy="788670"/>
+          </a:xfrm>
+          <a:prstGeom prst="rect">
+            <a:avLst/>
+          </a:prstGeom>
+          <a:noFill/>
+        </p:spPr>
+        <p:txBody>
+          <a:bodyPr wrap="square" anchor="t" lIns="45720" rIns="45720" tIns="27432" bIns="27432">
+            <a:normAutofit/>
+          </a:bodyPr>
+          <a:lstStyle/>
+          <a:p>
+            <a:pPr algn="l"/>
+            <a:r>
+              <a:rPr sz="1100" b="1">
+                <a:solidFill>
+                  <a:srgbClr val="5B3E83"/>
+                </a:solidFill>
+                <a:latin typeface="Bricolage Grotesque"/>
+              </a:rPr>
+              <a:t>dato 2</a:t>
+            </a:r>
+          </a:p>
+          <a:p>
+            <a:pPr algn="l"/>
+            <a:r>
+              <a:rPr sz="1000">
+                <a:solidFill>
+                  <a:srgbClr val="20242E"/>
+                </a:solidFill>
+                <a:latin typeface="Inter"/>
+              </a:rPr>
+              <a:t>Se hablan dos lenguas oficiales.</a:t>
+            </a:r>
+          </a:p>
+        </p:txBody>
+      </p:sp>
+      <p:sp>
+        <p:nvSpPr>
+          <p:cNvPr id="31" name="Tarjeta 10"/>
+          <p:cNvSpPr/>
+          <p:nvPr/>
+        </p:nvSpPr>
+        <p:spPr>
+          <a:xfrm>
+            <a:off x="6167628" y="4722876"/>
+            <a:ext cx="2708910" cy="898398"/>
+          </a:xfrm>
+          <a:prstGeom prst="roundRect">
+            <a:avLst>
+              <a:gd name="adj" fmla="val 6000"/>
+            </a:avLst>
+          </a:prstGeom>
+          <a:solidFill>
+            <a:srgbClr val="FFFFFF"/>
+          </a:solidFill>
+          <a:ln w="12700">
+            <a:solidFill>
+              <a:srgbClr val="E4E3DE"/>
+            </a:solidFill>
+          </a:ln>
+          <a:effectLst/>
+        </p:spPr>
+        <p:style>
+          <a:lnRef idx="1">
+            <a:schemeClr val="accent1"/>
+          </a:lnRef>
+          <a:fillRef idx="3">
+            <a:schemeClr val="accent1"/>
+          </a:fillRef>
+          <a:effectRef idx="2">
+            <a:schemeClr val="accent1"/>
+          </a:effectRef>
+          <a:fontRef idx="minor">
+            <a:schemeClr val="lt1"/>
+          </a:fontRef>
+        </p:style>
+        <p:txBody>
+          <a:bodyPr rtlCol="0" anchor="ctr"/>
+          <a:lstStyle/>
+          <a:p/>
+        </p:txBody>
+      </p:sp>
+      <p:sp>
+        <p:nvSpPr>
+          <p:cNvPr id="32" name="TarjetaTxt 10"/>
+          <p:cNvSpPr txBox="1"/>
+          <p:nvPr/>
+        </p:nvSpPr>
+        <p:spPr>
+          <a:xfrm>
+            <a:off x="6259068" y="4777740"/>
+            <a:ext cx="2526030" cy="788670"/>
+          </a:xfrm>
+          <a:prstGeom prst="rect">
+            <a:avLst/>
+          </a:prstGeom>
+          <a:noFill/>
+        </p:spPr>
+        <p:txBody>
+          <a:bodyPr wrap="square" anchor="t" lIns="45720" rIns="45720" tIns="27432" bIns="27432">
+            <a:normAutofit/>
+          </a:bodyPr>
+          <a:lstStyle/>
+          <a:p>
+            <a:pPr algn="l"/>
+            <a:r>
+              <a:rPr sz="1100" b="1">
+                <a:solidFill>
+                  <a:srgbClr val="5B3E83"/>
+                </a:solidFill>
+                <a:latin typeface="Bricolage Grotesque"/>
+              </a:rPr>
+              <a:t>dato 3</a:t>
+            </a:r>
+          </a:p>
+          <a:p>
+            <a:pPr algn="l"/>
+            <a:r>
+              <a:rPr sz="1000">
+                <a:solidFill>
+                  <a:srgbClr val="20242E"/>
+                </a:solidFill>
+                <a:latin typeface="Inter"/>
+              </a:rPr>
+              <a:t>No tiene costa.</a:t>
+            </a:r>
+          </a:p>
+        </p:txBody>
+      </p:sp>
+      <p:sp>
+        <p:nvSpPr>
+          <p:cNvPr id="33" name="Tarjeta 11"/>
+          <p:cNvSpPr/>
+          <p:nvPr/>
+        </p:nvSpPr>
+        <p:spPr>
+          <a:xfrm>
+            <a:off x="9022842" y="4722876"/>
+            <a:ext cx="2708910" cy="898398"/>
+          </a:xfrm>
+          <a:prstGeom prst="roundRect">
+            <a:avLst>
+              <a:gd name="adj" fmla="val 6000"/>
+            </a:avLst>
+          </a:prstGeom>
+          <a:solidFill>
+            <a:srgbClr val="FFFFFF"/>
+          </a:solidFill>
+          <a:ln w="12700">
+            <a:solidFill>
+              <a:srgbClr val="E4E3DE"/>
+            </a:solidFill>
+          </a:ln>
+          <a:effectLst/>
+        </p:spPr>
+        <p:style>
+          <a:lnRef idx="1">
+            <a:schemeClr val="accent1"/>
+          </a:lnRef>
+          <a:fillRef idx="3">
+            <a:schemeClr val="accent1"/>
+          </a:fillRef>
+          <a:effectRef idx="2">
+            <a:schemeClr val="accent1"/>
+          </a:effectRef>
+          <a:fontRef idx="minor">
+            <a:schemeClr val="lt1"/>
+          </a:fontRef>
+        </p:style>
+        <p:txBody>
+          <a:bodyPr rtlCol="0" anchor="ctr"/>
+          <a:lstStyle/>
+          <a:p/>
+        </p:txBody>
+      </p:sp>
+      <p:sp>
+        <p:nvSpPr>
+          <p:cNvPr id="34" name="TarjetaTxt 11"/>
+          <p:cNvSpPr txBox="1"/>
+          <p:nvPr/>
+        </p:nvSpPr>
+        <p:spPr>
+          <a:xfrm>
+            <a:off x="9114282" y="4777740"/>
+            <a:ext cx="2526030" cy="788670"/>
+          </a:xfrm>
+          <a:prstGeom prst="rect">
+            <a:avLst/>
+          </a:prstGeom>
+          <a:noFill/>
+        </p:spPr>
+        <p:txBody>
+          <a:bodyPr wrap="square" anchor="t" lIns="45720" rIns="45720" tIns="27432" bIns="27432">
+            <a:normAutofit/>
+          </a:bodyPr>
+          <a:lstStyle/>
+          <a:p>
+            <a:pPr algn="l"/>
+            <a:r>
+              <a:rPr sz="1100" b="1">
+                <a:solidFill>
+                  <a:srgbClr val="5B3E83"/>
+                </a:solidFill>
+                <a:latin typeface="Bricolage Grotesque"/>
+              </a:rPr>
+              <a:t>dato 4</a:t>
+            </a:r>
+          </a:p>
+          <a:p>
+            <a:pPr algn="l"/>
+            <a:r>
+              <a:rPr sz="1000">
+                <a:solidFill>
+                  <a:srgbClr val="20242E"/>
+                </a:solidFill>
+                <a:latin typeface="Inter"/>
+              </a:rPr>
+              <a:t>Limita con cinco países.</a:t>
+            </a:r>
+          </a:p>
+        </p:txBody>
+      </p:sp>
+      <p:sp>
+        <p:nvSpPr>
+          <p:cNvPr id="35" name="Tarjeta 12"/>
+          <p:cNvSpPr/>
+          <p:nvPr/>
+        </p:nvSpPr>
+        <p:spPr>
+          <a:xfrm>
+            <a:off x="457200" y="5749290"/>
+            <a:ext cx="2708910" cy="898398"/>
+          </a:xfrm>
+          <a:prstGeom prst="roundRect">
+            <a:avLst>
+              <a:gd name="adj" fmla="val 6000"/>
+            </a:avLst>
+          </a:prstGeom>
+          <a:solidFill>
+            <a:srgbClr val="FFFFFF"/>
+          </a:solidFill>
+          <a:ln w="12700">
+            <a:solidFill>
+              <a:srgbClr val="E4E3DE"/>
+            </a:solidFill>
+          </a:ln>
+          <a:effectLst/>
+        </p:spPr>
+        <p:style>
+          <a:lnRef idx="1">
+            <a:schemeClr val="accent1"/>
+          </a:lnRef>
+          <a:fillRef idx="3">
+            <a:schemeClr val="accent1"/>
+          </a:fillRef>
+          <a:effectRef idx="2">
+            <a:schemeClr val="accent1"/>
+          </a:effectRef>
+          <a:fontRef idx="minor">
+            <a:schemeClr val="lt1"/>
+          </a:fontRef>
+        </p:style>
+        <p:txBody>
+          <a:bodyPr rtlCol="0" anchor="ctr"/>
+          <a:lstStyle/>
+          <a:p/>
+        </p:txBody>
+      </p:sp>
+      <p:sp>
+        <p:nvSpPr>
+          <p:cNvPr id="36" name="TarjetaTxt 12"/>
+          <p:cNvSpPr txBox="1"/>
+          <p:nvPr/>
+        </p:nvSpPr>
+        <p:spPr>
+          <a:xfrm>
+            <a:off x="548640" y="5804154"/>
+            <a:ext cx="2526030" cy="788670"/>
+          </a:xfrm>
+          <a:prstGeom prst="rect">
+            <a:avLst/>
+          </a:prstGeom>
+          <a:noFill/>
+        </p:spPr>
+        <p:txBody>
+          <a:bodyPr wrap="square" anchor="t" lIns="45720" rIns="45720" tIns="27432" bIns="27432">
+            <a:normAutofit/>
+          </a:bodyPr>
+          <a:lstStyle/>
+          <a:p>
+            <a:pPr algn="l"/>
+            <a:r>
+              <a:rPr sz="1100" b="1">
+                <a:solidFill>
+                  <a:srgbClr val="5B3E83"/>
+                </a:solidFill>
+                <a:latin typeface="Bricolage Grotesque"/>
+              </a:rPr>
+              <a:t>dato 5</a:t>
+            </a:r>
+          </a:p>
+          <a:p>
+            <a:pPr algn="l"/>
+            <a:r>
+              <a:rPr sz="1000">
+                <a:solidFill>
+                  <a:srgbClr val="20242E"/>
+                </a:solidFill>
+                <a:latin typeface="Inter"/>
+              </a:rPr>
+              <a:t>El 90 % habla una lengua indígena.</a:t>
+            </a:r>
+          </a:p>
+        </p:txBody>
+      </p:sp>
+    </p:spTree>
+  </p:cSld>
+  <p:clrMapOvr>
+    <a:masterClrMapping/>
+  </p:clrMapOvr>
+</p:sld>
+</file>
+
+<file path=ppt/slides/slide26.xml><?xml version="1.0" encoding="utf-8"?>
+<p:sld xmlns:a="http://schemas.openxmlformats.org/drawingml/2006/main" xmlns:p="http://schemas.openxmlformats.org/presentationml/2006/main" xmlns:r="http://schemas.openxmlformats.org/officeDocument/2006/relationships">
+  <p:cSld>
+    <p:spTree>
+      <p:nvGrpSpPr>
+        <p:cNvPr id="1" name=""/>
+        <p:cNvGrpSpPr/>
+        <p:nvPr/>
+      </p:nvGrpSpPr>
+      <p:grpSpPr/>
+      <p:sp>
+        <p:nvSpPr>
+          <p:cNvPr id="2" name="Fondo"/>
+          <p:cNvSpPr/>
+          <p:nvPr/>
+        </p:nvSpPr>
+        <p:spPr>
+          <a:xfrm>
+            <a:off x="0" y="0"/>
+            <a:ext cx="12191695" cy="6858000"/>
+          </a:xfrm>
+          <a:prstGeom prst="rect">
+            <a:avLst/>
+          </a:prstGeom>
+          <a:solidFill>
+            <a:srgbClr val="FCFBF8"/>
+          </a:solidFill>
+          <a:ln>
+            <a:noFill/>
+          </a:ln>
+          <a:effectLst/>
+        </p:spPr>
+        <p:style>
+          <a:lnRef idx="1">
+            <a:schemeClr val="accent1"/>
+          </a:lnRef>
+          <a:fillRef idx="3">
+            <a:schemeClr val="accent1"/>
+          </a:fillRef>
+          <a:effectRef idx="2">
+            <a:schemeClr val="accent1"/>
+          </a:effectRef>
+          <a:fontRef idx="minor">
+            <a:schemeClr val="lt1"/>
+          </a:fontRef>
+        </p:style>
+        <p:txBody>
+          <a:bodyPr rtlCol="0" anchor="ctr"/>
+          <a:lstStyle/>
+          <a:p/>
+        </p:txBody>
+      </p:sp>
+      <p:sp>
+        <p:nvSpPr>
+          <p:cNvPr id="3" name="Cabecera"/>
+          <p:cNvSpPr/>
+          <p:nvPr/>
+        </p:nvSpPr>
+        <p:spPr>
+          <a:xfrm>
+            <a:off x="0" y="0"/>
+            <a:ext cx="12191695" cy="1078992"/>
+          </a:xfrm>
+          <a:prstGeom prst="rect">
+            <a:avLst/>
+          </a:prstGeom>
+          <a:solidFill>
+            <a:srgbClr val="7C56A9"/>
+          </a:solidFill>
+          <a:ln>
+            <a:noFill/>
+          </a:ln>
+          <a:effectLst/>
+        </p:spPr>
+        <p:style>
+          <a:lnRef idx="1">
+            <a:schemeClr val="accent1"/>
+          </a:lnRef>
+          <a:fillRef idx="3">
+            <a:schemeClr val="accent1"/>
+          </a:fillRef>
+          <a:effectRef idx="2">
+            <a:schemeClr val="accent1"/>
+          </a:effectRef>
+          <a:fontRef idx="minor">
+            <a:schemeClr val="lt1"/>
+          </a:fontRef>
+        </p:style>
+        <p:txBody>
+          <a:bodyPr rtlCol="0" anchor="ctr"/>
+          <a:lstStyle/>
+          <a:p/>
+        </p:txBody>
+      </p:sp>
+      <p:sp>
+        <p:nvSpPr>
+          <p:cNvPr id="4" name="Chip"/>
+          <p:cNvSpPr/>
+          <p:nvPr/>
+        </p:nvSpPr>
+        <p:spPr>
+          <a:xfrm>
+            <a:off x="457200" y="182880"/>
+            <a:ext cx="3017520" cy="292608"/>
+          </a:xfrm>
+          <a:prstGeom prst="roundRect">
+            <a:avLst>
+              <a:gd name="adj" fmla="val 50000"/>
+            </a:avLst>
+          </a:prstGeom>
+          <a:solidFill>
+            <a:srgbClr val="FFFFFF"/>
+          </a:solidFill>
+          <a:ln>
+            <a:noFill/>
+          </a:ln>
+          <a:effectLst/>
+        </p:spPr>
+        <p:style>
+          <a:lnRef idx="1">
+            <a:schemeClr val="accent1"/>
+          </a:lnRef>
+          <a:fillRef idx="3">
+            <a:schemeClr val="accent1"/>
+          </a:fillRef>
+          <a:effectRef idx="2">
+            <a:schemeClr val="accent1"/>
+          </a:effectRef>
+          <a:fontRef idx="minor">
+            <a:schemeClr val="lt1"/>
+          </a:fontRef>
+        </p:style>
+        <p:txBody>
+          <a:bodyPr rtlCol="0" anchor="ctr"/>
+          <a:lstStyle/>
+          <a:p/>
+        </p:txBody>
+      </p:sp>
+      <p:sp>
+        <p:nvSpPr>
+          <p:cNvPr id="5" name="ChipTxt"/>
+          <p:cNvSpPr txBox="1"/>
+          <p:nvPr/>
+        </p:nvSpPr>
+        <p:spPr>
+          <a:xfrm>
+            <a:off x="457200" y="173736"/>
+            <a:ext cx="3017520" cy="310896"/>
+          </a:xfrm>
+          <a:prstGeom prst="rect">
+            <a:avLst/>
+          </a:prstGeom>
+          <a:noFill/>
+        </p:spPr>
+        <p:txBody>
+          <a:bodyPr wrap="square" anchor="ctr" lIns="45720" rIns="45720" tIns="27432" bIns="27432">
+            <a:normAutofit/>
+          </a:bodyPr>
+          <a:lstStyle/>
+          <a:p>
+            <a:pPr algn="ctr"/>
+            <a:r>
+              <a:rPr sz="950" b="1">
+                <a:solidFill>
+                  <a:srgbClr val="5B3E83"/>
+                </a:solidFill>
+                <a:latin typeface="Inter"/>
+              </a:rPr>
+              <a:t>RETO 10 · ONDERHANDELING &amp; DILEMMA</a:t>
+            </a:r>
+          </a:p>
+        </p:txBody>
+      </p:sp>
+      <p:sp>
+        <p:nvSpPr>
+          <p:cNvPr id="6" name="Titulo"/>
+          <p:cNvSpPr txBox="1"/>
+          <p:nvPr/>
+        </p:nvSpPr>
+        <p:spPr>
+          <a:xfrm>
+            <a:off x="457200" y="502920"/>
+            <a:ext cx="8412480" cy="475488"/>
+          </a:xfrm>
+          <a:prstGeom prst="rect">
+            <a:avLst/>
+          </a:prstGeom>
+          <a:noFill/>
+        </p:spPr>
+        <p:txBody>
+          <a:bodyPr wrap="square" anchor="t" lIns="45720" rIns="45720" tIns="27432" bIns="27432">
+            <a:normAutofit/>
+          </a:bodyPr>
+          <a:lstStyle/>
+          <a:p>
+            <a:pPr algn="l"/>
+            <a:r>
+              <a:rPr sz="2700" b="1">
+                <a:solidFill>
+                  <a:srgbClr val="FFFFFF"/>
+                </a:solidFill>
+                <a:latin typeface="Bricolage Grotesque"/>
+              </a:rPr>
+              <a:t>La clase perfecta</a:t>
+            </a:r>
+          </a:p>
+        </p:txBody>
+      </p:sp>
+      <p:sp>
+        <p:nvSpPr>
+          <p:cNvPr id="7" name="Badges"/>
+          <p:cNvSpPr txBox="1"/>
+          <p:nvPr/>
+        </p:nvSpPr>
+        <p:spPr>
+          <a:xfrm>
+            <a:off x="9052560" y="256032"/>
+            <a:ext cx="2651760" cy="640080"/>
+          </a:xfrm>
+          <a:prstGeom prst="rect">
+            <a:avLst/>
+          </a:prstGeom>
+          <a:noFill/>
+        </p:spPr>
+        <p:txBody>
+          <a:bodyPr wrap="square" anchor="t" lIns="45720" rIns="45720" tIns="27432" bIns="27432">
+            <a:normAutofit/>
+          </a:bodyPr>
+          <a:lstStyle/>
+          <a:p>
+            <a:pPr algn="r"/>
+            <a:r>
+              <a:rPr sz="1000">
+                <a:solidFill>
+                  <a:srgbClr val="EEE8F5"/>
+                </a:solidFill>
+                <a:latin typeface="Inter"/>
+              </a:rPr>
+              <a:t>🏫 Toda la clase</a:t>
+            </a:r>
+          </a:p>
+          <a:p>
+            <a:pPr algn="r"/>
+            <a:r>
+              <a:rPr sz="1000">
+                <a:solidFill>
+                  <a:srgbClr val="EEE8F5"/>
+                </a:solidFill>
+                <a:latin typeface="Inter"/>
+              </a:rPr>
+              <a:t>± 18 min · ★★★</a:t>
+            </a:r>
+          </a:p>
+        </p:txBody>
+      </p:sp>
+      <p:sp>
+        <p:nvSpPr>
+          <p:cNvPr id="8" name="Gancho"/>
+          <p:cNvSpPr txBox="1"/>
+          <p:nvPr/>
+        </p:nvSpPr>
+        <p:spPr>
+          <a:xfrm>
+            <a:off x="457200" y="1225296"/>
+            <a:ext cx="11274552" cy="566928"/>
+          </a:xfrm>
+          <a:prstGeom prst="rect">
+            <a:avLst/>
+          </a:prstGeom>
+          <a:noFill/>
+        </p:spPr>
+        <p:txBody>
+          <a:bodyPr wrap="square" anchor="t" lIns="45720" rIns="45720" tIns="27432" bIns="27432">
+            <a:normAutofit/>
+          </a:bodyPr>
+          <a:lstStyle/>
+          <a:p>
+            <a:pPr algn="l"/>
+            <a:r>
+              <a:rPr sz="1600" b="1">
+                <a:solidFill>
+                  <a:srgbClr val="5B3E83"/>
+                </a:solidFill>
+                <a:latin typeface="Bricolage Grotesque"/>
+              </a:rPr>
+              <a:t>Vosotros escribís las reglas de este curso. Pero en español.</a:t>
+            </a:r>
+          </a:p>
+          <a:p>
+            <a:pPr algn="l"/>
+            <a:r>
+              <a:rPr sz="1100" i="1">
+                <a:solidFill>
+                  <a:srgbClr val="6A6E78"/>
+                </a:solidFill>
+                <a:latin typeface="Inter"/>
+              </a:rPr>
+              <a:t>Jullie schrijven de afspraken van dit schooljaar. Maar in het Spaans.</a:t>
+            </a:r>
+          </a:p>
+        </p:txBody>
+      </p:sp>
+      <p:sp>
+        <p:nvSpPr>
+          <p:cNvPr id="9" name="ReglaCaja"/>
+          <p:cNvSpPr/>
+          <p:nvPr/>
+        </p:nvSpPr>
+        <p:spPr>
+          <a:xfrm>
+            <a:off x="457200" y="1847088"/>
+            <a:ext cx="11274552" cy="658368"/>
+          </a:xfrm>
+          <a:prstGeom prst="roundRect">
+            <a:avLst>
+              <a:gd name="adj" fmla="val 5000"/>
+            </a:avLst>
+          </a:prstGeom>
+          <a:solidFill>
+            <a:srgbClr val="FBF3D6"/>
+          </a:solidFill>
+          <a:ln>
+            <a:noFill/>
+          </a:ln>
+          <a:effectLst/>
+        </p:spPr>
+        <p:style>
+          <a:lnRef idx="1">
+            <a:schemeClr val="accent1"/>
+          </a:lnRef>
+          <a:fillRef idx="3">
+            <a:schemeClr val="accent1"/>
+          </a:fillRef>
+          <a:effectRef idx="2">
+            <a:schemeClr val="accent1"/>
+          </a:effectRef>
+          <a:fontRef idx="minor">
+            <a:schemeClr val="lt1"/>
+          </a:fontRef>
+        </p:style>
+        <p:txBody>
+          <a:bodyPr rtlCol="0" anchor="ctr"/>
+          <a:lstStyle/>
+          <a:p/>
+        </p:txBody>
+      </p:sp>
+      <p:sp>
+        <p:nvSpPr>
+          <p:cNvPr id="10" name="ReglaTxt"/>
+          <p:cNvSpPr txBox="1"/>
+          <p:nvPr/>
+        </p:nvSpPr>
+        <p:spPr>
+          <a:xfrm>
+            <a:off x="603504" y="1883664"/>
+            <a:ext cx="10972800" cy="585216"/>
+          </a:xfrm>
+          <a:prstGeom prst="rect">
+            <a:avLst/>
+          </a:prstGeom>
+          <a:noFill/>
+        </p:spPr>
+        <p:txBody>
+          <a:bodyPr wrap="square" anchor="t" lIns="45720" rIns="45720" tIns="27432" bIns="27432">
+            <a:normAutofit/>
+          </a:bodyPr>
+          <a:lstStyle/>
+          <a:p>
+            <a:pPr algn="l"/>
+            <a:r>
+              <a:rPr sz="850" b="1">
+                <a:solidFill>
+                  <a:srgbClr val="B7860B"/>
+                </a:solidFill>
+                <a:latin typeface="Inter"/>
+              </a:rPr>
+              <a:t>LA REGLA DEL RETO</a:t>
+            </a:r>
+          </a:p>
+          <a:p>
+            <a:pPr algn="l"/>
+            <a:r>
+              <a:rPr sz="1100">
+                <a:solidFill>
+                  <a:srgbClr val="20242E"/>
+                </a:solidFill>
+                <a:latin typeface="Inter"/>
+              </a:rPr>
+              <a:t>Elk voorstel bevat een zin met «es» of «está» — «es importante que hablemos español» mag niet, want dat is subjuntivo; «es importante hablar español» wel. Een voorstel zonder ser of estar komt niet op het bord.</a:t>
+            </a:r>
+          </a:p>
+        </p:txBody>
+      </p:sp>
+      <p:sp>
+        <p:nvSpPr>
+          <p:cNvPr id="11" name="Tarjeta 0"/>
+          <p:cNvSpPr/>
+          <p:nvPr/>
+        </p:nvSpPr>
+        <p:spPr>
+          <a:xfrm>
+            <a:off x="457200" y="2670048"/>
+            <a:ext cx="2708910" cy="898398"/>
+          </a:xfrm>
+          <a:prstGeom prst="roundRect">
+            <a:avLst>
+              <a:gd name="adj" fmla="val 6000"/>
+            </a:avLst>
+          </a:prstGeom>
+          <a:solidFill>
+            <a:srgbClr val="FFFFFF"/>
+          </a:solidFill>
+          <a:ln w="12700">
+            <a:solidFill>
+              <a:srgbClr val="E4E3DE"/>
+            </a:solidFill>
+          </a:ln>
+          <a:effectLst/>
+        </p:spPr>
+        <p:style>
+          <a:lnRef idx="1">
+            <a:schemeClr val="accent1"/>
+          </a:lnRef>
+          <a:fillRef idx="3">
+            <a:schemeClr val="accent1"/>
+          </a:fillRef>
+          <a:effectRef idx="2">
+            <a:schemeClr val="accent1"/>
+          </a:effectRef>
+          <a:fontRef idx="minor">
+            <a:schemeClr val="lt1"/>
+          </a:fontRef>
+        </p:style>
+        <p:txBody>
+          <a:bodyPr rtlCol="0" anchor="ctr"/>
+          <a:lstStyle/>
+          <a:p/>
+        </p:txBody>
+      </p:sp>
+      <p:sp>
+        <p:nvSpPr>
+          <p:cNvPr id="12" name="TarjetaTxt 0"/>
+          <p:cNvSpPr txBox="1"/>
+          <p:nvPr/>
+        </p:nvSpPr>
+        <p:spPr>
+          <a:xfrm>
+            <a:off x="548640" y="2724912"/>
+            <a:ext cx="2526030" cy="587502"/>
+          </a:xfrm>
+          <a:prstGeom prst="rect">
+            <a:avLst/>
+          </a:prstGeom>
+          <a:noFill/>
+        </p:spPr>
+        <p:txBody>
+          <a:bodyPr wrap="square" anchor="t" lIns="45720" rIns="45720" tIns="27432" bIns="27432">
+            <a:normAutofit/>
+          </a:bodyPr>
+          <a:lstStyle/>
+          <a:p>
+            <a:pPr algn="l"/>
+            <a:r>
+              <a:rPr sz="1100" b="1">
+                <a:solidFill>
+                  <a:srgbClr val="5B3E83"/>
+                </a:solidFill>
+                <a:latin typeface="Bricolage Grotesque"/>
+              </a:rPr>
+              <a:t>ejemplo</a:t>
+            </a:r>
+          </a:p>
+          <a:p>
+            <a:pPr algn="l"/>
+            <a:r>
+              <a:rPr sz="1000">
+                <a:solidFill>
+                  <a:srgbClr val="20242E"/>
+                </a:solidFill>
+                <a:latin typeface="Inter"/>
+              </a:rPr>
+              <a:t>Es importante llegar a tiempo.</a:t>
+            </a:r>
+          </a:p>
+        </p:txBody>
+      </p:sp>
+      <p:sp>
+        <p:nvSpPr>
+          <p:cNvPr id="13" name="Onthul 0"/>
+          <p:cNvSpPr/>
+          <p:nvPr/>
+        </p:nvSpPr>
+        <p:spPr>
+          <a:xfrm>
+            <a:off x="548640" y="3275838"/>
+            <a:ext cx="2526030" cy="237744"/>
+          </a:xfrm>
+          <a:prstGeom prst="roundRect">
+            <a:avLst>
+              <a:gd name="adj" fmla="val 20000"/>
+            </a:avLst>
+          </a:prstGeom>
+          <a:solidFill>
+            <a:srgbClr val="EEE8F5"/>
+          </a:solidFill>
+          <a:ln>
+            <a:noFill/>
+          </a:ln>
+          <a:effectLst/>
+        </p:spPr>
+        <p:style>
+          <a:lnRef idx="1">
+            <a:schemeClr val="accent1"/>
+          </a:lnRef>
+          <a:fillRef idx="3">
+            <a:schemeClr val="accent1"/>
+          </a:fillRef>
+          <a:effectRef idx="2">
+            <a:schemeClr val="accent1"/>
+          </a:effectRef>
+          <a:fontRef idx="minor">
+            <a:schemeClr val="lt1"/>
+          </a:fontRef>
+        </p:style>
+        <p:txBody>
+          <a:bodyPr rtlCol="0" anchor="ctr"/>
+          <a:lstStyle/>
+          <a:p/>
+        </p:txBody>
+      </p:sp>
+      <p:sp>
+        <p:nvSpPr>
+          <p:cNvPr id="14" name="OnthulTxt 0"/>
+          <p:cNvSpPr txBox="1"/>
+          <p:nvPr/>
+        </p:nvSpPr>
+        <p:spPr>
+          <a:xfrm>
+            <a:off x="566928" y="3275838"/>
+            <a:ext cx="2489454" cy="237744"/>
+          </a:xfrm>
+          <a:prstGeom prst="rect">
+            <a:avLst/>
+          </a:prstGeom>
+          <a:noFill/>
+        </p:spPr>
+        <p:txBody>
+          <a:bodyPr wrap="square" anchor="ctr" lIns="45720" rIns="45720" tIns="27432" bIns="27432">
+            <a:normAutofit/>
+          </a:bodyPr>
+          <a:lstStyle/>
+          <a:p>
+            <a:pPr algn="l"/>
+            <a:r>
+              <a:rPr sz="850" b="1">
+                <a:solidFill>
+                  <a:srgbClr val="5B3E83"/>
+                </a:solidFill>
+                <a:latin typeface="Inter"/>
+              </a:rPr>
+              <a:t>una regla de todos</a:t>
+            </a:r>
+          </a:p>
+        </p:txBody>
+      </p:sp>
+      <p:sp>
+        <p:nvSpPr>
+          <p:cNvPr id="15" name="Tarjeta 1"/>
+          <p:cNvSpPr/>
+          <p:nvPr/>
+        </p:nvSpPr>
+        <p:spPr>
+          <a:xfrm>
+            <a:off x="3312414" y="2670048"/>
+            <a:ext cx="2708910" cy="898398"/>
+          </a:xfrm>
+          <a:prstGeom prst="roundRect">
+            <a:avLst>
+              <a:gd name="adj" fmla="val 6000"/>
+            </a:avLst>
+          </a:prstGeom>
+          <a:solidFill>
+            <a:srgbClr val="FFFFFF"/>
+          </a:solidFill>
+          <a:ln w="12700">
+            <a:solidFill>
+              <a:srgbClr val="E4E3DE"/>
+            </a:solidFill>
+          </a:ln>
+          <a:effectLst/>
+        </p:spPr>
+        <p:style>
+          <a:lnRef idx="1">
+            <a:schemeClr val="accent1"/>
+          </a:lnRef>
+          <a:fillRef idx="3">
+            <a:schemeClr val="accent1"/>
+          </a:fillRef>
+          <a:effectRef idx="2">
+            <a:schemeClr val="accent1"/>
+          </a:effectRef>
+          <a:fontRef idx="minor">
+            <a:schemeClr val="lt1"/>
+          </a:fontRef>
+        </p:style>
+        <p:txBody>
+          <a:bodyPr rtlCol="0" anchor="ctr"/>
+          <a:lstStyle/>
+          <a:p/>
+        </p:txBody>
+      </p:sp>
+      <p:sp>
+        <p:nvSpPr>
+          <p:cNvPr id="16" name="TarjetaTxt 1"/>
+          <p:cNvSpPr txBox="1"/>
+          <p:nvPr/>
+        </p:nvSpPr>
+        <p:spPr>
+          <a:xfrm>
+            <a:off x="3403854" y="2724912"/>
+            <a:ext cx="2526030" cy="587502"/>
+          </a:xfrm>
+          <a:prstGeom prst="rect">
+            <a:avLst/>
+          </a:prstGeom>
+          <a:noFill/>
+        </p:spPr>
+        <p:txBody>
+          <a:bodyPr wrap="square" anchor="t" lIns="45720" rIns="45720" tIns="27432" bIns="27432">
+            <a:normAutofit/>
+          </a:bodyPr>
+          <a:lstStyle/>
+          <a:p>
+            <a:pPr algn="l"/>
+            <a:r>
+              <a:rPr sz="1100" b="1">
+                <a:solidFill>
+                  <a:srgbClr val="5B3E83"/>
+                </a:solidFill>
+                <a:latin typeface="Bricolage Grotesque"/>
+              </a:rPr>
+              <a:t>ejemplo</a:t>
+            </a:r>
+          </a:p>
+          <a:p>
+            <a:pPr algn="l"/>
+            <a:r>
+              <a:rPr sz="1000">
+                <a:solidFill>
+                  <a:srgbClr val="20242E"/>
+                </a:solidFill>
+                <a:latin typeface="Inter"/>
+              </a:rPr>
+              <a:t>Está prohibido usar el móvil en los ejercicios orales.</a:t>
+            </a:r>
+          </a:p>
+        </p:txBody>
+      </p:sp>
+      <p:sp>
+        <p:nvSpPr>
+          <p:cNvPr id="17" name="Onthul 1"/>
+          <p:cNvSpPr/>
+          <p:nvPr/>
+        </p:nvSpPr>
+        <p:spPr>
+          <a:xfrm>
+            <a:off x="3403854" y="3275838"/>
+            <a:ext cx="2526030" cy="237744"/>
+          </a:xfrm>
+          <a:prstGeom prst="roundRect">
+            <a:avLst>
+              <a:gd name="adj" fmla="val 20000"/>
+            </a:avLst>
+          </a:prstGeom>
+          <a:solidFill>
+            <a:srgbClr val="EEE8F5"/>
+          </a:solidFill>
+          <a:ln>
+            <a:noFill/>
+          </a:ln>
+          <a:effectLst/>
+        </p:spPr>
+        <p:style>
+          <a:lnRef idx="1">
+            <a:schemeClr val="accent1"/>
+          </a:lnRef>
+          <a:fillRef idx="3">
+            <a:schemeClr val="accent1"/>
+          </a:fillRef>
+          <a:effectRef idx="2">
+            <a:schemeClr val="accent1"/>
+          </a:effectRef>
+          <a:fontRef idx="minor">
+            <a:schemeClr val="lt1"/>
+          </a:fontRef>
+        </p:style>
+        <p:txBody>
+          <a:bodyPr rtlCol="0" anchor="ctr"/>
+          <a:lstStyle/>
+          <a:p/>
+        </p:txBody>
+      </p:sp>
+      <p:sp>
+        <p:nvSpPr>
+          <p:cNvPr id="18" name="OnthulTxt 1"/>
+          <p:cNvSpPr txBox="1"/>
+          <p:nvPr/>
+        </p:nvSpPr>
+        <p:spPr>
+          <a:xfrm>
+            <a:off x="3422142" y="3275838"/>
+            <a:ext cx="2489454" cy="237744"/>
+          </a:xfrm>
+          <a:prstGeom prst="rect">
+            <a:avLst/>
+          </a:prstGeom>
+          <a:noFill/>
+        </p:spPr>
+        <p:txBody>
+          <a:bodyPr wrap="square" anchor="ctr" lIns="45720" rIns="45720" tIns="27432" bIns="27432">
+            <a:normAutofit/>
+          </a:bodyPr>
+          <a:lstStyle/>
+          <a:p>
+            <a:pPr algn="l"/>
+            <a:r>
+              <a:rPr sz="850" b="1">
+                <a:solidFill>
+                  <a:srgbClr val="5B3E83"/>
+                </a:solidFill>
+                <a:latin typeface="Inter"/>
+              </a:rPr>
+              <a:t>una prohibición</a:t>
+            </a:r>
+          </a:p>
+        </p:txBody>
+      </p:sp>
+      <p:sp>
+        <p:nvSpPr>
+          <p:cNvPr id="19" name="Tarjeta 2"/>
+          <p:cNvSpPr/>
+          <p:nvPr/>
+        </p:nvSpPr>
+        <p:spPr>
+          <a:xfrm>
+            <a:off x="6167628" y="2670048"/>
+            <a:ext cx="2708910" cy="898398"/>
+          </a:xfrm>
+          <a:prstGeom prst="roundRect">
+            <a:avLst>
+              <a:gd name="adj" fmla="val 6000"/>
+            </a:avLst>
+          </a:prstGeom>
+          <a:solidFill>
+            <a:srgbClr val="FFFFFF"/>
+          </a:solidFill>
+          <a:ln w="12700">
+            <a:solidFill>
+              <a:srgbClr val="E4E3DE"/>
+            </a:solidFill>
+          </a:ln>
+          <a:effectLst/>
+        </p:spPr>
+        <p:style>
+          <a:lnRef idx="1">
+            <a:schemeClr val="accent1"/>
+          </a:lnRef>
+          <a:fillRef idx="3">
+            <a:schemeClr val="accent1"/>
+          </a:fillRef>
+          <a:effectRef idx="2">
+            <a:schemeClr val="accent1"/>
+          </a:effectRef>
+          <a:fontRef idx="minor">
+            <a:schemeClr val="lt1"/>
+          </a:fontRef>
+        </p:style>
+        <p:txBody>
+          <a:bodyPr rtlCol="0" anchor="ctr"/>
+          <a:lstStyle/>
+          <a:p/>
+        </p:txBody>
+      </p:sp>
+      <p:sp>
+        <p:nvSpPr>
+          <p:cNvPr id="20" name="TarjetaTxt 2"/>
+          <p:cNvSpPr txBox="1"/>
+          <p:nvPr/>
+        </p:nvSpPr>
+        <p:spPr>
+          <a:xfrm>
+            <a:off x="6259068" y="2724912"/>
+            <a:ext cx="2526030" cy="587502"/>
+          </a:xfrm>
+          <a:prstGeom prst="rect">
+            <a:avLst/>
+          </a:prstGeom>
+          <a:noFill/>
+        </p:spPr>
+        <p:txBody>
+          <a:bodyPr wrap="square" anchor="t" lIns="45720" rIns="45720" tIns="27432" bIns="27432">
+            <a:normAutofit/>
+          </a:bodyPr>
+          <a:lstStyle/>
+          <a:p>
+            <a:pPr algn="l"/>
+            <a:r>
+              <a:rPr sz="1100" b="1">
+                <a:solidFill>
+                  <a:srgbClr val="5B3E83"/>
+                </a:solidFill>
+                <a:latin typeface="Bricolage Grotesque"/>
+              </a:rPr>
+              <a:t>ejemplo</a:t>
+            </a:r>
+          </a:p>
+          <a:p>
+            <a:pPr algn="l"/>
+            <a:r>
+              <a:rPr sz="1000">
+                <a:solidFill>
+                  <a:srgbClr val="20242E"/>
+                </a:solidFill>
+                <a:latin typeface="Inter"/>
+              </a:rPr>
+              <a:t>Es normal equivocarse: así se aprende.</a:t>
+            </a:r>
+          </a:p>
+        </p:txBody>
+      </p:sp>
+      <p:sp>
+        <p:nvSpPr>
+          <p:cNvPr id="21" name="Onthul 2"/>
+          <p:cNvSpPr/>
+          <p:nvPr/>
+        </p:nvSpPr>
+        <p:spPr>
+          <a:xfrm>
+            <a:off x="6259068" y="3275838"/>
+            <a:ext cx="2526030" cy="237744"/>
+          </a:xfrm>
+          <a:prstGeom prst="roundRect">
+            <a:avLst>
+              <a:gd name="adj" fmla="val 20000"/>
+            </a:avLst>
+          </a:prstGeom>
+          <a:solidFill>
+            <a:srgbClr val="EEE8F5"/>
+          </a:solidFill>
+          <a:ln>
+            <a:noFill/>
+          </a:ln>
+          <a:effectLst/>
+        </p:spPr>
+        <p:style>
+          <a:lnRef idx="1">
+            <a:schemeClr val="accent1"/>
+          </a:lnRef>
+          <a:fillRef idx="3">
+            <a:schemeClr val="accent1"/>
+          </a:fillRef>
+          <a:effectRef idx="2">
+            <a:schemeClr val="accent1"/>
+          </a:effectRef>
+          <a:fontRef idx="minor">
+            <a:schemeClr val="lt1"/>
+          </a:fontRef>
+        </p:style>
+        <p:txBody>
+          <a:bodyPr rtlCol="0" anchor="ctr"/>
+          <a:lstStyle/>
+          <a:p/>
+        </p:txBody>
+      </p:sp>
+      <p:sp>
+        <p:nvSpPr>
+          <p:cNvPr id="22" name="OnthulTxt 2"/>
+          <p:cNvSpPr txBox="1"/>
+          <p:nvPr/>
+        </p:nvSpPr>
+        <p:spPr>
+          <a:xfrm>
+            <a:off x="6277356" y="3275838"/>
+            <a:ext cx="2489454" cy="237744"/>
+          </a:xfrm>
+          <a:prstGeom prst="rect">
+            <a:avLst/>
+          </a:prstGeom>
+          <a:noFill/>
+        </p:spPr>
+        <p:txBody>
+          <a:bodyPr wrap="square" anchor="ctr" lIns="45720" rIns="45720" tIns="27432" bIns="27432">
+            <a:normAutofit/>
+          </a:bodyPr>
+          <a:lstStyle/>
+          <a:p>
+            <a:pPr algn="l"/>
+            <a:r>
+              <a:rPr sz="850" b="1">
+                <a:solidFill>
+                  <a:srgbClr val="5B3E83"/>
+                </a:solidFill>
+                <a:latin typeface="Inter"/>
+              </a:rPr>
+              <a:t>el clima de la clase</a:t>
+            </a:r>
+          </a:p>
+        </p:txBody>
+      </p:sp>
+      <p:sp>
+        <p:nvSpPr>
+          <p:cNvPr id="23" name="Tarjeta 3"/>
+          <p:cNvSpPr/>
+          <p:nvPr/>
+        </p:nvSpPr>
+        <p:spPr>
+          <a:xfrm>
+            <a:off x="9022842" y="2670048"/>
+            <a:ext cx="2708910" cy="898398"/>
+          </a:xfrm>
+          <a:prstGeom prst="roundRect">
+            <a:avLst>
+              <a:gd name="adj" fmla="val 6000"/>
+            </a:avLst>
+          </a:prstGeom>
+          <a:solidFill>
+            <a:srgbClr val="FFFFFF"/>
+          </a:solidFill>
+          <a:ln w="12700">
+            <a:solidFill>
+              <a:srgbClr val="E4E3DE"/>
+            </a:solidFill>
+          </a:ln>
+          <a:effectLst/>
+        </p:spPr>
+        <p:style>
+          <a:lnRef idx="1">
+            <a:schemeClr val="accent1"/>
+          </a:lnRef>
+          <a:fillRef idx="3">
+            <a:schemeClr val="accent1"/>
+          </a:fillRef>
+          <a:effectRef idx="2">
+            <a:schemeClr val="accent1"/>
+          </a:effectRef>
+          <a:fontRef idx="minor">
+            <a:schemeClr val="lt1"/>
+          </a:fontRef>
+        </p:style>
+        <p:txBody>
+          <a:bodyPr rtlCol="0" anchor="ctr"/>
+          <a:lstStyle/>
+          <a:p/>
+        </p:txBody>
+      </p:sp>
+      <p:sp>
+        <p:nvSpPr>
+          <p:cNvPr id="24" name="TarjetaTxt 3"/>
+          <p:cNvSpPr txBox="1"/>
+          <p:nvPr/>
+        </p:nvSpPr>
+        <p:spPr>
+          <a:xfrm>
+            <a:off x="9114282" y="2724912"/>
+            <a:ext cx="2526030" cy="587502"/>
+          </a:xfrm>
+          <a:prstGeom prst="rect">
+            <a:avLst/>
+          </a:prstGeom>
+          <a:noFill/>
+        </p:spPr>
+        <p:txBody>
+          <a:bodyPr wrap="square" anchor="t" lIns="45720" rIns="45720" tIns="27432" bIns="27432">
+            <a:normAutofit/>
+          </a:bodyPr>
+          <a:lstStyle/>
+          <a:p>
+            <a:pPr algn="l"/>
+            <a:r>
+              <a:rPr sz="1100" b="1">
+                <a:solidFill>
+                  <a:srgbClr val="5B3E83"/>
+                </a:solidFill>
+                <a:latin typeface="Bricolage Grotesque"/>
+              </a:rPr>
+              <a:t>ejemplo</a:t>
+            </a:r>
+          </a:p>
+          <a:p>
+            <a:pPr algn="l"/>
+            <a:r>
+              <a:rPr sz="1000">
+                <a:solidFill>
+                  <a:srgbClr val="20242E"/>
+                </a:solidFill>
+                <a:latin typeface="Inter"/>
+              </a:rPr>
+              <a:t>Estamos aquí para hablar, no solo para escribir.</a:t>
+            </a:r>
+          </a:p>
+        </p:txBody>
+      </p:sp>
+      <p:sp>
+        <p:nvSpPr>
+          <p:cNvPr id="25" name="Onthul 3"/>
+          <p:cNvSpPr/>
+          <p:nvPr/>
+        </p:nvSpPr>
+        <p:spPr>
+          <a:xfrm>
+            <a:off x="9114282" y="3275838"/>
+            <a:ext cx="2526030" cy="237744"/>
+          </a:xfrm>
+          <a:prstGeom prst="roundRect">
+            <a:avLst>
+              <a:gd name="adj" fmla="val 20000"/>
+            </a:avLst>
+          </a:prstGeom>
+          <a:solidFill>
+            <a:srgbClr val="EEE8F5"/>
+          </a:solidFill>
+          <a:ln>
+            <a:noFill/>
+          </a:ln>
+          <a:effectLst/>
+        </p:spPr>
+        <p:style>
+          <a:lnRef idx="1">
+            <a:schemeClr val="accent1"/>
+          </a:lnRef>
+          <a:fillRef idx="3">
+            <a:schemeClr val="accent1"/>
+          </a:fillRef>
+          <a:effectRef idx="2">
+            <a:schemeClr val="accent1"/>
+          </a:effectRef>
+          <a:fontRef idx="minor">
+            <a:schemeClr val="lt1"/>
+          </a:fontRef>
+        </p:style>
+        <p:txBody>
+          <a:bodyPr rtlCol="0" anchor="ctr"/>
+          <a:lstStyle/>
+          <a:p/>
+        </p:txBody>
+      </p:sp>
+      <p:sp>
+        <p:nvSpPr>
+          <p:cNvPr id="26" name="OnthulTxt 3"/>
+          <p:cNvSpPr txBox="1"/>
+          <p:nvPr/>
+        </p:nvSpPr>
+        <p:spPr>
+          <a:xfrm>
+            <a:off x="9132570" y="3275838"/>
+            <a:ext cx="2489454" cy="237744"/>
+          </a:xfrm>
+          <a:prstGeom prst="rect">
+            <a:avLst/>
+          </a:prstGeom>
+          <a:noFill/>
+        </p:spPr>
+        <p:txBody>
+          <a:bodyPr wrap="square" anchor="ctr" lIns="45720" rIns="45720" tIns="27432" bIns="27432">
+            <a:normAutofit/>
+          </a:bodyPr>
+          <a:lstStyle/>
+          <a:p>
+            <a:pPr algn="l"/>
+            <a:r>
+              <a:rPr sz="850" b="1">
+                <a:solidFill>
+                  <a:srgbClr val="5B3E83"/>
+                </a:solidFill>
+                <a:latin typeface="Inter"/>
+              </a:rPr>
+              <a:t>la prioridad</a:t>
+            </a:r>
+          </a:p>
+        </p:txBody>
+      </p:sp>
+      <p:sp>
+        <p:nvSpPr>
+          <p:cNvPr id="27" name="Tarjeta 4"/>
+          <p:cNvSpPr/>
+          <p:nvPr/>
+        </p:nvSpPr>
+        <p:spPr>
+          <a:xfrm>
+            <a:off x="457200" y="3696462"/>
+            <a:ext cx="2708910" cy="898398"/>
+          </a:xfrm>
+          <a:prstGeom prst="roundRect">
+            <a:avLst>
+              <a:gd name="adj" fmla="val 6000"/>
+            </a:avLst>
+          </a:prstGeom>
+          <a:solidFill>
+            <a:srgbClr val="FFFFFF"/>
+          </a:solidFill>
+          <a:ln w="12700">
+            <a:solidFill>
+              <a:srgbClr val="E4E3DE"/>
+            </a:solidFill>
+          </a:ln>
+          <a:effectLst/>
+        </p:spPr>
+        <p:style>
+          <a:lnRef idx="1">
+            <a:schemeClr val="accent1"/>
+          </a:lnRef>
+          <a:fillRef idx="3">
+            <a:schemeClr val="accent1"/>
+          </a:fillRef>
+          <a:effectRef idx="2">
+            <a:schemeClr val="accent1"/>
+          </a:effectRef>
+          <a:fontRef idx="minor">
+            <a:schemeClr val="lt1"/>
+          </a:fontRef>
+        </p:style>
+        <p:txBody>
+          <a:bodyPr rtlCol="0" anchor="ctr"/>
+          <a:lstStyle/>
+          <a:p/>
+        </p:txBody>
+      </p:sp>
+      <p:sp>
+        <p:nvSpPr>
+          <p:cNvPr id="28" name="TarjetaTxt 4"/>
+          <p:cNvSpPr txBox="1"/>
+          <p:nvPr/>
+        </p:nvSpPr>
+        <p:spPr>
+          <a:xfrm>
+            <a:off x="548640" y="3751326"/>
+            <a:ext cx="2526030" cy="587502"/>
+          </a:xfrm>
+          <a:prstGeom prst="rect">
+            <a:avLst/>
+          </a:prstGeom>
+          <a:noFill/>
+        </p:spPr>
+        <p:txBody>
+          <a:bodyPr wrap="square" anchor="t" lIns="45720" rIns="45720" tIns="27432" bIns="27432">
+            <a:normAutofit/>
+          </a:bodyPr>
+          <a:lstStyle/>
+          <a:p>
+            <a:pPr algn="l"/>
+            <a:r>
+              <a:rPr sz="1100" b="1">
+                <a:solidFill>
+                  <a:srgbClr val="5B3E83"/>
+                </a:solidFill>
+                <a:latin typeface="Bricolage Grotesque"/>
+              </a:rPr>
+              <a:t>ejemplo</a:t>
+            </a:r>
+          </a:p>
+          <a:p>
+            <a:pPr algn="l"/>
+            <a:r>
+              <a:rPr sz="1000">
+                <a:solidFill>
+                  <a:srgbClr val="20242E"/>
+                </a:solidFill>
+                <a:latin typeface="Inter"/>
+              </a:rPr>
+              <a:t>Es mejor preguntar que quedarse callado.</a:t>
+            </a:r>
+          </a:p>
+        </p:txBody>
+      </p:sp>
+      <p:sp>
+        <p:nvSpPr>
+          <p:cNvPr id="29" name="Onthul 4"/>
+          <p:cNvSpPr/>
+          <p:nvPr/>
+        </p:nvSpPr>
+        <p:spPr>
+          <a:xfrm>
+            <a:off x="548640" y="4302252"/>
+            <a:ext cx="2526030" cy="237744"/>
+          </a:xfrm>
+          <a:prstGeom prst="roundRect">
+            <a:avLst>
+              <a:gd name="adj" fmla="val 20000"/>
+            </a:avLst>
+          </a:prstGeom>
+          <a:solidFill>
+            <a:srgbClr val="EEE8F5"/>
+          </a:solidFill>
+          <a:ln>
+            <a:noFill/>
+          </a:ln>
+          <a:effectLst/>
+        </p:spPr>
+        <p:style>
+          <a:lnRef idx="1">
+            <a:schemeClr val="accent1"/>
+          </a:lnRef>
+          <a:fillRef idx="3">
+            <a:schemeClr val="accent1"/>
+          </a:fillRef>
+          <a:effectRef idx="2">
+            <a:schemeClr val="accent1"/>
+          </a:effectRef>
+          <a:fontRef idx="minor">
+            <a:schemeClr val="lt1"/>
+          </a:fontRef>
+        </p:style>
+        <p:txBody>
+          <a:bodyPr rtlCol="0" anchor="ctr"/>
+          <a:lstStyle/>
+          <a:p/>
+        </p:txBody>
+      </p:sp>
+      <p:sp>
+        <p:nvSpPr>
+          <p:cNvPr id="30" name="OnthulTxt 4"/>
+          <p:cNvSpPr txBox="1"/>
+          <p:nvPr/>
+        </p:nvSpPr>
+        <p:spPr>
+          <a:xfrm>
+            <a:off x="566928" y="4302252"/>
+            <a:ext cx="2489454" cy="237744"/>
+          </a:xfrm>
+          <a:prstGeom prst="rect">
+            <a:avLst/>
+          </a:prstGeom>
+          <a:noFill/>
+        </p:spPr>
+        <p:txBody>
+          <a:bodyPr wrap="square" anchor="ctr" lIns="45720" rIns="45720" tIns="27432" bIns="27432">
+            <a:normAutofit/>
+          </a:bodyPr>
+          <a:lstStyle/>
+          <a:p>
+            <a:pPr algn="l"/>
+            <a:r>
+              <a:rPr sz="850" b="1">
+                <a:solidFill>
+                  <a:srgbClr val="5B3E83"/>
+                </a:solidFill>
+                <a:latin typeface="Inter"/>
+              </a:rPr>
+              <a:t>una invitación</a:t>
+            </a:r>
+          </a:p>
+        </p:txBody>
+      </p:sp>
+      <p:sp>
+        <p:nvSpPr>
+          <p:cNvPr id="31" name="Tarjeta 5"/>
+          <p:cNvSpPr/>
+          <p:nvPr/>
+        </p:nvSpPr>
+        <p:spPr>
+          <a:xfrm>
+            <a:off x="3312414" y="3696462"/>
+            <a:ext cx="2708910" cy="898398"/>
+          </a:xfrm>
+          <a:prstGeom prst="roundRect">
+            <a:avLst>
+              <a:gd name="adj" fmla="val 6000"/>
+            </a:avLst>
+          </a:prstGeom>
+          <a:solidFill>
+            <a:srgbClr val="FFFFFF"/>
+          </a:solidFill>
+          <a:ln w="12700">
+            <a:solidFill>
+              <a:srgbClr val="E4E3DE"/>
+            </a:solidFill>
+          </a:ln>
+          <a:effectLst/>
+        </p:spPr>
+        <p:style>
+          <a:lnRef idx="1">
+            <a:schemeClr val="accent1"/>
+          </a:lnRef>
+          <a:fillRef idx="3">
+            <a:schemeClr val="accent1"/>
+          </a:fillRef>
+          <a:effectRef idx="2">
+            <a:schemeClr val="accent1"/>
+          </a:effectRef>
+          <a:fontRef idx="minor">
+            <a:schemeClr val="lt1"/>
+          </a:fontRef>
+        </p:style>
+        <p:txBody>
+          <a:bodyPr rtlCol="0" anchor="ctr"/>
+          <a:lstStyle/>
+          <a:p/>
+        </p:txBody>
+      </p:sp>
+      <p:sp>
+        <p:nvSpPr>
+          <p:cNvPr id="32" name="TarjetaTxt 5"/>
+          <p:cNvSpPr txBox="1"/>
+          <p:nvPr/>
+        </p:nvSpPr>
+        <p:spPr>
+          <a:xfrm>
+            <a:off x="3403854" y="3751326"/>
+            <a:ext cx="2526030" cy="788670"/>
+          </a:xfrm>
+          <a:prstGeom prst="rect">
+            <a:avLst/>
+          </a:prstGeom>
+          <a:noFill/>
+        </p:spPr>
+        <p:txBody>
+          <a:bodyPr wrap="square" anchor="t" lIns="45720" rIns="45720" tIns="27432" bIns="27432">
+            <a:normAutofit/>
+          </a:bodyPr>
+          <a:lstStyle/>
+          <a:p>
+            <a:pPr algn="l"/>
+            <a:r>
+              <a:rPr sz="1100" b="1">
+                <a:solidFill>
+                  <a:srgbClr val="5B3E83"/>
+                </a:solidFill>
+                <a:latin typeface="Bricolage Grotesque"/>
+              </a:rPr>
+              <a:t>marco</a:t>
+            </a:r>
+          </a:p>
+          <a:p>
+            <a:pPr algn="l"/>
+            <a:r>
+              <a:rPr sz="1000">
+                <a:solidFill>
+                  <a:srgbClr val="20242E"/>
+                </a:solidFill>
+                <a:latin typeface="Inter"/>
+              </a:rPr>
+              <a:t>Es importante …</a:t>
+            </a:r>
+          </a:p>
+        </p:txBody>
+      </p:sp>
+      <p:sp>
+        <p:nvSpPr>
+          <p:cNvPr id="33" name="Tarjeta 6"/>
+          <p:cNvSpPr/>
+          <p:nvPr/>
+        </p:nvSpPr>
+        <p:spPr>
+          <a:xfrm>
+            <a:off x="6167628" y="3696462"/>
+            <a:ext cx="2708910" cy="898398"/>
+          </a:xfrm>
+          <a:prstGeom prst="roundRect">
+            <a:avLst>
+              <a:gd name="adj" fmla="val 6000"/>
+            </a:avLst>
+          </a:prstGeom>
+          <a:solidFill>
+            <a:srgbClr val="FFFFFF"/>
+          </a:solidFill>
+          <a:ln w="12700">
+            <a:solidFill>
+              <a:srgbClr val="E4E3DE"/>
+            </a:solidFill>
+          </a:ln>
+          <a:effectLst/>
+        </p:spPr>
+        <p:style>
+          <a:lnRef idx="1">
+            <a:schemeClr val="accent1"/>
+          </a:lnRef>
+          <a:fillRef idx="3">
+            <a:schemeClr val="accent1"/>
+          </a:fillRef>
+          <a:effectRef idx="2">
+            <a:schemeClr val="accent1"/>
+          </a:effectRef>
+          <a:fontRef idx="minor">
+            <a:schemeClr val="lt1"/>
+          </a:fontRef>
+        </p:style>
+        <p:txBody>
+          <a:bodyPr rtlCol="0" anchor="ctr"/>
+          <a:lstStyle/>
+          <a:p/>
+        </p:txBody>
+      </p:sp>
+      <p:sp>
+        <p:nvSpPr>
+          <p:cNvPr id="34" name="TarjetaTxt 6"/>
+          <p:cNvSpPr txBox="1"/>
+          <p:nvPr/>
+        </p:nvSpPr>
+        <p:spPr>
+          <a:xfrm>
+            <a:off x="6259068" y="3751326"/>
+            <a:ext cx="2526030" cy="788670"/>
+          </a:xfrm>
+          <a:prstGeom prst="rect">
+            <a:avLst/>
+          </a:prstGeom>
+          <a:noFill/>
+        </p:spPr>
+        <p:txBody>
+          <a:bodyPr wrap="square" anchor="t" lIns="45720" rIns="45720" tIns="27432" bIns="27432">
+            <a:normAutofit/>
+          </a:bodyPr>
+          <a:lstStyle/>
+          <a:p>
+            <a:pPr algn="l"/>
+            <a:r>
+              <a:rPr sz="1100" b="1">
+                <a:solidFill>
+                  <a:srgbClr val="5B3E83"/>
+                </a:solidFill>
+                <a:latin typeface="Bricolage Grotesque"/>
+              </a:rPr>
+              <a:t>marco</a:t>
+            </a:r>
+          </a:p>
+          <a:p>
+            <a:pPr algn="l"/>
+            <a:r>
+              <a:rPr sz="1000">
+                <a:solidFill>
+                  <a:srgbClr val="20242E"/>
+                </a:solidFill>
+                <a:latin typeface="Inter"/>
+              </a:rPr>
+              <a:t>Está prohibido …</a:t>
+            </a:r>
+          </a:p>
+        </p:txBody>
+      </p:sp>
+      <p:sp>
+        <p:nvSpPr>
+          <p:cNvPr id="35" name="Tarjeta 7"/>
+          <p:cNvSpPr/>
+          <p:nvPr/>
+        </p:nvSpPr>
+        <p:spPr>
+          <a:xfrm>
+            <a:off x="9022842" y="3696462"/>
+            <a:ext cx="2708910" cy="898398"/>
+          </a:xfrm>
+          <a:prstGeom prst="roundRect">
+            <a:avLst>
+              <a:gd name="adj" fmla="val 6000"/>
+            </a:avLst>
+          </a:prstGeom>
+          <a:solidFill>
+            <a:srgbClr val="FFFFFF"/>
+          </a:solidFill>
+          <a:ln w="12700">
+            <a:solidFill>
+              <a:srgbClr val="E4E3DE"/>
+            </a:solidFill>
+          </a:ln>
+          <a:effectLst/>
+        </p:spPr>
+        <p:style>
+          <a:lnRef idx="1">
+            <a:schemeClr val="accent1"/>
+          </a:lnRef>
+          <a:fillRef idx="3">
+            <a:schemeClr val="accent1"/>
+          </a:fillRef>
+          <a:effectRef idx="2">
+            <a:schemeClr val="accent1"/>
+          </a:effectRef>
+          <a:fontRef idx="minor">
+            <a:schemeClr val="lt1"/>
+          </a:fontRef>
+        </p:style>
+        <p:txBody>
+          <a:bodyPr rtlCol="0" anchor="ctr"/>
+          <a:lstStyle/>
+          <a:p/>
+        </p:txBody>
+      </p:sp>
+      <p:sp>
+        <p:nvSpPr>
+          <p:cNvPr id="36" name="TarjetaTxt 7"/>
+          <p:cNvSpPr txBox="1"/>
+          <p:nvPr/>
+        </p:nvSpPr>
+        <p:spPr>
+          <a:xfrm>
+            <a:off x="9114282" y="3751326"/>
+            <a:ext cx="2526030" cy="788670"/>
+          </a:xfrm>
+          <a:prstGeom prst="rect">
+            <a:avLst/>
+          </a:prstGeom>
+          <a:noFill/>
+        </p:spPr>
+        <p:txBody>
+          <a:bodyPr wrap="square" anchor="t" lIns="45720" rIns="45720" tIns="27432" bIns="27432">
+            <a:normAutofit/>
+          </a:bodyPr>
+          <a:lstStyle/>
+          <a:p>
+            <a:pPr algn="l"/>
+            <a:r>
+              <a:rPr sz="1100" b="1">
+                <a:solidFill>
+                  <a:srgbClr val="5B3E83"/>
+                </a:solidFill>
+                <a:latin typeface="Bricolage Grotesque"/>
+              </a:rPr>
+              <a:t>marco</a:t>
+            </a:r>
+          </a:p>
+          <a:p>
+            <a:pPr algn="l"/>
+            <a:r>
+              <a:rPr sz="1000">
+                <a:solidFill>
+                  <a:srgbClr val="20242E"/>
+                </a:solidFill>
+                <a:latin typeface="Inter"/>
+              </a:rPr>
+              <a:t>Es mejor … que …</a:t>
+            </a:r>
+          </a:p>
+        </p:txBody>
+      </p:sp>
+      <p:sp>
+        <p:nvSpPr>
+          <p:cNvPr id="37" name="Tarjeta 8"/>
+          <p:cNvSpPr/>
+          <p:nvPr/>
+        </p:nvSpPr>
+        <p:spPr>
+          <a:xfrm>
+            <a:off x="457200" y="4722876"/>
+            <a:ext cx="2708910" cy="898398"/>
+          </a:xfrm>
+          <a:prstGeom prst="roundRect">
+            <a:avLst>
+              <a:gd name="adj" fmla="val 6000"/>
+            </a:avLst>
+          </a:prstGeom>
+          <a:solidFill>
+            <a:srgbClr val="FFFFFF"/>
+          </a:solidFill>
+          <a:ln w="12700">
+            <a:solidFill>
+              <a:srgbClr val="E4E3DE"/>
+            </a:solidFill>
+          </a:ln>
+          <a:effectLst/>
+        </p:spPr>
+        <p:style>
+          <a:lnRef idx="1">
+            <a:schemeClr val="accent1"/>
+          </a:lnRef>
+          <a:fillRef idx="3">
+            <a:schemeClr val="accent1"/>
+          </a:fillRef>
+          <a:effectRef idx="2">
+            <a:schemeClr val="accent1"/>
+          </a:effectRef>
+          <a:fontRef idx="minor">
+            <a:schemeClr val="lt1"/>
+          </a:fontRef>
+        </p:style>
+        <p:txBody>
+          <a:bodyPr rtlCol="0" anchor="ctr"/>
+          <a:lstStyle/>
+          <a:p/>
+        </p:txBody>
+      </p:sp>
+      <p:sp>
+        <p:nvSpPr>
+          <p:cNvPr id="38" name="TarjetaTxt 8"/>
+          <p:cNvSpPr txBox="1"/>
+          <p:nvPr/>
+        </p:nvSpPr>
+        <p:spPr>
+          <a:xfrm>
+            <a:off x="548640" y="4777740"/>
+            <a:ext cx="2526030" cy="788670"/>
+          </a:xfrm>
+          <a:prstGeom prst="rect">
+            <a:avLst/>
+          </a:prstGeom>
+          <a:noFill/>
+        </p:spPr>
+        <p:txBody>
+          <a:bodyPr wrap="square" anchor="t" lIns="45720" rIns="45720" tIns="27432" bIns="27432">
+            <a:normAutofit/>
+          </a:bodyPr>
+          <a:lstStyle/>
+          <a:p>
+            <a:pPr algn="l"/>
+            <a:r>
+              <a:rPr sz="1100" b="1">
+                <a:solidFill>
+                  <a:srgbClr val="5B3E83"/>
+                </a:solidFill>
+                <a:latin typeface="Bricolage Grotesque"/>
+              </a:rPr>
+              <a:t>marco</a:t>
+            </a:r>
+          </a:p>
+          <a:p>
+            <a:pPr algn="l"/>
+            <a:r>
+              <a:rPr sz="1000">
+                <a:solidFill>
+                  <a:srgbClr val="20242E"/>
+                </a:solidFill>
+                <a:latin typeface="Inter"/>
+              </a:rPr>
+              <a:t>Estamos aquí para …</a:t>
+            </a:r>
+          </a:p>
+        </p:txBody>
+      </p:sp>
+      <p:sp>
+        <p:nvSpPr>
+          <p:cNvPr id="39" name="Tarjeta 9"/>
+          <p:cNvSpPr/>
+          <p:nvPr/>
+        </p:nvSpPr>
+        <p:spPr>
+          <a:xfrm>
+            <a:off x="3312414" y="4722876"/>
+            <a:ext cx="2708910" cy="898398"/>
+          </a:xfrm>
+          <a:prstGeom prst="roundRect">
+            <a:avLst>
+              <a:gd name="adj" fmla="val 6000"/>
+            </a:avLst>
+          </a:prstGeom>
+          <a:solidFill>
+            <a:srgbClr val="FFFFFF"/>
+          </a:solidFill>
+          <a:ln w="12700">
+            <a:solidFill>
+              <a:srgbClr val="E4E3DE"/>
+            </a:solidFill>
+          </a:ln>
+          <a:effectLst/>
+        </p:spPr>
+        <p:style>
+          <a:lnRef idx="1">
+            <a:schemeClr val="accent1"/>
+          </a:lnRef>
+          <a:fillRef idx="3">
+            <a:schemeClr val="accent1"/>
+          </a:fillRef>
+          <a:effectRef idx="2">
+            <a:schemeClr val="accent1"/>
+          </a:effectRef>
+          <a:fontRef idx="minor">
+            <a:schemeClr val="lt1"/>
+          </a:fontRef>
+        </p:style>
+        <p:txBody>
+          <a:bodyPr rtlCol="0" anchor="ctr"/>
+          <a:lstStyle/>
+          <a:p/>
+        </p:txBody>
+      </p:sp>
+      <p:sp>
+        <p:nvSpPr>
+          <p:cNvPr id="40" name="TarjetaTxt 9"/>
+          <p:cNvSpPr txBox="1"/>
+          <p:nvPr/>
+        </p:nvSpPr>
+        <p:spPr>
+          <a:xfrm>
+            <a:off x="3403854" y="4777740"/>
+            <a:ext cx="2526030" cy="788670"/>
+          </a:xfrm>
+          <a:prstGeom prst="rect">
+            <a:avLst/>
+          </a:prstGeom>
+          <a:noFill/>
+        </p:spPr>
+        <p:txBody>
+          <a:bodyPr wrap="square" anchor="t" lIns="45720" rIns="45720" tIns="27432" bIns="27432">
+            <a:normAutofit/>
+          </a:bodyPr>
+          <a:lstStyle/>
+          <a:p>
+            <a:pPr algn="l"/>
+            <a:r>
+              <a:rPr sz="1100" b="1">
+                <a:solidFill>
+                  <a:srgbClr val="5B3E83"/>
+                </a:solidFill>
+                <a:latin typeface="Bricolage Grotesque"/>
+              </a:rPr>
+              <a:t>marco</a:t>
+            </a:r>
+          </a:p>
+          <a:p>
+            <a:pPr algn="l"/>
+            <a:r>
+              <a:rPr sz="1000">
+                <a:solidFill>
+                  <a:srgbClr val="20242E"/>
+                </a:solidFill>
+                <a:latin typeface="Inter"/>
+              </a:rPr>
+              <a:t>No es justo que …</a:t>
+            </a:r>
+          </a:p>
+        </p:txBody>
+      </p:sp>
+      <p:sp>
+        <p:nvSpPr>
+          <p:cNvPr id="41" name="Tarjeta 10"/>
+          <p:cNvSpPr/>
+          <p:nvPr/>
+        </p:nvSpPr>
+        <p:spPr>
+          <a:xfrm>
+            <a:off x="6167628" y="4722876"/>
+            <a:ext cx="2708910" cy="898398"/>
+          </a:xfrm>
+          <a:prstGeom prst="roundRect">
+            <a:avLst>
+              <a:gd name="adj" fmla="val 6000"/>
+            </a:avLst>
+          </a:prstGeom>
+          <a:solidFill>
+            <a:srgbClr val="FFFFFF"/>
+          </a:solidFill>
+          <a:ln w="12700">
+            <a:solidFill>
+              <a:srgbClr val="E4E3DE"/>
+            </a:solidFill>
+          </a:ln>
+          <a:effectLst/>
+        </p:spPr>
+        <p:style>
+          <a:lnRef idx="1">
+            <a:schemeClr val="accent1"/>
+          </a:lnRef>
+          <a:fillRef idx="3">
+            <a:schemeClr val="accent1"/>
+          </a:fillRef>
+          <a:effectRef idx="2">
+            <a:schemeClr val="accent1"/>
+          </a:effectRef>
+          <a:fontRef idx="minor">
+            <a:schemeClr val="lt1"/>
+          </a:fontRef>
+        </p:style>
+        <p:txBody>
+          <a:bodyPr rtlCol="0" anchor="ctr"/>
+          <a:lstStyle/>
+          <a:p/>
+        </p:txBody>
+      </p:sp>
+      <p:sp>
+        <p:nvSpPr>
+          <p:cNvPr id="42" name="TarjetaTxt 10"/>
+          <p:cNvSpPr txBox="1"/>
+          <p:nvPr/>
+        </p:nvSpPr>
+        <p:spPr>
+          <a:xfrm>
+            <a:off x="6259068" y="4777740"/>
+            <a:ext cx="2526030" cy="788670"/>
+          </a:xfrm>
+          <a:prstGeom prst="rect">
+            <a:avLst/>
+          </a:prstGeom>
+          <a:noFill/>
+        </p:spPr>
+        <p:txBody>
+          <a:bodyPr wrap="square" anchor="t" lIns="45720" rIns="45720" tIns="27432" bIns="27432">
+            <a:normAutofit/>
+          </a:bodyPr>
+          <a:lstStyle/>
+          <a:p>
+            <a:pPr algn="l"/>
+            <a:r>
+              <a:rPr sz="1100" b="1">
+                <a:solidFill>
+                  <a:srgbClr val="5B3E83"/>
+                </a:solidFill>
+                <a:latin typeface="Bricolage Grotesque"/>
+              </a:rPr>
+              <a:t>El dilema</a:t>
+            </a:r>
+          </a:p>
+          <a:p>
+            <a:pPr algn="l"/>
+            <a:r>
+              <a:rPr sz="1000">
+                <a:solidFill>
+                  <a:srgbClr val="20242E"/>
+                </a:solidFill>
+                <a:latin typeface="Inter"/>
+              </a:rPr>
+              <a:t>¿Se corrige delante de toda la clase o no?</a:t>
+            </a:r>
+          </a:p>
+        </p:txBody>
+      </p:sp>
+      <p:sp>
+        <p:nvSpPr>
+          <p:cNvPr id="43" name="Tarjeta 11"/>
+          <p:cNvSpPr/>
+          <p:nvPr/>
+        </p:nvSpPr>
+        <p:spPr>
+          <a:xfrm>
+            <a:off x="9022842" y="4722876"/>
+            <a:ext cx="2708910" cy="898398"/>
+          </a:xfrm>
+          <a:prstGeom prst="roundRect">
+            <a:avLst>
+              <a:gd name="adj" fmla="val 6000"/>
+            </a:avLst>
+          </a:prstGeom>
+          <a:solidFill>
+            <a:srgbClr val="FFFFFF"/>
+          </a:solidFill>
+          <a:ln w="12700">
+            <a:solidFill>
+              <a:srgbClr val="E4E3DE"/>
+            </a:solidFill>
+          </a:ln>
+          <a:effectLst/>
+        </p:spPr>
+        <p:style>
+          <a:lnRef idx="1">
+            <a:schemeClr val="accent1"/>
+          </a:lnRef>
+          <a:fillRef idx="3">
+            <a:schemeClr val="accent1"/>
+          </a:fillRef>
+          <a:effectRef idx="2">
+            <a:schemeClr val="accent1"/>
+          </a:effectRef>
+          <a:fontRef idx="minor">
+            <a:schemeClr val="lt1"/>
+          </a:fontRef>
+        </p:style>
+        <p:txBody>
+          <a:bodyPr rtlCol="0" anchor="ctr"/>
+          <a:lstStyle/>
+          <a:p/>
+        </p:txBody>
+      </p:sp>
+      <p:sp>
+        <p:nvSpPr>
+          <p:cNvPr id="44" name="TarjetaTxt 11"/>
+          <p:cNvSpPr txBox="1"/>
+          <p:nvPr/>
+        </p:nvSpPr>
+        <p:spPr>
+          <a:xfrm>
+            <a:off x="9114282" y="4777740"/>
+            <a:ext cx="2526030" cy="788670"/>
+          </a:xfrm>
+          <a:prstGeom prst="rect">
+            <a:avLst/>
+          </a:prstGeom>
+          <a:noFill/>
+        </p:spPr>
+        <p:txBody>
+          <a:bodyPr wrap="square" anchor="t" lIns="45720" rIns="45720" tIns="27432" bIns="27432">
+            <a:normAutofit/>
+          </a:bodyPr>
+          <a:lstStyle/>
+          <a:p>
+            <a:pPr algn="l"/>
+            <a:r>
+              <a:rPr sz="1100" b="1">
+                <a:solidFill>
+                  <a:srgbClr val="5B3E83"/>
+                </a:solidFill>
+                <a:latin typeface="Bricolage Grotesque"/>
+              </a:rPr>
+              <a:t>El dilema</a:t>
+            </a:r>
+          </a:p>
+          <a:p>
+            <a:pPr algn="l"/>
+            <a:r>
+              <a:rPr sz="1000">
+                <a:solidFill>
+                  <a:srgbClr val="20242E"/>
+                </a:solidFill>
+                <a:latin typeface="Inter"/>
+              </a:rPr>
+              <a:t>¿Se puede usar el traductor?</a:t>
+            </a:r>
+          </a:p>
+        </p:txBody>
+      </p:sp>
+      <p:sp>
+        <p:nvSpPr>
+          <p:cNvPr id="45" name="Tarjeta 12"/>
+          <p:cNvSpPr/>
+          <p:nvPr/>
+        </p:nvSpPr>
+        <p:spPr>
+          <a:xfrm>
+            <a:off x="457200" y="5749290"/>
+            <a:ext cx="2708910" cy="898398"/>
+          </a:xfrm>
+          <a:prstGeom prst="roundRect">
+            <a:avLst>
+              <a:gd name="adj" fmla="val 6000"/>
+            </a:avLst>
+          </a:prstGeom>
+          <a:solidFill>
+            <a:srgbClr val="FFFFFF"/>
+          </a:solidFill>
+          <a:ln w="12700">
+            <a:solidFill>
+              <a:srgbClr val="E4E3DE"/>
+            </a:solidFill>
+          </a:ln>
+          <a:effectLst/>
+        </p:spPr>
+        <p:style>
+          <a:lnRef idx="1">
+            <a:schemeClr val="accent1"/>
+          </a:lnRef>
+          <a:fillRef idx="3">
+            <a:schemeClr val="accent1"/>
+          </a:fillRef>
+          <a:effectRef idx="2">
+            <a:schemeClr val="accent1"/>
+          </a:effectRef>
+          <a:fontRef idx="minor">
+            <a:schemeClr val="lt1"/>
+          </a:fontRef>
+        </p:style>
+        <p:txBody>
+          <a:bodyPr rtlCol="0" anchor="ctr"/>
+          <a:lstStyle/>
+          <a:p/>
+        </p:txBody>
+      </p:sp>
+      <p:sp>
+        <p:nvSpPr>
+          <p:cNvPr id="46" name="TarjetaTxt 12"/>
+          <p:cNvSpPr txBox="1"/>
+          <p:nvPr/>
+        </p:nvSpPr>
+        <p:spPr>
+          <a:xfrm>
+            <a:off x="548640" y="5804154"/>
+            <a:ext cx="2526030" cy="788670"/>
+          </a:xfrm>
+          <a:prstGeom prst="rect">
+            <a:avLst/>
+          </a:prstGeom>
+          <a:noFill/>
+        </p:spPr>
+        <p:txBody>
+          <a:bodyPr wrap="square" anchor="t" lIns="45720" rIns="45720" tIns="27432" bIns="27432">
+            <a:normAutofit/>
+          </a:bodyPr>
+          <a:lstStyle/>
+          <a:p>
+            <a:pPr algn="l"/>
+            <a:r>
+              <a:rPr sz="1100" b="1">
+                <a:solidFill>
+                  <a:srgbClr val="5B3E83"/>
+                </a:solidFill>
+                <a:latin typeface="Bricolage Grotesque"/>
+              </a:rPr>
+              <a:t>El dilema</a:t>
+            </a:r>
+          </a:p>
+          <a:p>
+            <a:pPr algn="l"/>
+            <a:r>
+              <a:rPr sz="1000">
+                <a:solidFill>
+                  <a:srgbClr val="20242E"/>
+                </a:solidFill>
+                <a:latin typeface="Inter"/>
+              </a:rPr>
+              <a:t>¿Qué pasa si alguien no ha estudiado nunca español?</a:t>
+            </a:r>
+          </a:p>
+        </p:txBody>
+      </p:sp>
+    </p:spTree>
+  </p:cSld>
+  <p:clrMapOvr>
+    <a:masterClrMapping/>
+  </p:clrMapOvr>
+  <p:timing>
+    <p:tnLst>
+      <p:par>
+        <p:cTn id="1" dur="indefinite" restart="never" nodeType="tmRoot">
+          <p:childTnLst>
+            <p:seq concurrent="1" nextAc="seek">
+              <p:cTn id="2" dur="indefinite" nodeType="mainSeq">
+                <p:childTnLst>
+                  <p:par>
+                    <p:cTn id="5" fill="hold">
+                      <p:stCondLst>
+                        <p:cond delay="indefinite"/>
+                      </p:stCondLst>
+                      <p:childTnLst>
+                        <p:par>
+                          <p:cTn id="6" fill="hold">
+                            <p:stCondLst>
+                              <p:cond delay="0"/>
+                            </p:stCondLst>
+                            <p:childTnLst>
+                              <p:par>
+                                <p:cTn id="7" presetID="10" presetClass="entr" presetSubtype="0" fill="hold" grpId="0" nodeType="clickEffect">
+                                  <p:stCondLst>
+                                    <p:cond delay="0"/>
+                                  </p:stCondLst>
+                                  <p:childTnLst>
+                                    <p:set>
+                                      <p:cBhvr>
+                                        <p:cTn id="8" dur="1" fill="hold">
+                                          <p:stCondLst>
+                                            <p:cond delay="0"/>
+                                          </p:stCondLst>
+                                        </p:cTn>
+                                        <p:tgtEl>
+                                          <p:spTgt spid="13"/>
+                                        </p:tgtEl>
+                                        <p:attrNameLst>
+                                          <p:attrName>style.visibility</p:attrName>
+                                        </p:attrNameLst>
+                                      </p:cBhvr>
+                                      <p:to>
+                                        <p:strVal val="visible"/>
+                                      </p:to>
+                                    </p:set>
+                                    <p:animEffect transition="in" filter="fade">
+                                      <p:cBhvr>
+                                        <p:cTn id="9" dur="500"/>
+                                        <p:tgtEl>
+                                          <p:spTgt spid="13"/>
+                                        </p:tgtEl>
+                                      </p:cBhvr>
+                                    </p:animEffect>
+                                  </p:childTnLst>
+                                </p:cTn>
+                              </p:par>
+                            </p:childTnLst>
+                          </p:cTn>
+                        </p:par>
+                      </p:childTnLst>
+                    </p:cTn>
+                  </p:par>
+                  <p:par>
+                    <p:cTn id="10" fill="hold">
+                      <p:stCondLst>
+                        <p:cond delay="indefinite"/>
+                      </p:stCondLst>
+                      <p:childTnLst>
+                        <p:par>
+                          <p:cTn id="11" fill="hold">
+                            <p:stCondLst>
+                              <p:cond delay="0"/>
+                            </p:stCondLst>
+                            <p:childTnLst>
+                              <p:par>
+                                <p:cTn id="12" presetID="10" presetClass="entr" presetSubtype="0" fill="hold" grpId="0" nodeType="clickEffect">
+                                  <p:stCondLst>
+                                    <p:cond delay="0"/>
+                                  </p:stCondLst>
+                                  <p:childTnLst>
+                                    <p:set>
+                                      <p:cBhvr>
+                                        <p:cTn id="13" dur="1" fill="hold">
+                                          <p:stCondLst>
+                                            <p:cond delay="0"/>
+                                          </p:stCondLst>
+                                        </p:cTn>
+                                        <p:tgtEl>
+                                          <p:spTgt spid="14"/>
+                                        </p:tgtEl>
+                                        <p:attrNameLst>
+                                          <p:attrName>style.visibility</p:attrName>
+                                        </p:attrNameLst>
+                                      </p:cBhvr>
+                                      <p:to>
+                                        <p:strVal val="visible"/>
+                                      </p:to>
+                                    </p:set>
+                                    <p:animEffect transition="in" filter="fade">
+                                      <p:cBhvr>
+                                        <p:cTn id="14" dur="500"/>
+                                        <p:tgtEl>
+                                          <p:spTgt spid="14"/>
+                                        </p:tgtEl>
+                                      </p:cBhvr>
+                                    </p:animEffect>
+                                  </p:childTnLst>
+                                </p:cTn>
+                              </p:par>
+                            </p:childTnLst>
+                          </p:cTn>
+                        </p:par>
+                      </p:childTnLst>
+                    </p:cTn>
+                  </p:par>
+                  <p:par>
+                    <p:cTn id="15" fill="hold">
+                      <p:stCondLst>
+                        <p:cond delay="indefinite"/>
+                      </p:stCondLst>
+                      <p:childTnLst>
+                        <p:par>
+                          <p:cTn id="16" fill="hold">
+                            <p:stCondLst>
+                              <p:cond delay="0"/>
+                            </p:stCondLst>
+                            <p:childTnLst>
+                              <p:par>
+                                <p:cTn id="17" presetID="10" presetClass="entr" presetSubtype="0" fill="hold" grpId="0" nodeType="clickEffect">
+                                  <p:stCondLst>
+                                    <p:cond delay="0"/>
+                                  </p:stCondLst>
+                                  <p:childTnLst>
+                                    <p:set>
+                                      <p:cBhvr>
+                                        <p:cTn id="18" dur="1" fill="hold">
+                                          <p:stCondLst>
+                                            <p:cond delay="0"/>
+                                          </p:stCondLst>
+                                        </p:cTn>
+                                        <p:tgtEl>
+                                          <p:spTgt spid="17"/>
+                                        </p:tgtEl>
+                                        <p:attrNameLst>
+                                          <p:attrName>style.visibility</p:attrName>
+                                        </p:attrNameLst>
+                                      </p:cBhvr>
+                                      <p:to>
+                                        <p:strVal val="visible"/>
+                                      </p:to>
+                                    </p:set>
+                                    <p:animEffect transition="in" filter="fade">
+                                      <p:cBhvr>
+                                        <p:cTn id="19" dur="500"/>
+                                        <p:tgtEl>
+                                          <p:spTgt spid="17"/>
+                                        </p:tgtEl>
+                                      </p:cBhvr>
+                                    </p:animEffect>
+                                  </p:childTnLst>
+                                </p:cTn>
+                              </p:par>
+                            </p:childTnLst>
+                          </p:cTn>
+                        </p:par>
+                      </p:childTnLst>
+                    </p:cTn>
+                  </p:par>
+                  <p:par>
+                    <p:cTn id="20" fill="hold">
+                      <p:stCondLst>
+                        <p:cond delay="indefinite"/>
+                      </p:stCondLst>
+                      <p:childTnLst>
+                        <p:par>
+                          <p:cTn id="21" fill="hold">
+                            <p:stCondLst>
+                              <p:cond delay="0"/>
+                            </p:stCondLst>
+                            <p:childTnLst>
+                              <p:par>
+                                <p:cTn id="22" presetID="10" presetClass="entr" presetSubtype="0" fill="hold" grpId="0" nodeType="clickEffect">
+                                  <p:stCondLst>
+                                    <p:cond delay="0"/>
+                                  </p:stCondLst>
+                                  <p:childTnLst>
+                                    <p:set>
+                                      <p:cBhvr>
+                                        <p:cTn id="23" dur="1" fill="hold">
+                                          <p:stCondLst>
+                                            <p:cond delay="0"/>
+                                          </p:stCondLst>
+                                        </p:cTn>
+                                        <p:tgtEl>
+                                          <p:spTgt spid="18"/>
+                                        </p:tgtEl>
+                                        <p:attrNameLst>
+                                          <p:attrName>style.visibility</p:attrName>
+                                        </p:attrNameLst>
+                                      </p:cBhvr>
+                                      <p:to>
+                                        <p:strVal val="visible"/>
+                                      </p:to>
+                                    </p:set>
+                                    <p:animEffect transition="in" filter="fade">
+                                      <p:cBhvr>
+                                        <p:cTn id="24" dur="500"/>
+                                        <p:tgtEl>
+                                          <p:spTgt spid="18"/>
+                                        </p:tgtEl>
+                                      </p:cBhvr>
+                                    </p:animEffect>
+                                  </p:childTnLst>
+                                </p:cTn>
+                              </p:par>
+                            </p:childTnLst>
+                          </p:cTn>
+                        </p:par>
+                      </p:childTnLst>
+                    </p:cTn>
+                  </p:par>
+                  <p:par>
+                    <p:cTn id="25" fill="hold">
+                      <p:stCondLst>
+                        <p:cond delay="indefinite"/>
+                      </p:stCondLst>
+                      <p:childTnLst>
+                        <p:par>
+                          <p:cTn id="26" fill="hold">
+                            <p:stCondLst>
+                              <p:cond delay="0"/>
+                            </p:stCondLst>
+                            <p:childTnLst>
+                              <p:par>
+                                <p:cTn id="27" presetID="10" presetClass="entr" presetSubtype="0" fill="hold" grpId="0" nodeType="clickEffect">
+                                  <p:stCondLst>
+                                    <p:cond delay="0"/>
+                                  </p:stCondLst>
+                                  <p:childTnLst>
+                                    <p:set>
+                                      <p:cBhvr>
+                                        <p:cTn id="28" dur="1" fill="hold">
+                                          <p:stCondLst>
+                                            <p:cond delay="0"/>
+                                          </p:stCondLst>
+                                        </p:cTn>
+                                        <p:tgtEl>
+                                          <p:spTgt spid="21"/>
+                                        </p:tgtEl>
+                                        <p:attrNameLst>
+                                          <p:attrName>style.visibility</p:attrName>
+                                        </p:attrNameLst>
+                                      </p:cBhvr>
+                                      <p:to>
+                                        <p:strVal val="visible"/>
+                                      </p:to>
+                                    </p:set>
+                                    <p:animEffect transition="in" filter="fade">
+                                      <p:cBhvr>
+                                        <p:cTn id="29" dur="500"/>
+                                        <p:tgtEl>
+                                          <p:spTgt spid="21"/>
+                                        </p:tgtEl>
+                                      </p:cBhvr>
+                                    </p:animEffect>
+                                  </p:childTnLst>
+                                </p:cTn>
+                              </p:par>
+                            </p:childTnLst>
+                          </p:cTn>
+                        </p:par>
+                      </p:childTnLst>
+                    </p:cTn>
+                  </p:par>
+                  <p:par>
+                    <p:cTn id="30" fill="hold">
+                      <p:stCondLst>
+                        <p:cond delay="indefinite"/>
+                      </p:stCondLst>
+                      <p:childTnLst>
+                        <p:par>
+                          <p:cTn id="31" fill="hold">
+                            <p:stCondLst>
+                              <p:cond delay="0"/>
+                            </p:stCondLst>
+                            <p:childTnLst>
+                              <p:par>
+                                <p:cTn id="32" presetID="10" presetClass="entr" presetSubtype="0" fill="hold" grpId="0" nodeType="clickEffect">
+                                  <p:stCondLst>
+                                    <p:cond delay="0"/>
+                                  </p:stCondLst>
+                                  <p:childTnLst>
+                                    <p:set>
+                                      <p:cBhvr>
+                                        <p:cTn id="33" dur="1" fill="hold">
+                                          <p:stCondLst>
+                                            <p:cond delay="0"/>
+                                          </p:stCondLst>
+                                        </p:cTn>
+                                        <p:tgtEl>
+                                          <p:spTgt spid="22"/>
+                                        </p:tgtEl>
+                                        <p:attrNameLst>
+                                          <p:attrName>style.visibility</p:attrName>
+                                        </p:attrNameLst>
+                                      </p:cBhvr>
+                                      <p:to>
+                                        <p:strVal val="visible"/>
+                                      </p:to>
+                                    </p:set>
+                                    <p:animEffect transition="in" filter="fade">
+                                      <p:cBhvr>
+                                        <p:cTn id="34" dur="500"/>
+                                        <p:tgtEl>
+                                          <p:spTgt spid="22"/>
+                                        </p:tgtEl>
+                                      </p:cBhvr>
+                                    </p:animEffect>
+                                  </p:childTnLst>
+                                </p:cTn>
+                              </p:par>
+                            </p:childTnLst>
+                          </p:cTn>
+                        </p:par>
+                      </p:childTnLst>
+                    </p:cTn>
+                  </p:par>
+                  <p:par>
+                    <p:cTn id="35" fill="hold">
+                      <p:stCondLst>
+                        <p:cond delay="indefinite"/>
+                      </p:stCondLst>
+                      <p:childTnLst>
+                        <p:par>
+                          <p:cTn id="36" fill="hold">
+                            <p:stCondLst>
+                              <p:cond delay="0"/>
+                            </p:stCondLst>
+                            <p:childTnLst>
+                              <p:par>
+                                <p:cTn id="37" presetID="10" presetClass="entr" presetSubtype="0" fill="hold" grpId="0" nodeType="clickEffect">
+                                  <p:stCondLst>
+                                    <p:cond delay="0"/>
+                                  </p:stCondLst>
+                                  <p:childTnLst>
+                                    <p:set>
+                                      <p:cBhvr>
+                                        <p:cTn id="38" dur="1" fill="hold">
+                                          <p:stCondLst>
+                                            <p:cond delay="0"/>
+                                          </p:stCondLst>
+                                        </p:cTn>
+                                        <p:tgtEl>
+                                          <p:spTgt spid="25"/>
+                                        </p:tgtEl>
+                                        <p:attrNameLst>
+                                          <p:attrName>style.visibility</p:attrName>
+                                        </p:attrNameLst>
+                                      </p:cBhvr>
+                                      <p:to>
+                                        <p:strVal val="visible"/>
+                                      </p:to>
+                                    </p:set>
+                                    <p:animEffect transition="in" filter="fade">
+                                      <p:cBhvr>
+                                        <p:cTn id="39" dur="500"/>
+                                        <p:tgtEl>
+                                          <p:spTgt spid="25"/>
+                                        </p:tgtEl>
+                                      </p:cBhvr>
+                                    </p:animEffect>
+                                  </p:childTnLst>
+                                </p:cTn>
+                              </p:par>
+                            </p:childTnLst>
+                          </p:cTn>
+                        </p:par>
+                      </p:childTnLst>
+                    </p:cTn>
+                  </p:par>
+                  <p:par>
+                    <p:cTn id="40" fill="hold">
+                      <p:stCondLst>
+                        <p:cond delay="indefinite"/>
+                      </p:stCondLst>
+                      <p:childTnLst>
+                        <p:par>
+                          <p:cTn id="41" fill="hold">
+                            <p:stCondLst>
+                              <p:cond delay="0"/>
+                            </p:stCondLst>
+                            <p:childTnLst>
+                              <p:par>
+                                <p:cTn id="42" presetID="10" presetClass="entr" presetSubtype="0" fill="hold" grpId="0" nodeType="clickEffect">
+                                  <p:stCondLst>
+                                    <p:cond delay="0"/>
+                                  </p:stCondLst>
+                                  <p:childTnLst>
+                                    <p:set>
+                                      <p:cBhvr>
+                                        <p:cTn id="43" dur="1" fill="hold">
+                                          <p:stCondLst>
+                                            <p:cond delay="0"/>
+                                          </p:stCondLst>
+                                        </p:cTn>
+                                        <p:tgtEl>
+                                          <p:spTgt spid="26"/>
+                                        </p:tgtEl>
+                                        <p:attrNameLst>
+                                          <p:attrName>style.visibility</p:attrName>
+                                        </p:attrNameLst>
+                                      </p:cBhvr>
+                                      <p:to>
+                                        <p:strVal val="visible"/>
+                                      </p:to>
+                                    </p:set>
+                                    <p:animEffect transition="in" filter="fade">
+                                      <p:cBhvr>
+                                        <p:cTn id="44" dur="500"/>
+                                        <p:tgtEl>
+                                          <p:spTgt spid="26"/>
+                                        </p:tgtEl>
+                                      </p:cBhvr>
+                                    </p:animEffect>
+                                  </p:childTnLst>
+                                </p:cTn>
+                              </p:par>
+                            </p:childTnLst>
+                          </p:cTn>
+                        </p:par>
+                      </p:childTnLst>
+                    </p:cTn>
+                  </p:par>
+                  <p:par>
+                    <p:cTn id="45" fill="hold">
+                      <p:stCondLst>
+                        <p:cond delay="indefinite"/>
+                      </p:stCondLst>
+                      <p:childTnLst>
+                        <p:par>
+                          <p:cTn id="46" fill="hold">
+                            <p:stCondLst>
+                              <p:cond delay="0"/>
+                            </p:stCondLst>
+                            <p:childTnLst>
+                              <p:par>
+                                <p:cTn id="47" presetID="10" presetClass="entr" presetSubtype="0" fill="hold" grpId="0" nodeType="clickEffect">
+                                  <p:stCondLst>
+                                    <p:cond delay="0"/>
+                                  </p:stCondLst>
+                                  <p:childTnLst>
+                                    <p:set>
+                                      <p:cBhvr>
+                                        <p:cTn id="48" dur="1" fill="hold">
+                                          <p:stCondLst>
+                                            <p:cond delay="0"/>
+                                          </p:stCondLst>
+                                        </p:cTn>
+                                        <p:tgtEl>
+                                          <p:spTgt spid="29"/>
+                                        </p:tgtEl>
+                                        <p:attrNameLst>
+                                          <p:attrName>style.visibility</p:attrName>
+                                        </p:attrNameLst>
+                                      </p:cBhvr>
+                                      <p:to>
+                                        <p:strVal val="visible"/>
+                                      </p:to>
+                                    </p:set>
+                                    <p:animEffect transition="in" filter="fade">
+                                      <p:cBhvr>
+                                        <p:cTn id="49" dur="500"/>
+                                        <p:tgtEl>
+                                          <p:spTgt spid="29"/>
+                                        </p:tgtEl>
+                                      </p:cBhvr>
+                                    </p:animEffect>
+                                  </p:childTnLst>
+                                </p:cTn>
+                              </p:par>
+                            </p:childTnLst>
+                          </p:cTn>
+                        </p:par>
+                      </p:childTnLst>
+                    </p:cTn>
+                  </p:par>
+                  <p:par>
+                    <p:cTn id="50" fill="hold">
+                      <p:stCondLst>
+                        <p:cond delay="indefinite"/>
+                      </p:stCondLst>
+                      <p:childTnLst>
+                        <p:par>
+                          <p:cTn id="51" fill="hold">
+                            <p:stCondLst>
+                              <p:cond delay="0"/>
+                            </p:stCondLst>
+                            <p:childTnLst>
+                              <p:par>
+                                <p:cTn id="52" presetID="10" presetClass="entr" presetSubtype="0" fill="hold" grpId="0" nodeType="clickEffect">
+                                  <p:stCondLst>
+                                    <p:cond delay="0"/>
+                                  </p:stCondLst>
+                                  <p:childTnLst>
+                                    <p:set>
+                                      <p:cBhvr>
+                                        <p:cTn id="53" dur="1" fill="hold">
+                                          <p:stCondLst>
+                                            <p:cond delay="0"/>
+                                          </p:stCondLst>
+                                        </p:cTn>
+                                        <p:tgtEl>
+                                          <p:spTgt spid="30"/>
+                                        </p:tgtEl>
+                                        <p:attrNameLst>
+                                          <p:attrName>style.visibility</p:attrName>
+                                        </p:attrNameLst>
+                                      </p:cBhvr>
+                                      <p:to>
+                                        <p:strVal val="visible"/>
+                                      </p:to>
+                                    </p:set>
+                                    <p:animEffect transition="in" filter="fade">
+                                      <p:cBhvr>
+                                        <p:cTn id="54" dur="500"/>
+                                        <p:tgtEl>
+                                          <p:spTgt spid="30"/>
+                                        </p:tgtEl>
+                                      </p:cBhvr>
+                                    </p:animEffect>
+                                  </p:childTnLst>
+                                </p:cTn>
+                              </p:par>
+                            </p:childTnLst>
+                          </p:cTn>
+                        </p:par>
+                      </p:childTnLst>
+                    </p:cTn>
+                  </p:par>
+                </p:childTnLst>
+              </p:cTn>
+              <p:prevCondLst>
+                <p:cond evt="onPrev" delay="0">
+                  <p:tgtEl>
+                    <p:sldTgt/>
+                  </p:tgtEl>
+                </p:cond>
+              </p:prevCondLst>
+              <p:nextCondLst>
+                <p:cond evt="onNext" delay="0">
+                  <p:tgtEl>
+                    <p:sldTgt/>
+                  </p:tgtEl>
+                </p:cond>
+              </p:nextCondLst>
+            </p:seq>
+          </p:childTnLst>
+        </p:cTn>
+      </p:par>
+    </p:tnLst>
+  </p:timing>
 </p:sld>
 </file>
 
